--- a/public/templates/000_pm_suite/01_프로젝트 관리/01_통합관리/자원_관리_계획서_템플릿.pptx
+++ b/public/templates/000_pm_suite/01_프로젝트 관리/01_통합관리/자원_관리_계획서_템플릿.pptx
@@ -3265,7 +3265,7 @@
                 </a:solidFill>
                 <a:latin typeface="맑은 고딕"/>
               </a:rPr>
-              <a:t>산출물 ID : GRV_MAN_100   |   버전 : v1.0   |   표준 관리 템플릿</a:t>
+              <a:t>산출물 ID : EMP_MAN_100   |   버전 : v1.0   |   표준 관리 템플릿</a:t>
             </a:r>
           </a:p>
         </p:txBody>
@@ -3350,7 +3350,7 @@
                 </a:solidFill>
                 <a:latin typeface="맑은 고딕"/>
               </a:rPr>
-              <a:t>아모레퍼시픽 Claimworks-Claims AI 시스템 구축</a:t>
+              <a:t>한빛글로벌 SyncGuard AI 시스템 구축</a:t>
             </a:r>
           </a:p>
         </p:txBody>
@@ -3574,7 +3574,7 @@
                           </a:solidFill>
                           <a:latin typeface="맑은 고딕"/>
                         </a:rPr>
-                        <a:t>아모레퍼시픽 Claimworks-Claims AI 시스템 구축 용역</a:t>
+                        <a:t>한빛글로벌 SyncGuard AI 시스템 구축 용역</a:t>
                       </a:r>
                     </a:p>
                   </a:txBody>
@@ -3778,7 +3778,7 @@
                           </a:solidFill>
                           <a:latin typeface="맑은 고딕"/>
                         </a:rPr>
-                        <a:t>주식회사 아모레퍼시픽 (연구전략Lab / ERP플랫폼기획팀 / RA Lab)</a:t>
+                        <a:t>주식회사 한빛글로벌 (연구전략Lab / ERP플랫폼기획팀 / RA Lab)</a:t>
                       </a:r>
                     </a:p>
                   </a:txBody>
@@ -3880,7 +3880,7 @@
                           </a:solidFill>
                           <a:latin typeface="맑은 고딕"/>
                         </a:rPr>
-                        <a:t>주식회사 그로브소프트 (협력사: ㈜아이시프트)</a:t>
+                        <a:t>주식회사 엠파시 (협력사: ㈜데이터브릿지)</a:t>
                       </a:r>
                     </a:p>
                   </a:txBody>
@@ -4153,7 +4153,7 @@
                           </a:solidFill>
                           <a:latin typeface="맑은 고딕"/>
                         </a:rPr>
-                        <a:t>수행사 (그로브)</a:t>
+                        <a:t>수행사 (엠파시)</a:t>
                       </a:r>
                     </a:p>
                   </a:txBody>
@@ -4203,7 +4203,7 @@
                           </a:solidFill>
                           <a:latin typeface="맑은 고딕"/>
                         </a:rPr>
-                        <a:t>발주사 (아모레)</a:t>
+                        <a:t>발주사 (한빛글로벌)</a:t>
                       </a:r>
                     </a:p>
                   </a:txBody>
@@ -4305,7 +4305,7 @@
                           </a:solidFill>
                           <a:latin typeface="맑은 고딕"/>
                         </a:rPr>
-                        <a:t>김재은 PM</a:t>
+                        <a:t>김태윤 PM</a:t>
                       </a:r>
                     </a:p>
                   </a:txBody>
@@ -4355,7 +4355,7 @@
                           </a:solidFill>
                           <a:latin typeface="맑은 고딕"/>
                         </a:rPr>
-                        <a:t>박주열 PM</a:t>
+                        <a:t>정민수 PM</a:t>
                       </a:r>
                     </a:p>
                   </a:txBody>
@@ -4457,7 +4457,7 @@
                           </a:solidFill>
                           <a:latin typeface="맑은 고딕"/>
                         </a:rPr>
-                        <a:t>오병문 AA</a:t>
+                        <a:t>박준혁 AA</a:t>
                       </a:r>
                     </a:p>
                   </a:txBody>
@@ -4507,7 +4507,7 @@
                           </a:solidFill>
                           <a:latin typeface="맑은 고딕"/>
                         </a:rPr>
-                        <a:t>김경호 PM</a:t>
+                        <a:t>한승우 PM</a:t>
                       </a:r>
                     </a:p>
                   </a:txBody>
@@ -4913,7 +4913,7 @@
                 </a:solidFill>
                 <a:latin typeface="맑은 고딕"/>
               </a:rPr>
-              <a:t>• 본 문서는 전사 표준 프로젝트 관리 템플릿이자 아모레퍼시픽 Claim AI 실전 기준서입니다.</a:t>
+              <a:t>• 본 문서는 전사 표준 프로젝트 관리 템플릿이자 한빛글로벌 SyncGuard AI 실전 기준서입니다.</a:t>
             </a:r>
           </a:p>
           <a:p>
@@ -5053,7 +5053,7 @@
                 </a:solidFill>
                 <a:latin typeface="맑은 고딕"/>
               </a:rPr>
-              <a:t>산출물 ID : GRV_MAN_100  |  버전 : v1.0</a:t>
+              <a:t>산출물 ID : EMP_MAN_100  |  버전 : v1.0</a:t>
             </a:r>
           </a:p>
         </p:txBody>
@@ -5265,7 +5265,7 @@
                 </a:solidFill>
                 <a:latin typeface="맑은 고딕"/>
               </a:rPr>
-              <a:t>아모레퍼시픽 Claimworks-Claims AI 시스템 구축  |  자원 관리 계획서</a:t>
+              <a:t>한빛글로벌 SyncGuard AI 시스템 구축  |  자원 관리 계획서</a:t>
             </a:r>
           </a:p>
         </p:txBody>
@@ -5349,7 +5349,7 @@
                 </a:solidFill>
                 <a:latin typeface="맑은 고딕"/>
               </a:rPr>
-              <a:t>발주사 : AMOREPACIFIC   |   수행사 : ㈜그로브소프트 (GROVE)</a:t>
+              <a:t>발주사 : HANBIT GLOBAL   |   수행사 : ㈜엠파시 (Empasy Inc.)</a:t>
             </a:r>
           </a:p>
         </p:txBody>
@@ -6143,7 +6143,7 @@
                           </a:solidFill>
                           <a:latin typeface="맑은 고딕"/>
                         </a:rPr>
-                        <a:t>개발에 필요한 AP-ON, VPN, CA-PAM, Chakra, AWS 콘솔 권한 신청이 적기 완료되었는가?</a:t>
+                        <a:t>개발에 필요한 HB-SSO, VPN, CA-PAM, Chakra, AWS 콘솔 권한 신청이 적기 완료되었는가?</a:t>
                       </a:r>
                     </a:p>
                   </a:txBody>
@@ -7106,7 +7106,7 @@
                           </a:solidFill>
                           <a:latin typeface="맑은 고딕"/>
                         </a:rPr>
-                        <a:t>월별투입공수 관리대장(GRV_MAN_050)의 계획 공수 대비 실제 투입 M/M가 정상 집행되었는가?</a:t>
+                        <a:t>월별투입공수 관리대장(EMP_MAN_050)의 계획 공수 대비 실제 투입 M/M가 정상 집행되었는가?</a:t>
                       </a:r>
                     </a:p>
                   </a:txBody>
@@ -8481,7 +8481,7 @@
                 </a:solidFill>
                 <a:latin typeface="맑은 고딕"/>
               </a:rPr>
-              <a:t>산출물 ID : GRV_MAN_100  |  버전 : v1.0</a:t>
+              <a:t>산출물 ID : EMP_MAN_100  |  버전 : v1.0</a:t>
             </a:r>
           </a:p>
         </p:txBody>
@@ -8693,7 +8693,7 @@
                 </a:solidFill>
                 <a:latin typeface="맑은 고딕"/>
               </a:rPr>
-              <a:t>아모레퍼시픽 Claimworks-Claims AI 시스템 구축  |  자원 관리 계획서</a:t>
+              <a:t>한빛글로벌 SyncGuard AI 시스템 구축  |  자원 관리 계획서</a:t>
             </a:r>
           </a:p>
         </p:txBody>
@@ -8777,7 +8777,7 @@
                 </a:solidFill>
                 <a:latin typeface="맑은 고딕"/>
               </a:rPr>
-              <a:t>발주사 : AMOREPACIFIC   |   수행사 : ㈜그로브소프트 (GROVE)</a:t>
+              <a:t>발주사 : HANBIT GLOBAL   |   수행사 : ㈜엠파시 (Empasy Inc.)</a:t>
             </a:r>
           </a:p>
         </p:txBody>
@@ -9272,7 +9272,7 @@
                           </a:solidFill>
                           <a:latin typeface="맑은 고딕"/>
                         </a:rPr>
-                        <a:t>공공 SW사업 자원관리 지침 및 월별투입공수(GRV_MAN_050) 기반 계획 수립</a:t>
+                        <a:t>공공 SW사업 자원관리 지침 및 월별투입공수(EMP_MAN_050) 기반 계획 수립</a:t>
                       </a:r>
                     </a:p>
                   </a:txBody>
@@ -9322,7 +9322,7 @@
                           </a:solidFill>
                           <a:latin typeface="맑은 고딕"/>
                         </a:rPr>
-                        <a:t>김재은 PM</a:t>
+                        <a:t>김태윤 PM</a:t>
                       </a:r>
                     </a:p>
                   </a:txBody>
@@ -9524,7 +9524,7 @@
                           </a:solidFill>
                           <a:latin typeface="맑은 고딕"/>
                         </a:rPr>
-                        <a:t>총 20.0 M/M 인력 투입 계획 및 양사(그로브소프트·아이시프트) 조직 확정</a:t>
+                        <a:t>총 20.0 M/M 인력 투입 계획 및 양사(엠파시·데이터브릿지) 조직 확정</a:t>
                       </a:r>
                     </a:p>
                   </a:txBody>
@@ -9574,7 +9574,7 @@
                           </a:solidFill>
                           <a:latin typeface="맑은 고딕"/>
                         </a:rPr>
-                        <a:t>김재은 / 박주열</a:t>
+                        <a:t>김태윤 / 정민수</a:t>
                       </a:r>
                     </a:p>
                   </a:txBody>
@@ -9826,7 +9826,7 @@
                           </a:solidFill>
                           <a:latin typeface="맑은 고딕"/>
                         </a:rPr>
-                        <a:t>오병문 / 김경호</a:t>
+                        <a:t>박준혁 / 한승우</a:t>
                       </a:r>
                     </a:p>
                   </a:txBody>
@@ -10118,7 +10118,7 @@
                 </a:solidFill>
                 <a:latin typeface="맑은 고딕"/>
               </a:rPr>
-              <a:t>3. 교체 필수 항목 : [사업명], [발주사/수행사 조직], [사업기간 및 M1~M6 일정], [산출물 ID 체계], [인력/인프라 수량]</a:t>
+              <a:t>3. 교체 필수 항목 : SyncGuard AI 시스템 구축 사업, [발주사/수행사 조직], [사업기간 및 M1~M6 일정], [산출물 ID 체계], [인력/인프라 수량]</a:t>
             </a:r>
           </a:p>
           <a:p>
@@ -10137,7 +10137,7 @@
                 </a:solidFill>
                 <a:latin typeface="맑은 고딕"/>
               </a:rPr>
-              <a:t>4. 연계 문서 : 사업수행계획서(GRV_INT_010), WBS(GRV_INT_020), 주간보고서(GRV_MAN_010), 투입공수(GRV_MAN_050)</a:t>
+              <a:t>4. 연계 문서 : 사업수행계획서(EMP_INT_010), WBS(EMP_INT_020), 주간보고서(EMP_MAN_010), 투입공수(EMP_MAN_050)</a:t>
             </a:r>
           </a:p>
         </p:txBody>
@@ -10649,7 +10649,7 @@
                 </a:solidFill>
                 <a:latin typeface="맑은 고딕"/>
               </a:rPr>
-              <a:t>발주사(아모레퍼시픽) · 주관사(그로브소프트) · 협력사(아이시프트) 역할 분장</a:t>
+              <a:t>발주사(한빛글로벌) · 주관사(엠파시) · 협력사(데이터브릿지) 역할 분장</a:t>
             </a:r>
           </a:p>
         </p:txBody>
@@ -11673,7 +11673,7 @@
                 </a:solidFill>
                 <a:latin typeface="맑은 고딕"/>
               </a:rPr>
-              <a:t>AP-ON, VPC, CA-PAM, Chakra DB, AWS 콘솔 권한 신청·회수 및 보안 통제</a:t>
+              <a:t>HB-SSO, VPC, CA-PAM, Chakra DB, AWS 콘솔 권한 신청·회수 및 보안 통제</a:t>
             </a:r>
           </a:p>
         </p:txBody>
@@ -12329,7 +12329,7 @@
                 </a:solidFill>
                 <a:latin typeface="맑은 고딕"/>
               </a:rPr>
-              <a:t>산출물 ID : GRV_MAN_100  |  버전 : v1.0</a:t>
+              <a:t>산출물 ID : EMP_MAN_100  |  버전 : v1.0</a:t>
             </a:r>
           </a:p>
         </p:txBody>
@@ -12541,7 +12541,7 @@
                 </a:solidFill>
                 <a:latin typeface="맑은 고딕"/>
               </a:rPr>
-              <a:t>아모레퍼시픽 Claimworks-Claims AI 시스템 구축  |  자원 관리 계획서</a:t>
+              <a:t>한빛글로벌 SyncGuard AI 시스템 구축  |  자원 관리 계획서</a:t>
             </a:r>
           </a:p>
         </p:txBody>
@@ -12625,7 +12625,7 @@
                 </a:solidFill>
                 <a:latin typeface="맑은 고딕"/>
               </a:rPr>
-              <a:t>발주사 : AMOREPACIFIC   |   수행사 : ㈜그로브소프트 (GROVE)</a:t>
+              <a:t>발주사 : HANBIT GLOBAL   |   수행사 : ㈜엠파시 (Empasy Inc.)</a:t>
             </a:r>
           </a:p>
         </p:txBody>
@@ -12849,7 +12849,7 @@
                 </a:solidFill>
                 <a:latin typeface="맑은 고딕"/>
               </a:rPr>
-              <a:t>• 사업총괄/AA(오병문), 수행PM(김재은), PMO(황자영), 개발리드(장지용), AI/프론트 엔지니어 및 아이시프트 실증DB팀 구성</a:t>
+              <a:t>• 사업총괄/AA(박준혁), 수행PM(김태윤), PMO(이지훈), 개발리드(최현우), AI/프론트 엔지니어 및 데이터브릿지 실증DB팀 구성</a:t>
             </a:r>
           </a:p>
           <a:p>
@@ -12887,7 +12887,7 @@
                 </a:solidFill>
                 <a:latin typeface="맑은 고딕"/>
               </a:rPr>
-              <a:t>• 월별투입공수 관리대장(GRV_MAN_050)을 통해 매월 계획 대비 실제 투입 M/M를 실측·검증</a:t>
+              <a:t>• 월별투입공수 관리대장(EMP_MAN_050)을 통해 매월 계획 대비 실제 투입 M/M를 실측·검증</a:t>
             </a:r>
           </a:p>
         </p:txBody>
@@ -13111,7 +13111,7 @@
                 </a:solidFill>
                 <a:latin typeface="맑은 고딕"/>
               </a:rPr>
-              <a:t>• 아모레퍼시픽 표준 AWS VPC 내 개발(DEV), 스테이징(STG), 운영(PRD) 3개 환경을 물리/논리적으로 분리 구성</a:t>
+              <a:t>• 한빛글로벌 표준 AWS VPC 내 개발(DEV), 스테이징(STG), 운영(PRD) 3개 환경을 물리/논리적으로 분리 구성</a:t>
             </a:r>
           </a:p>
           <a:p>
@@ -13130,7 +13130,7 @@
                 </a:solidFill>
                 <a:latin typeface="맑은 고딕"/>
               </a:rPr>
-              <a:t>• 트래픽 격리를 위해 사내 사용자용(claim-ai-bo-prv-alb)과 기간계 연동용(claim-ai-api-prv-alb) 내부 ALB 2개 물리 분리</a:t>
+              <a:t>• 트래픽 격리를 위해 사내 사용자용(syncguard-ai-bo-prv-alb)과 기간계 연동용(syncguard-ai-api-prv-alb) 내부 ALB 2개 물리 분리</a:t>
             </a:r>
           </a:p>
           <a:p>
@@ -13635,7 +13635,7 @@
                 </a:solidFill>
                 <a:latin typeface="맑은 고딕"/>
               </a:rPr>
-              <a:t>• 사내 포털(AP-ON), 가상사설망(VPC), 서버 접근제어(CA-PAM), DB 접근제어(Chakra), AWS Console 권한을 직무별 차등 부여</a:t>
+              <a:t>• 사내 포털(HB-SSO), 가상사설망(VPC), 서버 접근제어(CA-PAM), DB 접근제어(Chakra), AWS Console 권한을 직무별 차등 부여</a:t>
             </a:r>
           </a:p>
           <a:p>
@@ -13905,7 +13905,7 @@
                 </a:solidFill>
                 <a:latin typeface="맑은 고딕"/>
               </a:rPr>
-              <a:t>산출물 ID : GRV_MAN_100  |  버전 : v1.0</a:t>
+              <a:t>산출물 ID : EMP_MAN_100  |  버전 : v1.0</a:t>
             </a:r>
           </a:p>
         </p:txBody>
@@ -14117,7 +14117,7 @@
                 </a:solidFill>
                 <a:latin typeface="맑은 고딕"/>
               </a:rPr>
-              <a:t>아모레퍼시픽 Claimworks-Claims AI 시스템 구축  |  자원 관리 계획서</a:t>
+              <a:t>한빛글로벌 SyncGuard AI 시스템 구축  |  자원 관리 계획서</a:t>
             </a:r>
           </a:p>
         </p:txBody>
@@ -14201,7 +14201,7 @@
                 </a:solidFill>
                 <a:latin typeface="맑은 고딕"/>
               </a:rPr>
-              <a:t>발주사 : AMOREPACIFIC   |   수행사 : ㈜그로브소프트 (GROVE)</a:t>
+              <a:t>발주사 : HANBIT GLOBAL   |   수행사 : ㈜엠파시 (Empasy Inc.)</a:t>
             </a:r>
           </a:p>
         </p:txBody>
@@ -14655,7 +14655,7 @@
                           </a:solidFill>
                           <a:latin typeface="맑은 고딕"/>
                         </a:rPr>
-                        <a:t>오병문</a:t>
+                        <a:t>박준혁</a:t>
                       </a:r>
                     </a:p>
                   </a:txBody>
@@ -14705,7 +14705,7 @@
                           </a:solidFill>
                           <a:latin typeface="맑은 고딕"/>
                         </a:rPr>
-                        <a:t>그로브소프트</a:t>
+                        <a:t>엠파시</a:t>
                       </a:r>
                     </a:p>
                   </a:txBody>
@@ -14976,7 +14976,7 @@
                           </a:solidFill>
                           <a:latin typeface="맑은 고딕"/>
                         </a:rPr>
-                        <a:t>김재은</a:t>
+                        <a:t>김태윤</a:t>
                       </a:r>
                     </a:p>
                   </a:txBody>
@@ -15026,7 +15026,7 @@
                           </a:solidFill>
                           <a:latin typeface="맑은 고딕"/>
                         </a:rPr>
-                        <a:t>그로브소프트</a:t>
+                        <a:t>엠파시</a:t>
                       </a:r>
                     </a:p>
                   </a:txBody>
@@ -15297,7 +15297,7 @@
                           </a:solidFill>
                           <a:latin typeface="맑은 고딕"/>
                         </a:rPr>
-                        <a:t>황자영</a:t>
+                        <a:t>이지훈</a:t>
                       </a:r>
                     </a:p>
                   </a:txBody>
@@ -15347,7 +15347,7 @@
                           </a:solidFill>
                           <a:latin typeface="맑은 고딕"/>
                         </a:rPr>
-                        <a:t>그로브소프트</a:t>
+                        <a:t>엠파시</a:t>
                       </a:r>
                     </a:p>
                   </a:txBody>
@@ -15637,7 +15637,7 @@
                           </a:solidFill>
                           <a:latin typeface="맑은 고딕"/>
                         </a:rPr>
-                        <a:t>(장지용 협업)</a:t>
+                        <a:t>(최현우 협업)</a:t>
                       </a:r>
                     </a:p>
                   </a:txBody>
@@ -15687,7 +15687,7 @@
                           </a:solidFill>
                           <a:latin typeface="맑은 고딕"/>
                         </a:rPr>
-                        <a:t>그로브소프트</a:t>
+                        <a:t>엠파시</a:t>
                       </a:r>
                     </a:p>
                   </a:txBody>
@@ -15958,7 +15958,7 @@
                           </a:solidFill>
                           <a:latin typeface="맑은 고딕"/>
                         </a:rPr>
-                        <a:t>장지용 리드</a:t>
+                        <a:t>최현우 리드</a:t>
                       </a:r>
                     </a:p>
                     <a:p>
@@ -15977,7 +15977,7 @@
                           </a:solidFill>
                           <a:latin typeface="맑은 고딕"/>
                         </a:rPr>
-                        <a:t>+ 남석현 수석</a:t>
+                        <a:t>+ 강동현 수석</a:t>
                       </a:r>
                     </a:p>
                   </a:txBody>
@@ -16027,7 +16027,7 @@
                           </a:solidFill>
                           <a:latin typeface="맑은 고딕"/>
                         </a:rPr>
-                        <a:t>그로브소프트</a:t>
+                        <a:t>엠파시</a:t>
                       </a:r>
                     </a:p>
                     <a:p>
@@ -16046,7 +16046,7 @@
                           </a:solidFill>
                           <a:latin typeface="맑은 고딕"/>
                         </a:rPr>
-                        <a:t>㈜아이시프트</a:t>
+                        <a:t>㈜데이터브릿지</a:t>
                       </a:r>
                     </a:p>
                   </a:txBody>
@@ -16165,7 +16165,7 @@
                           </a:solidFill>
                           <a:latin typeface="맑은 고딕"/>
                         </a:rPr>
-                        <a:t>• AP-ON SSO, Tiumnet 연계 및 연구원 myBeaker 실증자료 DB 구축·연동</a:t>
+                        <a:t>• HB-SSO SSO, MarketingHub 연계 및 연구원 ProductLab 실증자료 DB 구축·연동</a:t>
                       </a:r>
                     </a:p>
                   </a:txBody>
@@ -16367,7 +16367,7 @@
                           </a:solidFill>
                           <a:latin typeface="맑은 고딕"/>
                         </a:rPr>
-                        <a:t>그로브소프트</a:t>
+                        <a:t>엠파시</a:t>
                       </a:r>
                     </a:p>
                   </a:txBody>
@@ -16467,7 +16467,7 @@
                           </a:solidFill>
                           <a:latin typeface="맑은 고딕"/>
                         </a:rPr>
-                        <a:t>• Vue 3 기반 Claims AI 워크스페이스 웹(:3104) 및 관리자(BO) 화면 구현</a:t>
+                        <a:t>• Vue 3 기반 SyncGuard AI 워크스페이스 웹(:3104) 및 관리자(BO) 화면 구현</a:t>
                       </a:r>
                     </a:p>
                     <a:p>
@@ -16657,7 +16657,7 @@
                           </a:solidFill>
                           <a:latin typeface="맑은 고딕"/>
                         </a:rPr>
-                        <a:t>박주열 / 김경호</a:t>
+                        <a:t>정민수 / 한승우</a:t>
                       </a:r>
                     </a:p>
                     <a:p>
@@ -16676,7 +16676,7 @@
                           </a:solidFill>
                           <a:latin typeface="맑은 고딕"/>
                         </a:rPr>
-                        <a:t>양서윤 외 3인</a:t>
+                        <a:t>최윤아 외 3인</a:t>
                       </a:r>
                     </a:p>
                   </a:txBody>
@@ -16726,7 +16726,7 @@
                           </a:solidFill>
                           <a:latin typeface="맑은 고딕"/>
                         </a:rPr>
-                        <a:t>아모레퍼시픽</a:t>
+                        <a:t>한빛글로벌</a:t>
                       </a:r>
                     </a:p>
                   </a:txBody>
@@ -16996,7 +16996,7 @@
                 </a:solidFill>
                 <a:latin typeface="맑은 고딕"/>
               </a:rPr>
-              <a:t>산출물 ID : GRV_MAN_100  |  버전 : v1.0</a:t>
+              <a:t>산출물 ID : EMP_MAN_100  |  버전 : v1.0</a:t>
             </a:r>
           </a:p>
         </p:txBody>
@@ -17038,7 +17038,7 @@
                 </a:solidFill>
                 <a:latin typeface="맑은 고딕"/>
               </a:rPr>
-              <a:t>3. 인적 자원 관리 (2) : 직무별 · 월별 인력 투입공수(M/M) 기준선 (GRV_MAN_050 연동)</a:t>
+              <a:t>3. 인적 자원 관리 (2) : 직무별 · 월별 인력 투입공수(M/M) 기준선 (EMP_MAN_050 연동)</a:t>
             </a:r>
           </a:p>
         </p:txBody>
@@ -17208,7 +17208,7 @@
                 </a:solidFill>
                 <a:latin typeface="맑은 고딕"/>
               </a:rPr>
-              <a:t>아모레퍼시픽 Claimworks-Claims AI 시스템 구축  |  자원 관리 계획서</a:t>
+              <a:t>한빛글로벌 SyncGuard AI 시스템 구축  |  자원 관리 계획서</a:t>
             </a:r>
           </a:p>
         </p:txBody>
@@ -17292,7 +17292,7 @@
                 </a:solidFill>
                 <a:latin typeface="맑은 고딕"/>
               </a:rPr>
-              <a:t>발주사 : AMOREPACIFIC   |   수행사 : ㈜그로브소프트 (GROVE)</a:t>
+              <a:t>발주사 : HANBIT GLOBAL   |   수행사 : ㈜엠파시 (Empasy Inc.)</a:t>
             </a:r>
           </a:p>
         </p:txBody>
@@ -18154,7 +18154,7 @@
                           </a:solidFill>
                           <a:latin typeface="맑은 고딕"/>
                         </a:rPr>
-                        <a:t>오병문</a:t>
+                        <a:t>박준혁</a:t>
                       </a:r>
                     </a:p>
                   </a:txBody>
@@ -18856,7 +18856,7 @@
                           </a:solidFill>
                           <a:latin typeface="맑은 고딕"/>
                         </a:rPr>
-                        <a:t>김재은</a:t>
+                        <a:t>김태윤</a:t>
                       </a:r>
                     </a:p>
                   </a:txBody>
@@ -20260,7 +20260,7 @@
                           </a:solidFill>
                           <a:latin typeface="맑은 고딕"/>
                         </a:rPr>
-                        <a:t>장지용/남석현</a:t>
+                        <a:t>최현우/강동현</a:t>
                       </a:r>
                     </a:p>
                   </a:txBody>
@@ -21664,7 +21664,7 @@
                           </a:solidFill>
                           <a:latin typeface="맑은 고딕"/>
                         </a:rPr>
-                        <a:t>황자영</a:t>
+                        <a:t>이지훈</a:t>
                       </a:r>
                     </a:p>
                   </a:txBody>
@@ -23872,7 +23872,7 @@
                 </a:solidFill>
                 <a:latin typeface="맑은 고딕"/>
               </a:rPr>
-              <a:t>• 하이브리드 근무 원칙 : 현업 인터뷰·화면 리뷰·인프라 연계·파일럿 기간에는 아모레퍼시픽 본사(용산) 대면 상주/방문 수행, 코딩 집중기에는 보안 인가된 원격 개발 병행</a:t>
+              <a:t>• 하이브리드 근무 원칙 : 현업 인터뷰·화면 리뷰·인프라 연계·파일럿 기간에는 한빛글로벌 본사(용산) 대면 상주/방문 수행, 코딩 집중기에는 보안 인가된 원격 개발 병행</a:t>
             </a:r>
           </a:p>
           <a:p>
@@ -23891,7 +23891,7 @@
                 </a:solidFill>
                 <a:latin typeface="맑은 고딕"/>
               </a:rPr>
-              <a:t>• 공수 실측 및 검증 : 매월 말일 각 인력별 작업 내역(Timesheet)을 취합하여 월별투입공수 관리대장(GRV_MAN_050)의 [실제투입공수(Actual)] 시트에 기록·보고</a:t>
+              <a:t>• 공수 실측 및 검증 : 매월 말일 각 인력별 작업 내역(Timesheet)을 취합하여 월별투입공수 관리대장(EMP_MAN_050)의 [실제투입공수(Actual)] 시트에 기록·보고</a:t>
             </a:r>
           </a:p>
         </p:txBody>
@@ -23993,7 +23993,7 @@
                 </a:solidFill>
                 <a:latin typeface="맑은 고딕"/>
               </a:rPr>
-              <a:t>산출물 ID : GRV_MAN_100  |  버전 : v1.0</a:t>
+              <a:t>산출물 ID : EMP_MAN_100  |  버전 : v1.0</a:t>
             </a:r>
           </a:p>
         </p:txBody>
@@ -24077,7 +24077,7 @@
                 </a:solidFill>
                 <a:latin typeface="맑은 고딕"/>
               </a:rPr>
-              <a:t>AWS 인프라 정의서(Claims AI_AP_AWS_infra_v0.2)에 기반하여 내·외부 트래픽을 분리하고 AI/배치 워크로드별 최적 사양을 배분합니다.</a:t>
+              <a:t>AWS 인프라 정의서(SyncGuard AI_AP_AWS_infra_v0.2)에 기반하여 내·외부 트래픽을 분리하고 AI/배치 워크로드별 최적 사양을 배분합니다.</a:t>
             </a:r>
           </a:p>
         </p:txBody>
@@ -24205,7 +24205,7 @@
                 </a:solidFill>
                 <a:latin typeface="맑은 고딕"/>
               </a:rPr>
-              <a:t>아모레퍼시픽 Claimworks-Claims AI 시스템 구축  |  자원 관리 계획서</a:t>
+              <a:t>한빛글로벌 SyncGuard AI 시스템 구축  |  자원 관리 계획서</a:t>
             </a:r>
           </a:p>
         </p:txBody>
@@ -24289,7 +24289,7 @@
                 </a:solidFill>
                 <a:latin typeface="맑은 고딕"/>
               </a:rPr>
-              <a:t>발주사 : AMOREPACIFIC   |   수행사 : ㈜그로브소프트 (GROVE)</a:t>
+              <a:t>발주사 : HANBIT GLOBAL   |   수행사 : ㈜엠파시 (Empasy Inc.)</a:t>
             </a:r>
           </a:p>
         </p:txBody>
@@ -24661,7 +24661,7 @@
                           </a:solidFill>
                           <a:latin typeface="맑은 고딕"/>
                         </a:rPr>
-                        <a:t>claim-ai-bo-prv-alb</a:t>
+                        <a:t>syncguard-ai-bo-prv-alb</a:t>
                       </a:r>
                     </a:p>
                     <a:p>
@@ -25008,7 +25008,7 @@
                           </a:solidFill>
                           <a:latin typeface="맑은 고딕"/>
                         </a:rPr>
-                        <a:t>claim-ai-api-prv-alb</a:t>
+                        <a:t>syncguard-ai-api-prv-alb</a:t>
                       </a:r>
                     </a:p>
                     <a:p>
@@ -25146,7 +25146,7 @@
                           </a:solidFill>
                           <a:latin typeface="맑은 고딕"/>
                         </a:rPr>
-                        <a:t>• Tiumnet 등 사내 기간계 시스템의 클레임 판정 요청 API 전용 진입점</a:t>
+                        <a:t>• MarketingHub 등 사내 기간계 시스템의 클레임 판정 요청 API 전용 진입점</a:t>
                       </a:r>
                     </a:p>
                     <a:p>
@@ -25336,7 +25336,7 @@
                           </a:solidFill>
                           <a:latin typeface="맑은 고딕"/>
                         </a:rPr>
-                        <a:t>claim-fe-web &amp; claim-be-server</a:t>
+                        <a:t>syncguard-fe-web &amp; syncguard-be-server</a:t>
                       </a:r>
                     </a:p>
                     <a:p>
@@ -25664,7 +25664,7 @@
                           </a:solidFill>
                           <a:latin typeface="맑은 고딕"/>
                         </a:rPr>
-                        <a:t>claim-api-server</a:t>
+                        <a:t>syncguard-api-server</a:t>
                       </a:r>
                     </a:p>
                     <a:p>
@@ -25802,7 +25802,7 @@
                           </a:solidFill>
                           <a:latin typeface="맑은 고딕"/>
                         </a:rPr>
-                        <a:t>• Tiumnet 및 myBeaker 실시간 REST API 연계 및 토큰 인증 처리</a:t>
+                        <a:t>• MarketingHub 및 ProductLab 실시간 REST API 연계 및 토큰 인증 처리</a:t>
                       </a:r>
                     </a:p>
                     <a:p>
@@ -25992,7 +25992,7 @@
                           </a:solidFill>
                           <a:latin typeface="맑은 고딕"/>
                         </a:rPr>
-                        <a:t>claim-ai-agent</a:t>
+                        <a:t>syncguard-ai-agent</a:t>
                       </a:r>
                     </a:p>
                     <a:p>
@@ -26320,7 +26320,7 @@
                           </a:solidFill>
                           <a:latin typeface="맑은 고딕"/>
                         </a:rPr>
-                        <a:t>claim-batch-server</a:t>
+                        <a:t>syncguard-batch-server</a:t>
                       </a:r>
                     </a:p>
                     <a:p>
@@ -26458,7 +26458,7 @@
                           </a:solidFill>
                           <a:latin typeface="맑은 고딕"/>
                         </a:rPr>
-                        <a:t>• 야간 myBeaker 실증 데이터 동기화, 통계 집계, 임시 파일 정리 배치</a:t>
+                        <a:t>• 야간 ProductLab 실증 데이터 동기화, 통계 집계, 임시 파일 정리 배치</a:t>
                       </a:r>
                     </a:p>
                     <a:p>
@@ -26805,7 +26805,7 @@
                           </a:solidFill>
                           <a:latin typeface="맑은 고딕"/>
                         </a:rPr>
-                        <a:t>• S3 : ap-claim-ai-dev/stg/prd (원본 문서/영상/캡처 이미지 저장, Intelligent-Tiering)</a:t>
+                        <a:t>• S3 : ap-syncguard-ai-dev/stg/prd (원본 문서/영상/캡처 이미지 저장, Intelligent-Tiering)</a:t>
                       </a:r>
                     </a:p>
                   </a:txBody>
@@ -27006,7 +27006,7 @@
                 </a:solidFill>
                 <a:latin typeface="맑은 고딕"/>
               </a:rPr>
-              <a:t>산출물 ID : GRV_MAN_100  |  버전 : v1.0</a:t>
+              <a:t>산출물 ID : EMP_MAN_100  |  버전 : v1.0</a:t>
             </a:r>
           </a:p>
         </p:txBody>
@@ -27218,7 +27218,7 @@
                 </a:solidFill>
                 <a:latin typeface="맑은 고딕"/>
               </a:rPr>
-              <a:t>아모레퍼시픽 Claimworks-Claims AI 시스템 구축  |  자원 관리 계획서</a:t>
+              <a:t>한빛글로벌 SyncGuard AI 시스템 구축  |  자원 관리 계획서</a:t>
             </a:r>
           </a:p>
         </p:txBody>
@@ -27302,7 +27302,7 @@
                 </a:solidFill>
                 <a:latin typeface="맑은 고딕"/>
               </a:rPr>
-              <a:t>발주사 : AMOREPACIFIC   |   수행사 : ㈜그로브소프트 (GROVE)</a:t>
+              <a:t>발주사 : HANBIT GLOBAL   |   수행사 : ㈜엠파시 (Empasy Inc.)</a:t>
             </a:r>
           </a:p>
         </p:txBody>
@@ -29860,7 +29860,7 @@
                           </a:solidFill>
                           <a:latin typeface="맑은 고딕"/>
                         </a:rPr>
-                        <a:t>AP-ON SSO / Tiumnet /</a:t>
+                        <a:t>HB-SSO SSO / MarketingHub /</a:t>
                       </a:r>
                     </a:p>
                     <a:p>
@@ -29879,7 +29879,7 @@
                           </a:solidFill>
                           <a:latin typeface="맑은 고딕"/>
                         </a:rPr>
-                        <a:t>myBeaker / KT레몬(옵션)</a:t>
+                        <a:t>ProductLab / KT레몬(옵션)</a:t>
                       </a:r>
                     </a:p>
                   </a:txBody>
@@ -29998,7 +29998,7 @@
                           </a:solidFill>
                           <a:latin typeface="맑은 고딕"/>
                         </a:rPr>
-                        <a:t>임직원 통합인증(SSO), 광고심의 요청 연동(Tiumnet), 실증자료 조회(myBeaker)</a:t>
+                        <a:t>임직원 통합인증(SSO), 광고심의 요청 연동(MarketingHub), 실증자료 조회(ProductLab)</a:t>
                       </a:r>
                     </a:p>
                   </a:txBody>
@@ -30048,7 +30048,7 @@
                           </a:solidFill>
                           <a:latin typeface="맑은 고딕"/>
                         </a:rPr>
-                        <a:t>아모레퍼시픽 사내</a:t>
+                        <a:t>한빛글로벌 사내</a:t>
                       </a:r>
                     </a:p>
                     <a:p>
@@ -30249,7 +30249,7 @@
                 </a:solidFill>
                 <a:latin typeface="맑은 고딕"/>
               </a:rPr>
-              <a:t>산출물 ID : GRV_MAN_100  |  버전 : v1.0</a:t>
+              <a:t>산출물 ID : EMP_MAN_100  |  버전 : v1.0</a:t>
             </a:r>
           </a:p>
         </p:txBody>
@@ -30461,7 +30461,7 @@
                 </a:solidFill>
                 <a:latin typeface="맑은 고딕"/>
               </a:rPr>
-              <a:t>아모레퍼시픽 Claimworks-Claims AI 시스템 구축  |  자원 관리 계획서</a:t>
+              <a:t>한빛글로벌 SyncGuard AI 시스템 구축  |  자원 관리 계획서</a:t>
             </a:r>
           </a:p>
         </p:txBody>
@@ -30545,7 +30545,7 @@
                 </a:solidFill>
                 <a:latin typeface="맑은 고딕"/>
               </a:rPr>
-              <a:t>발주사 : AMOREPACIFIC   |   수행사 : ㈜그로브소프트 (GROVE)</a:t>
+              <a:t>발주사 : HANBIT GLOBAL   |   수행사 : ㈜엠파시 (Empasy Inc.)</a:t>
             </a:r>
           </a:p>
         </p:txBody>
@@ -30718,7 +30718,7 @@
                           </a:solidFill>
                           <a:latin typeface="맑은 고딕"/>
                         </a:rPr>
-                        <a:t>(AP-ON)</a:t>
+                        <a:t>(HB-SSO)</a:t>
                       </a:r>
                     </a:p>
                   </a:txBody>
@@ -31096,7 +31096,7 @@
                           </a:solidFill>
                           <a:latin typeface="맑은 고딕"/>
                         </a:rPr>
-                        <a:t>오병문 (그로브)</a:t>
+                        <a:t>박준혁 (엠파시)</a:t>
                       </a:r>
                     </a:p>
                   </a:txBody>
@@ -31498,7 +31498,7 @@
                           </a:solidFill>
                           <a:latin typeface="맑은 고딕"/>
                         </a:rPr>
-                        <a:t>김재은 (그로브)</a:t>
+                        <a:t>김태윤 (엠파시)</a:t>
                       </a:r>
                     </a:p>
                   </a:txBody>
@@ -31900,7 +31900,7 @@
                           </a:solidFill>
                           <a:latin typeface="맑은 고딕"/>
                         </a:rPr>
-                        <a:t>장지용 (그로브)</a:t>
+                        <a:t>최현우 (엠파시)</a:t>
                       </a:r>
                     </a:p>
                   </a:txBody>
@@ -32302,7 +32302,7 @@
                           </a:solidFill>
                           <a:latin typeface="맑은 고딕"/>
                         </a:rPr>
-                        <a:t>전담 AI / FE (그로브)</a:t>
+                        <a:t>전담 AI / FE (엠파시)</a:t>
                       </a:r>
                     </a:p>
                   </a:txBody>
@@ -32704,7 +32704,7 @@
                           </a:solidFill>
                           <a:latin typeface="맑은 고딕"/>
                         </a:rPr>
-                        <a:t>황자영 (그로브)</a:t>
+                        <a:t>이지훈 (엠파시)</a:t>
                       </a:r>
                     </a:p>
                   </a:txBody>
@@ -33106,7 +33106,7 @@
                           </a:solidFill>
                           <a:latin typeface="맑은 고딕"/>
                         </a:rPr>
-                        <a:t>남석현 (아이시프트)</a:t>
+                        <a:t>강동현 (데이터브릿지)</a:t>
                       </a:r>
                     </a:p>
                   </a:txBody>
@@ -33456,7 +33456,7 @@
                           </a:solidFill>
                           <a:latin typeface="맑은 고딕"/>
                         </a:rPr>
-                        <a:t>연구원 myBeaker 실증자료 DB 스키마 분석 및 연계 API 검증</a:t>
+                        <a:t>연구원 ProductLab 실증자료 DB 스키마 분석 및 연계 API 검증</a:t>
                       </a:r>
                     </a:p>
                   </a:txBody>
@@ -33710,7 +33710,7 @@
                 </a:solidFill>
                 <a:latin typeface="맑은 고딕"/>
               </a:rPr>
-              <a:t>• [사전 심사 및 서약] 모든 투입 인력은 착수 시 보안서약서 및 개인정보보호 서약서를 제출한 후, 기술 PM(김경호) 승인을 거쳐 권한을 발급받음</a:t>
+              <a:t>• [사전 심사 및 서약] 모든 투입 인력은 착수 시 보안서약서 및 개인정보보호 서약서를 제출한 후, 기술 PM(한승우) 승인을 거쳐 권한을 발급받음</a:t>
             </a:r>
           </a:p>
           <a:p>
@@ -33748,7 +33748,7 @@
                 </a:solidFill>
                 <a:latin typeface="맑은 고딕"/>
               </a:rPr>
-              <a:t>• [종료 시 일괄 회수] 2027.05.31 사업 종료(또는 중도 인력 철수) 당일 AP-ON, VPN, CA-PAM, Chakra, AWS IAM 계정을 전수 비활성화하고 검수확인서(IMP_040)에 기록</a:t>
+              <a:t>• [종료 시 일괄 회수] 2027.05.31 사업 종료(또는 중도 인력 철수) 당일 HB-SSO, VPN, CA-PAM, Chakra, AWS IAM 계정을 전수 비활성화하고 검수확인서(IMP_040)에 기록</a:t>
             </a:r>
           </a:p>
         </p:txBody>
@@ -33850,7 +33850,7 @@
                 </a:solidFill>
                 <a:latin typeface="맑은 고딕"/>
               </a:rPr>
-              <a:t>산출물 ID : GRV_MAN_100  |  버전 : v1.0</a:t>
+              <a:t>산출물 ID : EMP_MAN_100  |  버전 : v1.0</a:t>
             </a:r>
           </a:p>
         </p:txBody>
@@ -34062,7 +34062,7 @@
                 </a:solidFill>
                 <a:latin typeface="맑은 고딕"/>
               </a:rPr>
-              <a:t>아모레퍼시픽 Claimworks-Claims AI 시스템 구축  |  자원 관리 계획서</a:t>
+              <a:t>한빛글로벌 SyncGuard AI 시스템 구축  |  자원 관리 계획서</a:t>
             </a:r>
           </a:p>
         </p:txBody>
@@ -34146,7 +34146,7 @@
                 </a:solidFill>
                 <a:latin typeface="맑은 고딕"/>
               </a:rPr>
-              <a:t>발주사 : AMOREPACIFIC   |   수행사 : ㈜그로브소프트 (GROVE)</a:t>
+              <a:t>발주사 : HANBIT GLOBAL   |   수행사 : ㈜엠파시 (Empasy Inc.)</a:t>
             </a:r>
           </a:p>
         </p:txBody>
@@ -34389,7 +34389,7 @@
                 </a:solidFill>
                 <a:latin typeface="맑은 고딕"/>
               </a:rPr>
-              <a:t>• 사업총괄/AA(오병문), 수행PM(김재은), 개발리드(장지용) 등 핵심 인력은 사업 종료 시까지 변경 없이 100% 전담 유지</a:t>
+              <a:t>• 사업총괄/AA(박준혁), 수행PM(김태윤), 개발리드(최현우) 등 핵심 인력은 사업 종료 시까지 변경 없이 100% 전담 유지</a:t>
             </a:r>
           </a:p>
           <a:p>
@@ -34784,7 +34784,7 @@
                 </a:solidFill>
                 <a:latin typeface="맑은 고딕"/>
               </a:rPr>
-              <a:t>• claim-ai-agent(:18083) 컨테이너를 일반 웹 서버와 분리하여 고메모리 노드 그룹에 배치 및 동시 처리 큐(Queue) 제한</a:t>
+              <a:t>• syncguard-ai-agent(:18083) 컨테이너를 일반 웹 서버와 분리하여 고메모리 노드 그룹에 배치 및 동시 처리 큐(Queue) 제한</a:t>
             </a:r>
           </a:p>
           <a:p>

--- a/public/templates/000_pm_suite/01_프로젝트 관리/01_통합관리/자원_관리_계획서_템플릿.pptx
+++ b/public/templates/000_pm_suite/01_프로젝트 관리/01_통합관리/자원_관리_계획서_템플릿.pptx
@@ -3350,7 +3350,7 @@
                 </a:solidFill>
                 <a:latin typeface="맑은 고딕"/>
               </a:rPr>
-              <a:t>한빛글로벌 SyncGuard AI 시스템 구축</a:t>
+              <a:t>한빛글로벌 SyncFlow AI 시스템 구축</a:t>
             </a:r>
           </a:p>
         </p:txBody>
@@ -3534,22 +3534,22 @@
                     </a:solidFill>
                     <a:lnL w="6350" cmpd="sng">
                       <a:solidFill>
-                        <a:srgbClr val="334155"/>
-                      </a:solidFill>
-                    </a:lnL>
-                    <a:lnR w="6350" cmpd="sng">
-                      <a:solidFill>
-                        <a:srgbClr val="334155"/>
-                      </a:solidFill>
-                    </a:lnR>
-                    <a:lnT w="6350" cmpd="sng">
-                      <a:solidFill>
-                        <a:srgbClr val="334155"/>
-                      </a:solidFill>
-                    </a:lnT>
-                    <a:lnB w="6350" cmpd="sng">
-                      <a:solidFill>
-                        <a:srgbClr val="334155"/>
+                        <a:srgbClr val="1E3A5F"/>
+                      </a:solidFill>
+                    </a:lnL>
+                    <a:lnR w="6350" cmpd="sng">
+                      <a:solidFill>
+                        <a:srgbClr val="1E3A5F"/>
+                      </a:solidFill>
+                    </a:lnR>
+                    <a:lnT w="6350" cmpd="sng">
+                      <a:solidFill>
+                        <a:srgbClr val="1E3A5F"/>
+                      </a:solidFill>
+                    </a:lnT>
+                    <a:lnB w="6350" cmpd="sng">
+                      <a:solidFill>
+                        <a:srgbClr val="1E3A5F"/>
                       </a:solidFill>
                     </a:lnB>
                   </a:tcPr>
@@ -3574,7 +3574,7 @@
                           </a:solidFill>
                           <a:latin typeface="맑은 고딕"/>
                         </a:rPr>
-                        <a:t>한빛글로벌 SyncGuard AI 시스템 구축 용역</a:t>
+                        <a:t>한빛글로벌 SyncFlow AI 시스템 구축 용역</a:t>
                       </a:r>
                     </a:p>
                   </a:txBody>
@@ -3584,22 +3584,22 @@
                     </a:solidFill>
                     <a:lnL w="6350" cmpd="sng">
                       <a:solidFill>
-                        <a:srgbClr val="334155"/>
-                      </a:solidFill>
-                    </a:lnL>
-                    <a:lnR w="6350" cmpd="sng">
-                      <a:solidFill>
-                        <a:srgbClr val="334155"/>
-                      </a:solidFill>
-                    </a:lnR>
-                    <a:lnT w="6350" cmpd="sng">
-                      <a:solidFill>
-                        <a:srgbClr val="334155"/>
-                      </a:solidFill>
-                    </a:lnT>
-                    <a:lnB w="6350" cmpd="sng">
-                      <a:solidFill>
-                        <a:srgbClr val="334155"/>
+                        <a:srgbClr val="1E3A5F"/>
+                      </a:solidFill>
+                    </a:lnL>
+                    <a:lnR w="6350" cmpd="sng">
+                      <a:solidFill>
+                        <a:srgbClr val="1E3A5F"/>
+                      </a:solidFill>
+                    </a:lnR>
+                    <a:lnT w="6350" cmpd="sng">
+                      <a:solidFill>
+                        <a:srgbClr val="1E3A5F"/>
+                      </a:solidFill>
+                    </a:lnT>
+                    <a:lnB w="6350" cmpd="sng">
+                      <a:solidFill>
+                        <a:srgbClr val="1E3A5F"/>
                       </a:solidFill>
                     </a:lnB>
                   </a:tcPr>
@@ -3636,22 +3636,22 @@
                     </a:solidFill>
                     <a:lnL w="6350" cmpd="sng">
                       <a:solidFill>
-                        <a:srgbClr val="334155"/>
-                      </a:solidFill>
-                    </a:lnL>
-                    <a:lnR w="6350" cmpd="sng">
-                      <a:solidFill>
-                        <a:srgbClr val="334155"/>
-                      </a:solidFill>
-                    </a:lnR>
-                    <a:lnT w="6350" cmpd="sng">
-                      <a:solidFill>
-                        <a:srgbClr val="334155"/>
-                      </a:solidFill>
-                    </a:lnT>
-                    <a:lnB w="6350" cmpd="sng">
-                      <a:solidFill>
-                        <a:srgbClr val="334155"/>
+                        <a:srgbClr val="1E3A5F"/>
+                      </a:solidFill>
+                    </a:lnL>
+                    <a:lnR w="6350" cmpd="sng">
+                      <a:solidFill>
+                        <a:srgbClr val="1E3A5F"/>
+                      </a:solidFill>
+                    </a:lnR>
+                    <a:lnT w="6350" cmpd="sng">
+                      <a:solidFill>
+                        <a:srgbClr val="1E3A5F"/>
+                      </a:solidFill>
+                    </a:lnT>
+                    <a:lnB w="6350" cmpd="sng">
+                      <a:solidFill>
+                        <a:srgbClr val="1E3A5F"/>
                       </a:solidFill>
                     </a:lnB>
                   </a:tcPr>
@@ -3686,22 +3686,22 @@
                     </a:solidFill>
                     <a:lnL w="6350" cmpd="sng">
                       <a:solidFill>
-                        <a:srgbClr val="334155"/>
-                      </a:solidFill>
-                    </a:lnL>
-                    <a:lnR w="6350" cmpd="sng">
-                      <a:solidFill>
-                        <a:srgbClr val="334155"/>
-                      </a:solidFill>
-                    </a:lnR>
-                    <a:lnT w="6350" cmpd="sng">
-                      <a:solidFill>
-                        <a:srgbClr val="334155"/>
-                      </a:solidFill>
-                    </a:lnT>
-                    <a:lnB w="6350" cmpd="sng">
-                      <a:solidFill>
-                        <a:srgbClr val="334155"/>
+                        <a:srgbClr val="1E3A5F"/>
+                      </a:solidFill>
+                    </a:lnL>
+                    <a:lnR w="6350" cmpd="sng">
+                      <a:solidFill>
+                        <a:srgbClr val="1E3A5F"/>
+                      </a:solidFill>
+                    </a:lnR>
+                    <a:lnT w="6350" cmpd="sng">
+                      <a:solidFill>
+                        <a:srgbClr val="1E3A5F"/>
+                      </a:solidFill>
+                    </a:lnT>
+                    <a:lnB w="6350" cmpd="sng">
+                      <a:solidFill>
+                        <a:srgbClr val="1E3A5F"/>
                       </a:solidFill>
                     </a:lnB>
                   </a:tcPr>
@@ -3738,22 +3738,22 @@
                     </a:solidFill>
                     <a:lnL w="6350" cmpd="sng">
                       <a:solidFill>
-                        <a:srgbClr val="334155"/>
-                      </a:solidFill>
-                    </a:lnL>
-                    <a:lnR w="6350" cmpd="sng">
-                      <a:solidFill>
-                        <a:srgbClr val="334155"/>
-                      </a:solidFill>
-                    </a:lnR>
-                    <a:lnT w="6350" cmpd="sng">
-                      <a:solidFill>
-                        <a:srgbClr val="334155"/>
-                      </a:solidFill>
-                    </a:lnT>
-                    <a:lnB w="6350" cmpd="sng">
-                      <a:solidFill>
-                        <a:srgbClr val="334155"/>
+                        <a:srgbClr val="1E3A5F"/>
+                      </a:solidFill>
+                    </a:lnL>
+                    <a:lnR w="6350" cmpd="sng">
+                      <a:solidFill>
+                        <a:srgbClr val="1E3A5F"/>
+                      </a:solidFill>
+                    </a:lnR>
+                    <a:lnT w="6350" cmpd="sng">
+                      <a:solidFill>
+                        <a:srgbClr val="1E3A5F"/>
+                      </a:solidFill>
+                    </a:lnT>
+                    <a:lnB w="6350" cmpd="sng">
+                      <a:solidFill>
+                        <a:srgbClr val="1E3A5F"/>
                       </a:solidFill>
                     </a:lnB>
                   </a:tcPr>
@@ -3778,7 +3778,7 @@
                           </a:solidFill>
                           <a:latin typeface="맑은 고딕"/>
                         </a:rPr>
-                        <a:t>주식회사 한빛글로벌 (연구전략Lab / ERP플랫폼기획팀 / RA Lab)</a:t>
+                        <a:t>주식회사 한빛글로벌 (공급망혁신팀 / ERP플랫폼기획팀 / 품질법무검증팀)</a:t>
                       </a:r>
                     </a:p>
                   </a:txBody>
@@ -3788,22 +3788,22 @@
                     </a:solidFill>
                     <a:lnL w="6350" cmpd="sng">
                       <a:solidFill>
-                        <a:srgbClr val="334155"/>
-                      </a:solidFill>
-                    </a:lnL>
-                    <a:lnR w="6350" cmpd="sng">
-                      <a:solidFill>
-                        <a:srgbClr val="334155"/>
-                      </a:solidFill>
-                    </a:lnR>
-                    <a:lnT w="6350" cmpd="sng">
-                      <a:solidFill>
-                        <a:srgbClr val="334155"/>
-                      </a:solidFill>
-                    </a:lnT>
-                    <a:lnB w="6350" cmpd="sng">
-                      <a:solidFill>
-                        <a:srgbClr val="334155"/>
+                        <a:srgbClr val="1E3A5F"/>
+                      </a:solidFill>
+                    </a:lnL>
+                    <a:lnR w="6350" cmpd="sng">
+                      <a:solidFill>
+                        <a:srgbClr val="1E3A5F"/>
+                      </a:solidFill>
+                    </a:lnR>
+                    <a:lnT w="6350" cmpd="sng">
+                      <a:solidFill>
+                        <a:srgbClr val="1E3A5F"/>
+                      </a:solidFill>
+                    </a:lnT>
+                    <a:lnB w="6350" cmpd="sng">
+                      <a:solidFill>
+                        <a:srgbClr val="1E3A5F"/>
                       </a:solidFill>
                     </a:lnB>
                   </a:tcPr>
@@ -3840,22 +3840,22 @@
                     </a:solidFill>
                     <a:lnL w="6350" cmpd="sng">
                       <a:solidFill>
-                        <a:srgbClr val="334155"/>
-                      </a:solidFill>
-                    </a:lnL>
-                    <a:lnR w="6350" cmpd="sng">
-                      <a:solidFill>
-                        <a:srgbClr val="334155"/>
-                      </a:solidFill>
-                    </a:lnR>
-                    <a:lnT w="6350" cmpd="sng">
-                      <a:solidFill>
-                        <a:srgbClr val="334155"/>
-                      </a:solidFill>
-                    </a:lnT>
-                    <a:lnB w="6350" cmpd="sng">
-                      <a:solidFill>
-                        <a:srgbClr val="334155"/>
+                        <a:srgbClr val="1E3A5F"/>
+                      </a:solidFill>
+                    </a:lnL>
+                    <a:lnR w="6350" cmpd="sng">
+                      <a:solidFill>
+                        <a:srgbClr val="1E3A5F"/>
+                      </a:solidFill>
+                    </a:lnR>
+                    <a:lnT w="6350" cmpd="sng">
+                      <a:solidFill>
+                        <a:srgbClr val="1E3A5F"/>
+                      </a:solidFill>
+                    </a:lnT>
+                    <a:lnB w="6350" cmpd="sng">
+                      <a:solidFill>
+                        <a:srgbClr val="1E3A5F"/>
                       </a:solidFill>
                     </a:lnB>
                   </a:tcPr>
@@ -3890,22 +3890,22 @@
                     </a:solidFill>
                     <a:lnL w="6350" cmpd="sng">
                       <a:solidFill>
-                        <a:srgbClr val="334155"/>
-                      </a:solidFill>
-                    </a:lnL>
-                    <a:lnR w="6350" cmpd="sng">
-                      <a:solidFill>
-                        <a:srgbClr val="334155"/>
-                      </a:solidFill>
-                    </a:lnR>
-                    <a:lnT w="6350" cmpd="sng">
-                      <a:solidFill>
-                        <a:srgbClr val="334155"/>
-                      </a:solidFill>
-                    </a:lnT>
-                    <a:lnB w="6350" cmpd="sng">
-                      <a:solidFill>
-                        <a:srgbClr val="334155"/>
+                        <a:srgbClr val="1E3A5F"/>
+                      </a:solidFill>
+                    </a:lnL>
+                    <a:lnR w="6350" cmpd="sng">
+                      <a:solidFill>
+                        <a:srgbClr val="1E3A5F"/>
+                      </a:solidFill>
+                    </a:lnR>
+                    <a:lnT w="6350" cmpd="sng">
+                      <a:solidFill>
+                        <a:srgbClr val="1E3A5F"/>
+                      </a:solidFill>
+                    </a:lnT>
+                    <a:lnB w="6350" cmpd="sng">
+                      <a:solidFill>
+                        <a:srgbClr val="1E3A5F"/>
                       </a:solidFill>
                     </a:lnB>
                   </a:tcPr>
@@ -3942,22 +3942,22 @@
                     </a:solidFill>
                     <a:lnL w="6350" cmpd="sng">
                       <a:solidFill>
-                        <a:srgbClr val="334155"/>
-                      </a:solidFill>
-                    </a:lnL>
-                    <a:lnR w="6350" cmpd="sng">
-                      <a:solidFill>
-                        <a:srgbClr val="334155"/>
-                      </a:solidFill>
-                    </a:lnR>
-                    <a:lnT w="6350" cmpd="sng">
-                      <a:solidFill>
-                        <a:srgbClr val="334155"/>
-                      </a:solidFill>
-                    </a:lnT>
-                    <a:lnB w="6350" cmpd="sng">
-                      <a:solidFill>
-                        <a:srgbClr val="334155"/>
+                        <a:srgbClr val="1E3A5F"/>
+                      </a:solidFill>
+                    </a:lnL>
+                    <a:lnR w="6350" cmpd="sng">
+                      <a:solidFill>
+                        <a:srgbClr val="1E3A5F"/>
+                      </a:solidFill>
+                    </a:lnR>
+                    <a:lnT w="6350" cmpd="sng">
+                      <a:solidFill>
+                        <a:srgbClr val="1E3A5F"/>
+                      </a:solidFill>
+                    </a:lnT>
+                    <a:lnB w="6350" cmpd="sng">
+                      <a:solidFill>
+                        <a:srgbClr val="1E3A5F"/>
                       </a:solidFill>
                     </a:lnB>
                   </a:tcPr>
@@ -3992,22 +3992,22 @@
                     </a:solidFill>
                     <a:lnL w="6350" cmpd="sng">
                       <a:solidFill>
-                        <a:srgbClr val="334155"/>
-                      </a:solidFill>
-                    </a:lnL>
-                    <a:lnR w="6350" cmpd="sng">
-                      <a:solidFill>
-                        <a:srgbClr val="334155"/>
-                      </a:solidFill>
-                    </a:lnR>
-                    <a:lnT w="6350" cmpd="sng">
-                      <a:solidFill>
-                        <a:srgbClr val="334155"/>
-                      </a:solidFill>
-                    </a:lnT>
-                    <a:lnB w="6350" cmpd="sng">
-                      <a:solidFill>
-                        <a:srgbClr val="334155"/>
+                        <a:srgbClr val="1E3A5F"/>
+                      </a:solidFill>
+                    </a:lnL>
+                    <a:lnR w="6350" cmpd="sng">
+                      <a:solidFill>
+                        <a:srgbClr val="1E3A5F"/>
+                      </a:solidFill>
+                    </a:lnR>
+                    <a:lnT w="6350" cmpd="sng">
+                      <a:solidFill>
+                        <a:srgbClr val="1E3A5F"/>
+                      </a:solidFill>
+                    </a:lnT>
+                    <a:lnB w="6350" cmpd="sng">
+                      <a:solidFill>
+                        <a:srgbClr val="1E3A5F"/>
                       </a:solidFill>
                     </a:lnB>
                   </a:tcPr>
@@ -4709,11 +4709,11 @@
             <a:avLst/>
           </a:prstGeom>
           <a:solidFill>
-            <a:srgbClr val="1E293B"/>
+            <a:srgbClr val="0F2942"/>
           </a:solidFill>
           <a:ln w="12700">
             <a:solidFill>
-              <a:srgbClr val="334155"/>
+              <a:srgbClr val="1E3A5F"/>
             </a:solidFill>
           </a:ln>
         </p:spPr>
@@ -4913,7 +4913,7 @@
                 </a:solidFill>
                 <a:latin typeface="맑은 고딕"/>
               </a:rPr>
-              <a:t>• 본 문서는 전사 표준 프로젝트 관리 템플릿이자 한빛글로벌 SyncGuard AI 실전 기준서입니다.</a:t>
+              <a:t>• 본 문서는 전사 표준 프로젝트 관리 템플릿이자 한빛글로벌 SyncFlow AI 실전 기준서입니다.</a:t>
             </a:r>
           </a:p>
           <a:p>
@@ -5265,7 +5265,7 @@
                 </a:solidFill>
                 <a:latin typeface="맑은 고딕"/>
               </a:rPr>
-              <a:t>한빛글로벌 SyncGuard AI 시스템 구축  |  자원 관리 계획서</a:t>
+              <a:t>한빛글로벌 SyncFlow AI 시스템 구축  |  자원 관리 계획서</a:t>
             </a:r>
           </a:p>
         </p:txBody>
@@ -5699,7 +5699,7 @@
                       <a:r>
                         <a:rPr sz="900" b="1">
                           <a:solidFill>
-                            <a:srgbClr val="1E293B"/>
+                            <a:srgbClr val="0F2942"/>
                           </a:solidFill>
                           <a:latin typeface="맑은 고딕"/>
                         </a:rPr>
@@ -5718,7 +5718,7 @@
                       <a:r>
                         <a:rPr sz="900" b="1">
                           <a:solidFill>
-                            <a:srgbClr val="1E293B"/>
+                            <a:srgbClr val="0F2942"/>
                           </a:solidFill>
                           <a:latin typeface="맑은 고딕"/>
                         </a:rPr>
@@ -5768,7 +5768,7 @@
                       <a:r>
                         <a:rPr sz="900" b="1">
                           <a:solidFill>
-                            <a:srgbClr val="1E293B"/>
+                            <a:srgbClr val="0F2942"/>
                           </a:solidFill>
                           <a:latin typeface="맑은 고딕"/>
                         </a:rPr>
@@ -5818,7 +5818,7 @@
                       <a:r>
                         <a:rPr sz="900" b="0">
                           <a:solidFill>
-                            <a:srgbClr val="1E293B"/>
+                            <a:srgbClr val="0F2942"/>
                           </a:solidFill>
                           <a:latin typeface="맑은 고딕"/>
                         </a:rPr>
@@ -5868,7 +5868,7 @@
                       <a:r>
                         <a:rPr sz="900" b="0">
                           <a:solidFill>
-                            <a:srgbClr val="1E293B"/>
+                            <a:srgbClr val="0F2942"/>
                           </a:solidFill>
                           <a:latin typeface="맑은 고딕"/>
                         </a:rPr>
@@ -5918,7 +5918,7 @@
                       <a:r>
                         <a:rPr sz="900" b="0">
                           <a:solidFill>
-                            <a:srgbClr val="1E293B"/>
+                            <a:srgbClr val="0F2942"/>
                           </a:solidFill>
                           <a:latin typeface="맑은 고딕"/>
                         </a:rPr>
@@ -5968,7 +5968,7 @@
                       <a:r>
                         <a:rPr sz="900" b="0">
                           <a:solidFill>
-                            <a:srgbClr val="1E293B"/>
+                            <a:srgbClr val="0F2942"/>
                           </a:solidFill>
                           <a:latin typeface="맑은 고딕"/>
                         </a:rPr>
@@ -6020,7 +6020,7 @@
                       <a:r>
                         <a:rPr sz="900" b="1">
                           <a:solidFill>
-                            <a:srgbClr val="1E293B"/>
+                            <a:srgbClr val="0F2942"/>
                           </a:solidFill>
                           <a:latin typeface="맑은 고딕"/>
                         </a:rPr>
@@ -6039,7 +6039,7 @@
                       <a:r>
                         <a:rPr sz="900" b="1">
                           <a:solidFill>
-                            <a:srgbClr val="1E293B"/>
+                            <a:srgbClr val="0F2942"/>
                           </a:solidFill>
                           <a:latin typeface="맑은 고딕"/>
                         </a:rPr>
@@ -6089,7 +6089,7 @@
                       <a:r>
                         <a:rPr sz="900" b="1">
                           <a:solidFill>
-                            <a:srgbClr val="1E293B"/>
+                            <a:srgbClr val="0F2942"/>
                           </a:solidFill>
                           <a:latin typeface="맑은 고딕"/>
                         </a:rPr>
@@ -6139,7 +6139,7 @@
                       <a:r>
                         <a:rPr sz="900" b="0">
                           <a:solidFill>
-                            <a:srgbClr val="1E293B"/>
+                            <a:srgbClr val="0F2942"/>
                           </a:solidFill>
                           <a:latin typeface="맑은 고딕"/>
                         </a:rPr>
@@ -6189,7 +6189,7 @@
                       <a:r>
                         <a:rPr sz="900" b="0">
                           <a:solidFill>
-                            <a:srgbClr val="1E293B"/>
+                            <a:srgbClr val="0F2942"/>
                           </a:solidFill>
                           <a:latin typeface="맑은 고딕"/>
                         </a:rPr>
@@ -6239,7 +6239,7 @@
                       <a:r>
                         <a:rPr sz="900" b="0">
                           <a:solidFill>
-                            <a:srgbClr val="1E293B"/>
+                            <a:srgbClr val="0F2942"/>
                           </a:solidFill>
                           <a:latin typeface="맑은 고딕"/>
                         </a:rPr>
@@ -6289,7 +6289,7 @@
                       <a:r>
                         <a:rPr sz="900" b="0">
                           <a:solidFill>
-                            <a:srgbClr val="1E293B"/>
+                            <a:srgbClr val="0F2942"/>
                           </a:solidFill>
                           <a:latin typeface="맑은 고딕"/>
                         </a:rPr>
@@ -6341,7 +6341,7 @@
                       <a:r>
                         <a:rPr sz="900" b="1">
                           <a:solidFill>
-                            <a:srgbClr val="1E293B"/>
+                            <a:srgbClr val="0F2942"/>
                           </a:solidFill>
                           <a:latin typeface="맑은 고딕"/>
                         </a:rPr>
@@ -6360,7 +6360,7 @@
                       <a:r>
                         <a:rPr sz="900" b="1">
                           <a:solidFill>
-                            <a:srgbClr val="1E293B"/>
+                            <a:srgbClr val="0F2942"/>
                           </a:solidFill>
                           <a:latin typeface="맑은 고딕"/>
                         </a:rPr>
@@ -6410,7 +6410,7 @@
                       <a:r>
                         <a:rPr sz="900" b="1">
                           <a:solidFill>
-                            <a:srgbClr val="1E293B"/>
+                            <a:srgbClr val="0F2942"/>
                           </a:solidFill>
                           <a:latin typeface="맑은 고딕"/>
                         </a:rPr>
@@ -6460,7 +6460,7 @@
                       <a:r>
                         <a:rPr sz="900" b="0">
                           <a:solidFill>
-                            <a:srgbClr val="1E293B"/>
+                            <a:srgbClr val="0F2942"/>
                           </a:solidFill>
                           <a:latin typeface="맑은 고딕"/>
                         </a:rPr>
@@ -6510,7 +6510,7 @@
                       <a:r>
                         <a:rPr sz="900" b="0">
                           <a:solidFill>
-                            <a:srgbClr val="1E293B"/>
+                            <a:srgbClr val="0F2942"/>
                           </a:solidFill>
                           <a:latin typeface="맑은 고딕"/>
                         </a:rPr>
@@ -6560,7 +6560,7 @@
                       <a:r>
                         <a:rPr sz="900" b="0">
                           <a:solidFill>
-                            <a:srgbClr val="1E293B"/>
+                            <a:srgbClr val="0F2942"/>
                           </a:solidFill>
                           <a:latin typeface="맑은 고딕"/>
                         </a:rPr>
@@ -6610,7 +6610,7 @@
                       <a:r>
                         <a:rPr sz="900" b="0">
                           <a:solidFill>
-                            <a:srgbClr val="1E293B"/>
+                            <a:srgbClr val="0F2942"/>
                           </a:solidFill>
                           <a:latin typeface="맑은 고딕"/>
                         </a:rPr>
@@ -6662,7 +6662,7 @@
                       <a:r>
                         <a:rPr sz="900" b="1">
                           <a:solidFill>
-                            <a:srgbClr val="1E293B"/>
+                            <a:srgbClr val="0F2942"/>
                           </a:solidFill>
                           <a:latin typeface="맑은 고딕"/>
                         </a:rPr>
@@ -6681,7 +6681,7 @@
                       <a:r>
                         <a:rPr sz="900" b="1">
                           <a:solidFill>
-                            <a:srgbClr val="1E293B"/>
+                            <a:srgbClr val="0F2942"/>
                           </a:solidFill>
                           <a:latin typeface="맑은 고딕"/>
                         </a:rPr>
@@ -6731,7 +6731,7 @@
                       <a:r>
                         <a:rPr sz="900" b="1">
                           <a:solidFill>
-                            <a:srgbClr val="1E293B"/>
+                            <a:srgbClr val="0F2942"/>
                           </a:solidFill>
                           <a:latin typeface="맑은 고딕"/>
                         </a:rPr>
@@ -6781,7 +6781,7 @@
                       <a:r>
                         <a:rPr sz="900" b="0">
                           <a:solidFill>
-                            <a:srgbClr val="1E293B"/>
+                            <a:srgbClr val="0F2942"/>
                           </a:solidFill>
                           <a:latin typeface="맑은 고딕"/>
                         </a:rPr>
@@ -6831,7 +6831,7 @@
                       <a:r>
                         <a:rPr sz="900" b="0">
                           <a:solidFill>
-                            <a:srgbClr val="1E293B"/>
+                            <a:srgbClr val="0F2942"/>
                           </a:solidFill>
                           <a:latin typeface="맑은 고딕"/>
                         </a:rPr>
@@ -6881,7 +6881,7 @@
                       <a:r>
                         <a:rPr sz="900" b="0">
                           <a:solidFill>
-                            <a:srgbClr val="1E293B"/>
+                            <a:srgbClr val="0F2942"/>
                           </a:solidFill>
                           <a:latin typeface="맑은 고딕"/>
                         </a:rPr>
@@ -6931,7 +6931,7 @@
                       <a:r>
                         <a:rPr sz="900" b="0">
                           <a:solidFill>
-                            <a:srgbClr val="1E293B"/>
+                            <a:srgbClr val="0F2942"/>
                           </a:solidFill>
                           <a:latin typeface="맑은 고딕"/>
                         </a:rPr>
@@ -6983,7 +6983,7 @@
                       <a:r>
                         <a:rPr sz="900" b="1">
                           <a:solidFill>
-                            <a:srgbClr val="1E293B"/>
+                            <a:srgbClr val="0F2942"/>
                           </a:solidFill>
                           <a:latin typeface="맑은 고딕"/>
                         </a:rPr>
@@ -7002,7 +7002,7 @@
                       <a:r>
                         <a:rPr sz="900" b="1">
                           <a:solidFill>
-                            <a:srgbClr val="1E293B"/>
+                            <a:srgbClr val="0F2942"/>
                           </a:solidFill>
                           <a:latin typeface="맑은 고딕"/>
                         </a:rPr>
@@ -7052,7 +7052,7 @@
                       <a:r>
                         <a:rPr sz="900" b="1">
                           <a:solidFill>
-                            <a:srgbClr val="1E293B"/>
+                            <a:srgbClr val="0F2942"/>
                           </a:solidFill>
                           <a:latin typeface="맑은 고딕"/>
                         </a:rPr>
@@ -7102,7 +7102,7 @@
                       <a:r>
                         <a:rPr sz="900" b="0">
                           <a:solidFill>
-                            <a:srgbClr val="1E293B"/>
+                            <a:srgbClr val="0F2942"/>
                           </a:solidFill>
                           <a:latin typeface="맑은 고딕"/>
                         </a:rPr>
@@ -7152,7 +7152,7 @@
                       <a:r>
                         <a:rPr sz="900" b="0">
                           <a:solidFill>
-                            <a:srgbClr val="1E293B"/>
+                            <a:srgbClr val="0F2942"/>
                           </a:solidFill>
                           <a:latin typeface="맑은 고딕"/>
                         </a:rPr>
@@ -7202,7 +7202,7 @@
                       <a:r>
                         <a:rPr sz="900" b="0">
                           <a:solidFill>
-                            <a:srgbClr val="1E293B"/>
+                            <a:srgbClr val="0F2942"/>
                           </a:solidFill>
                           <a:latin typeface="맑은 고딕"/>
                         </a:rPr>
@@ -7252,7 +7252,7 @@
                       <a:r>
                         <a:rPr sz="900" b="0">
                           <a:solidFill>
-                            <a:srgbClr val="1E293B"/>
+                            <a:srgbClr val="0F2942"/>
                           </a:solidFill>
                           <a:latin typeface="맑은 고딕"/>
                         </a:rPr>
@@ -7304,7 +7304,7 @@
                       <a:r>
                         <a:rPr sz="900" b="1">
                           <a:solidFill>
-                            <a:srgbClr val="1E293B"/>
+                            <a:srgbClr val="0F2942"/>
                           </a:solidFill>
                           <a:latin typeface="맑은 고딕"/>
                         </a:rPr>
@@ -7323,7 +7323,7 @@
                       <a:r>
                         <a:rPr sz="900" b="1">
                           <a:solidFill>
-                            <a:srgbClr val="1E293B"/>
+                            <a:srgbClr val="0F2942"/>
                           </a:solidFill>
                           <a:latin typeface="맑은 고딕"/>
                         </a:rPr>
@@ -7373,7 +7373,7 @@
                       <a:r>
                         <a:rPr sz="900" b="1">
                           <a:solidFill>
-                            <a:srgbClr val="1E293B"/>
+                            <a:srgbClr val="0F2942"/>
                           </a:solidFill>
                           <a:latin typeface="맑은 고딕"/>
                         </a:rPr>
@@ -7423,7 +7423,7 @@
                       <a:r>
                         <a:rPr sz="900" b="0">
                           <a:solidFill>
-                            <a:srgbClr val="1E293B"/>
+                            <a:srgbClr val="0F2942"/>
                           </a:solidFill>
                           <a:latin typeface="맑은 고딕"/>
                         </a:rPr>
@@ -7473,7 +7473,7 @@
                       <a:r>
                         <a:rPr sz="900" b="0">
                           <a:solidFill>
-                            <a:srgbClr val="1E293B"/>
+                            <a:srgbClr val="0F2942"/>
                           </a:solidFill>
                           <a:latin typeface="맑은 고딕"/>
                         </a:rPr>
@@ -7523,7 +7523,7 @@
                       <a:r>
                         <a:rPr sz="900" b="0">
                           <a:solidFill>
-                            <a:srgbClr val="1E293B"/>
+                            <a:srgbClr val="0F2942"/>
                           </a:solidFill>
                           <a:latin typeface="맑은 고딕"/>
                         </a:rPr>
@@ -7573,7 +7573,7 @@
                       <a:r>
                         <a:rPr sz="900" b="0">
                           <a:solidFill>
-                            <a:srgbClr val="1E293B"/>
+                            <a:srgbClr val="0F2942"/>
                           </a:solidFill>
                           <a:latin typeface="맑은 고딕"/>
                         </a:rPr>
@@ -7625,7 +7625,7 @@
                       <a:r>
                         <a:rPr sz="900" b="1">
                           <a:solidFill>
-                            <a:srgbClr val="1E293B"/>
+                            <a:srgbClr val="0F2942"/>
                           </a:solidFill>
                           <a:latin typeface="맑은 고딕"/>
                         </a:rPr>
@@ -7644,7 +7644,7 @@
                       <a:r>
                         <a:rPr sz="900" b="1">
                           <a:solidFill>
-                            <a:srgbClr val="1E293B"/>
+                            <a:srgbClr val="0F2942"/>
                           </a:solidFill>
                           <a:latin typeface="맑은 고딕"/>
                         </a:rPr>
@@ -7694,7 +7694,7 @@
                       <a:r>
                         <a:rPr sz="900" b="1">
                           <a:solidFill>
-                            <a:srgbClr val="1E293B"/>
+                            <a:srgbClr val="0F2942"/>
                           </a:solidFill>
                           <a:latin typeface="맑은 고딕"/>
                         </a:rPr>
@@ -7744,7 +7744,7 @@
                       <a:r>
                         <a:rPr sz="900" b="0">
                           <a:solidFill>
-                            <a:srgbClr val="1E293B"/>
+                            <a:srgbClr val="0F2942"/>
                           </a:solidFill>
                           <a:latin typeface="맑은 고딕"/>
                         </a:rPr>
@@ -7794,7 +7794,7 @@
                       <a:r>
                         <a:rPr sz="900" b="0">
                           <a:solidFill>
-                            <a:srgbClr val="1E293B"/>
+                            <a:srgbClr val="0F2942"/>
                           </a:solidFill>
                           <a:latin typeface="맑은 고딕"/>
                         </a:rPr>
@@ -7844,7 +7844,7 @@
                       <a:r>
                         <a:rPr sz="900" b="0">
                           <a:solidFill>
-                            <a:srgbClr val="1E293B"/>
+                            <a:srgbClr val="0F2942"/>
                           </a:solidFill>
                           <a:latin typeface="맑은 고딕"/>
                         </a:rPr>
@@ -7894,7 +7894,7 @@
                       <a:r>
                         <a:rPr sz="900" b="0">
                           <a:solidFill>
-                            <a:srgbClr val="1E293B"/>
+                            <a:srgbClr val="0F2942"/>
                           </a:solidFill>
                           <a:latin typeface="맑은 고딕"/>
                         </a:rPr>
@@ -7946,7 +7946,7 @@
                       <a:r>
                         <a:rPr sz="900" b="1">
                           <a:solidFill>
-                            <a:srgbClr val="1E293B"/>
+                            <a:srgbClr val="0F2942"/>
                           </a:solidFill>
                           <a:latin typeface="맑은 고딕"/>
                         </a:rPr>
@@ -7965,7 +7965,7 @@
                       <a:r>
                         <a:rPr sz="900" b="1">
                           <a:solidFill>
-                            <a:srgbClr val="1E293B"/>
+                            <a:srgbClr val="0F2942"/>
                           </a:solidFill>
                           <a:latin typeface="맑은 고딕"/>
                         </a:rPr>
@@ -8015,7 +8015,7 @@
                       <a:r>
                         <a:rPr sz="900" b="1">
                           <a:solidFill>
-                            <a:srgbClr val="1E293B"/>
+                            <a:srgbClr val="0F2942"/>
                           </a:solidFill>
                           <a:latin typeface="맑은 고딕"/>
                         </a:rPr>
@@ -8065,7 +8065,7 @@
                       <a:r>
                         <a:rPr sz="900" b="0">
                           <a:solidFill>
-                            <a:srgbClr val="1E293B"/>
+                            <a:srgbClr val="0F2942"/>
                           </a:solidFill>
                           <a:latin typeface="맑은 고딕"/>
                         </a:rPr>
@@ -8115,7 +8115,7 @@
                       <a:r>
                         <a:rPr sz="900" b="0">
                           <a:solidFill>
-                            <a:srgbClr val="1E293B"/>
+                            <a:srgbClr val="0F2942"/>
                           </a:solidFill>
                           <a:latin typeface="맑은 고딕"/>
                         </a:rPr>
@@ -8165,7 +8165,7 @@
                       <a:r>
                         <a:rPr sz="900" b="0">
                           <a:solidFill>
-                            <a:srgbClr val="1E293B"/>
+                            <a:srgbClr val="0F2942"/>
                           </a:solidFill>
                           <a:latin typeface="맑은 고딕"/>
                         </a:rPr>
@@ -8215,7 +8215,7 @@
                       <a:r>
                         <a:rPr sz="900" b="0">
                           <a:solidFill>
-                            <a:srgbClr val="1E293B"/>
+                            <a:srgbClr val="0F2942"/>
                           </a:solidFill>
                           <a:latin typeface="맑은 고딕"/>
                         </a:rPr>
@@ -8693,7 +8693,7 @@
                 </a:solidFill>
                 <a:latin typeface="맑은 고딕"/>
               </a:rPr>
-              <a:t>한빛글로벌 SyncGuard AI 시스템 구축  |  자원 관리 계획서</a:t>
+              <a:t>한빛글로벌 SyncFlow AI 시스템 구축  |  자원 관리 계획서</a:t>
             </a:r>
           </a:p>
         </p:txBody>
@@ -9118,7 +9118,7 @@
                       <a:r>
                         <a:rPr sz="900" b="1">
                           <a:solidFill>
-                            <a:srgbClr val="1E293B"/>
+                            <a:srgbClr val="0F2942"/>
                           </a:solidFill>
                           <a:latin typeface="맑은 고딕"/>
                         </a:rPr>
@@ -9168,7 +9168,7 @@
                       <a:r>
                         <a:rPr sz="900" b="0">
                           <a:solidFill>
-                            <a:srgbClr val="1E293B"/>
+                            <a:srgbClr val="0F2942"/>
                           </a:solidFill>
                           <a:latin typeface="맑은 고딕"/>
                         </a:rPr>
@@ -9218,7 +9218,7 @@
                       <a:r>
                         <a:rPr sz="900" b="0">
                           <a:solidFill>
-                            <a:srgbClr val="1E293B"/>
+                            <a:srgbClr val="0F2942"/>
                           </a:solidFill>
                           <a:latin typeface="맑은 고딕"/>
                         </a:rPr>
@@ -9268,7 +9268,7 @@
                       <a:r>
                         <a:rPr sz="900" b="0">
                           <a:solidFill>
-                            <a:srgbClr val="1E293B"/>
+                            <a:srgbClr val="0F2942"/>
                           </a:solidFill>
                           <a:latin typeface="맑은 고딕"/>
                         </a:rPr>
@@ -9318,7 +9318,7 @@
                       <a:r>
                         <a:rPr sz="900" b="0">
                           <a:solidFill>
-                            <a:srgbClr val="1E293B"/>
+                            <a:srgbClr val="0F2942"/>
                           </a:solidFill>
                           <a:latin typeface="맑은 고딕"/>
                         </a:rPr>
@@ -9370,7 +9370,7 @@
                       <a:r>
                         <a:rPr sz="900" b="1">
                           <a:solidFill>
-                            <a:srgbClr val="1E293B"/>
+                            <a:srgbClr val="0F2942"/>
                           </a:solidFill>
                           <a:latin typeface="맑은 고딕"/>
                         </a:rPr>
@@ -9420,7 +9420,7 @@
                       <a:r>
                         <a:rPr sz="900" b="0">
                           <a:solidFill>
-                            <a:srgbClr val="1E293B"/>
+                            <a:srgbClr val="0F2942"/>
                           </a:solidFill>
                           <a:latin typeface="맑은 고딕"/>
                         </a:rPr>
@@ -9470,7 +9470,7 @@
                       <a:r>
                         <a:rPr sz="900" b="0">
                           <a:solidFill>
-                            <a:srgbClr val="1E293B"/>
+                            <a:srgbClr val="0F2942"/>
                           </a:solidFill>
                           <a:latin typeface="맑은 고딕"/>
                         </a:rPr>
@@ -9520,7 +9520,7 @@
                       <a:r>
                         <a:rPr sz="900" b="0">
                           <a:solidFill>
-                            <a:srgbClr val="1E293B"/>
+                            <a:srgbClr val="0F2942"/>
                           </a:solidFill>
                           <a:latin typeface="맑은 고딕"/>
                         </a:rPr>
@@ -9570,7 +9570,7 @@
                       <a:r>
                         <a:rPr sz="900" b="0">
                           <a:solidFill>
-                            <a:srgbClr val="1E293B"/>
+                            <a:srgbClr val="0F2942"/>
                           </a:solidFill>
                           <a:latin typeface="맑은 고딕"/>
                         </a:rPr>
@@ -9622,7 +9622,7 @@
                       <a:r>
                         <a:rPr sz="900" b="1">
                           <a:solidFill>
-                            <a:srgbClr val="1E293B"/>
+                            <a:srgbClr val="0F2942"/>
                           </a:solidFill>
                           <a:latin typeface="맑은 고딕"/>
                         </a:rPr>
@@ -9672,7 +9672,7 @@
                       <a:r>
                         <a:rPr sz="900" b="0">
                           <a:solidFill>
-                            <a:srgbClr val="1E293B"/>
+                            <a:srgbClr val="0F2942"/>
                           </a:solidFill>
                           <a:latin typeface="맑은 고딕"/>
                         </a:rPr>
@@ -9722,7 +9722,7 @@
                       <a:r>
                         <a:rPr sz="900" b="0">
                           <a:solidFill>
-                            <a:srgbClr val="1E293B"/>
+                            <a:srgbClr val="0F2942"/>
                           </a:solidFill>
                           <a:latin typeface="맑은 고딕"/>
                         </a:rPr>
@@ -9772,7 +9772,7 @@
                       <a:r>
                         <a:rPr sz="900" b="0">
                           <a:solidFill>
-                            <a:srgbClr val="1E293B"/>
+                            <a:srgbClr val="0F2942"/>
                           </a:solidFill>
                           <a:latin typeface="맑은 고딕"/>
                         </a:rPr>
@@ -9822,7 +9822,7 @@
                       <a:r>
                         <a:rPr sz="900" b="0">
                           <a:solidFill>
-                            <a:srgbClr val="1E293B"/>
+                            <a:srgbClr val="0F2942"/>
                           </a:solidFill>
                           <a:latin typeface="맑은 고딕"/>
                         </a:rPr>
@@ -10076,7 +10076,7 @@
             <a:r>
               <a:rPr sz="950" b="0">
                 <a:solidFill>
-                  <a:srgbClr val="1E293B"/>
+                  <a:srgbClr val="0F2942"/>
                 </a:solidFill>
                 <a:latin typeface="맑은 고딕"/>
               </a:rPr>
@@ -10095,7 +10095,7 @@
             <a:r>
               <a:rPr sz="950" b="0">
                 <a:solidFill>
-                  <a:srgbClr val="1E293B"/>
+                  <a:srgbClr val="0F2942"/>
                 </a:solidFill>
                 <a:latin typeface="맑은 고딕"/>
               </a:rPr>
@@ -10114,11 +10114,11 @@
             <a:r>
               <a:rPr sz="950" b="0">
                 <a:solidFill>
-                  <a:srgbClr val="1E293B"/>
+                  <a:srgbClr val="0F2942"/>
                 </a:solidFill>
                 <a:latin typeface="맑은 고딕"/>
               </a:rPr>
-              <a:t>3. 교체 필수 항목 : SyncGuard AI 시스템 구축 사업, [발주사/수행사 조직], [사업기간 및 M1~M6 일정], [산출물 ID 체계], [인력/인프라 수량]</a:t>
+              <a:t>3. 교체 필수 항목 : SyncFlow AI 시스템 구축 사업, [발주사/수행사 조직], [사업기간 및 M1~M6 일정], [산출물 ID 체계], [인력/인프라 수량]</a:t>
             </a:r>
           </a:p>
           <a:p>
@@ -10133,7 +10133,7 @@
             <a:r>
               <a:rPr sz="950" b="0">
                 <a:solidFill>
-                  <a:srgbClr val="1E293B"/>
+                  <a:srgbClr val="0F2942"/>
                 </a:solidFill>
                 <a:latin typeface="맑은 고딕"/>
               </a:rPr>
@@ -11417,7 +11417,7 @@
                 </a:solidFill>
                 <a:latin typeface="맑은 고딕"/>
               </a:rPr>
-              <a:t>Spring Boot 3, Vue 3, FastAPI, 상용 LLM(비학습), 클로바 OCR, 사내 연계 4종</a:t>
+              <a:t>Spring Boot 3, Vue 3, FastAPI, 상용 LLM(비학습), 비전 OCR, 사내 연계 4종</a:t>
             </a:r>
           </a:p>
         </p:txBody>
@@ -12541,7 +12541,7 @@
                 </a:solidFill>
                 <a:latin typeface="맑은 고딕"/>
               </a:rPr>
-              <a:t>한빛글로벌 SyncGuard AI 시스템 구축  |  자원 관리 계획서</a:t>
+              <a:t>한빛글로벌 SyncFlow AI 시스템 구축  |  자원 관리 계획서</a:t>
             </a:r>
           </a:p>
         </p:txBody>
@@ -12765,7 +12765,7 @@
                 </a:solidFill>
                 <a:latin typeface="맑은 고딕"/>
               </a:rPr>
-              <a:t>화장품 규제·AI·클라우드 전문 인력 적기 투입</a:t>
+              <a:t>전장부품 규제·AI·클라우드 전문 인력 적기 투입</a:t>
             </a:r>
           </a:p>
         </p:txBody>
@@ -12845,11 +12845,11 @@
             <a:r>
               <a:rPr sz="1050" b="0">
                 <a:solidFill>
-                  <a:srgbClr val="1E293B"/>
+                  <a:srgbClr val="0F2942"/>
                 </a:solidFill>
                 <a:latin typeface="맑은 고딕"/>
               </a:rPr>
-              <a:t>• 사업총괄/AA(박준혁), 수행PM(김태윤), PMO(이지훈), 개발리드(최현우), AI/프론트 엔지니어 및 데이터브릿지 실증DB팀 구성</a:t>
+              <a:t>• 사업총괄/AA(박준혁), 수행PM(김태윤), PMO(이지훈), 개발리드(최현우), AI/프론트 엔지니어 및 데이터브릿지 시험검증DB팀 구성</a:t>
             </a:r>
           </a:p>
           <a:p>
@@ -12864,7 +12864,7 @@
             <a:r>
               <a:rPr sz="1050" b="0">
                 <a:solidFill>
-                  <a:srgbClr val="1E293B"/>
+                  <a:srgbClr val="0F2942"/>
                 </a:solidFill>
                 <a:latin typeface="맑은 고딕"/>
               </a:rPr>
@@ -12883,7 +12883,7 @@
             <a:r>
               <a:rPr sz="1050" b="0">
                 <a:solidFill>
-                  <a:srgbClr val="1E293B"/>
+                  <a:srgbClr val="0F2942"/>
                 </a:solidFill>
                 <a:latin typeface="맑은 고딕"/>
               </a:rPr>
@@ -13107,7 +13107,7 @@
             <a:r>
               <a:rPr sz="1050" b="0">
                 <a:solidFill>
-                  <a:srgbClr val="1E293B"/>
+                  <a:srgbClr val="0F2942"/>
                 </a:solidFill>
                 <a:latin typeface="맑은 고딕"/>
               </a:rPr>
@@ -13126,11 +13126,11 @@
             <a:r>
               <a:rPr sz="1050" b="0">
                 <a:solidFill>
-                  <a:srgbClr val="1E293B"/>
+                  <a:srgbClr val="0F2942"/>
                 </a:solidFill>
                 <a:latin typeface="맑은 고딕"/>
               </a:rPr>
-              <a:t>• 트래픽 격리를 위해 사내 사용자용(syncguard-ai-bo-prv-alb)과 기간계 연동용(syncguard-ai-api-prv-alb) 내부 ALB 2개 물리 분리</a:t>
+              <a:t>• 트래픽 격리를 위해 사내 사용자용(syncflow-ai-bo-prv-alb)과 기간계 연동용(syncflow-ai-api-prv-alb) 내부 ALB 2개 물리 분리</a:t>
             </a:r>
           </a:p>
           <a:p>
@@ -13145,7 +13145,7 @@
             <a:r>
               <a:rPr sz="1050" b="0">
                 <a:solidFill>
-                  <a:srgbClr val="1E293B"/>
+                  <a:srgbClr val="0F2942"/>
                 </a:solidFill>
                 <a:latin typeface="맑은 고딕"/>
               </a:rPr>
@@ -13369,7 +13369,7 @@
             <a:r>
               <a:rPr sz="1050" b="0">
                 <a:solidFill>
-                  <a:srgbClr val="1E293B"/>
+                  <a:srgbClr val="0F2942"/>
                 </a:solidFill>
                 <a:latin typeface="맑은 고딕"/>
               </a:rPr>
@@ -13388,11 +13388,11 @@
             <a:r>
               <a:rPr sz="1050" b="0">
                 <a:solidFill>
-                  <a:srgbClr val="1E293B"/>
+                  <a:srgbClr val="0F2942"/>
                 </a:solidFill>
                 <a:latin typeface="맑은 고딕"/>
               </a:rPr>
-              <a:t>• 외부 AI 자원 : 기업용 상용 LLM API(Zero-Data Retention 비학습 계약) 및 네이버 클로바 OCR API 연동 및 토큰 쿼터 관리</a:t>
+              <a:t>• 외부 AI 자원 : 기업용 상용 LLM API(Zero-Data Retention 비학습 계약) 및 엔터프라이즈 비전 OCR API 연동 및 토큰 쿼터 관리</a:t>
             </a:r>
           </a:p>
           <a:p>
@@ -13407,7 +13407,7 @@
             <a:r>
               <a:rPr sz="1050" b="0">
                 <a:solidFill>
-                  <a:srgbClr val="1E293B"/>
+                  <a:srgbClr val="0F2942"/>
                 </a:solidFill>
                 <a:latin typeface="맑은 고딕"/>
               </a:rPr>
@@ -13631,7 +13631,7 @@
             <a:r>
               <a:rPr sz="1050" b="0">
                 <a:solidFill>
-                  <a:srgbClr val="1E293B"/>
+                  <a:srgbClr val="0F2942"/>
                 </a:solidFill>
                 <a:latin typeface="맑은 고딕"/>
               </a:rPr>
@@ -13650,7 +13650,7 @@
             <a:r>
               <a:rPr sz="1050" b="0">
                 <a:solidFill>
-                  <a:srgbClr val="1E293B"/>
+                  <a:srgbClr val="0F2942"/>
                 </a:solidFill>
                 <a:latin typeface="맑은 고딕"/>
               </a:rPr>
@@ -13669,7 +13669,7 @@
             <a:r>
               <a:rPr sz="1050" b="0">
                 <a:solidFill>
-                  <a:srgbClr val="1E293B"/>
+                  <a:srgbClr val="0F2942"/>
                 </a:solidFill>
                 <a:latin typeface="맑은 고딕"/>
               </a:rPr>
@@ -13989,7 +13989,7 @@
                 </a:solidFill>
                 <a:latin typeface="맑은 고딕"/>
               </a:rPr>
-              <a:t>총괄 아키텍트(AA)와 수행 PM의 양축 리더십 하에 AI 엔지니어링, 응용 웹/백엔드, 실증DB 연계 파트가 유기적으로 협업합니다.</a:t>
+              <a:t>총괄 아키텍트(AA)와 수행 PM의 양축 리더십 하에 AI 엔지니어링, 응용 웹/백엔드, 시험검증DB 연계 파트가 유기적으로 협업합니다.</a:t>
             </a:r>
           </a:p>
         </p:txBody>
@@ -14117,7 +14117,7 @@
                 </a:solidFill>
                 <a:latin typeface="맑은 고딕"/>
               </a:rPr>
-              <a:t>한빛글로벌 SyncGuard AI 시스템 구축  |  자원 관리 계획서</a:t>
+              <a:t>한빛글로벌 SyncFlow AI 시스템 구축  |  자원 관리 계획서</a:t>
             </a:r>
           </a:p>
         </p:txBody>
@@ -14551,7 +14551,7 @@
                       <a:r>
                         <a:rPr sz="900" b="1">
                           <a:solidFill>
-                            <a:srgbClr val="1E293B"/>
+                            <a:srgbClr val="0F2942"/>
                           </a:solidFill>
                           <a:latin typeface="맑은 고딕"/>
                         </a:rPr>
@@ -14601,7 +14601,7 @@
                       <a:r>
                         <a:rPr sz="900" b="1">
                           <a:solidFill>
-                            <a:srgbClr val="1E293B"/>
+                            <a:srgbClr val="0F2942"/>
                           </a:solidFill>
                           <a:latin typeface="맑은 고딕"/>
                         </a:rPr>
@@ -14651,7 +14651,7 @@
                       <a:r>
                         <a:rPr sz="900" b="0">
                           <a:solidFill>
-                            <a:srgbClr val="1E293B"/>
+                            <a:srgbClr val="0F2942"/>
                           </a:solidFill>
                           <a:latin typeface="맑은 고딕"/>
                         </a:rPr>
@@ -14701,7 +14701,7 @@
                       <a:r>
                         <a:rPr sz="900" b="0">
                           <a:solidFill>
-                            <a:srgbClr val="1E293B"/>
+                            <a:srgbClr val="0F2942"/>
                           </a:solidFill>
                           <a:latin typeface="맑은 고딕"/>
                         </a:rPr>
@@ -14751,7 +14751,7 @@
                       <a:r>
                         <a:rPr sz="900" b="1">
                           <a:solidFill>
-                            <a:srgbClr val="1E293B"/>
+                            <a:srgbClr val="0F2942"/>
                           </a:solidFill>
                           <a:latin typeface="맑은 고딕"/>
                         </a:rPr>
@@ -14801,7 +14801,7 @@
                       <a:r>
                         <a:rPr sz="900" b="0">
                           <a:solidFill>
-                            <a:srgbClr val="1E293B"/>
+                            <a:srgbClr val="0F2942"/>
                           </a:solidFill>
                           <a:latin typeface="맑은 고딕"/>
                         </a:rPr>
@@ -14820,7 +14820,7 @@
                       <a:r>
                         <a:rPr sz="900" b="0">
                           <a:solidFill>
-                            <a:srgbClr val="1E293B"/>
+                            <a:srgbClr val="0F2942"/>
                           </a:solidFill>
                           <a:latin typeface="맑은 고딕"/>
                         </a:rPr>
@@ -14872,7 +14872,7 @@
                       <a:r>
                         <a:rPr sz="900" b="1">
                           <a:solidFill>
-                            <a:srgbClr val="1E293B"/>
+                            <a:srgbClr val="0F2942"/>
                           </a:solidFill>
                           <a:latin typeface="맑은 고딕"/>
                         </a:rPr>
@@ -14922,7 +14922,7 @@
                       <a:r>
                         <a:rPr sz="900" b="1">
                           <a:solidFill>
-                            <a:srgbClr val="1E293B"/>
+                            <a:srgbClr val="0F2942"/>
                           </a:solidFill>
                           <a:latin typeface="맑은 고딕"/>
                         </a:rPr>
@@ -14972,7 +14972,7 @@
                       <a:r>
                         <a:rPr sz="900" b="0">
                           <a:solidFill>
-                            <a:srgbClr val="1E293B"/>
+                            <a:srgbClr val="0F2942"/>
                           </a:solidFill>
                           <a:latin typeface="맑은 고딕"/>
                         </a:rPr>
@@ -15022,7 +15022,7 @@
                       <a:r>
                         <a:rPr sz="900" b="0">
                           <a:solidFill>
-                            <a:srgbClr val="1E293B"/>
+                            <a:srgbClr val="0F2942"/>
                           </a:solidFill>
                           <a:latin typeface="맑은 고딕"/>
                         </a:rPr>
@@ -15072,7 +15072,7 @@
                       <a:r>
                         <a:rPr sz="900" b="1">
                           <a:solidFill>
-                            <a:srgbClr val="1E293B"/>
+                            <a:srgbClr val="0F2942"/>
                           </a:solidFill>
                           <a:latin typeface="맑은 고딕"/>
                         </a:rPr>
@@ -15122,7 +15122,7 @@
                       <a:r>
                         <a:rPr sz="900" b="0">
                           <a:solidFill>
-                            <a:srgbClr val="1E293B"/>
+                            <a:srgbClr val="0F2942"/>
                           </a:solidFill>
                           <a:latin typeface="맑은 고딕"/>
                         </a:rPr>
@@ -15141,7 +15141,7 @@
                       <a:r>
                         <a:rPr sz="900" b="0">
                           <a:solidFill>
-                            <a:srgbClr val="1E293B"/>
+                            <a:srgbClr val="0F2942"/>
                           </a:solidFill>
                           <a:latin typeface="맑은 고딕"/>
                         </a:rPr>
@@ -15193,7 +15193,7 @@
                       <a:r>
                         <a:rPr sz="900" b="1">
                           <a:solidFill>
-                            <a:srgbClr val="1E293B"/>
+                            <a:srgbClr val="0F2942"/>
                           </a:solidFill>
                           <a:latin typeface="맑은 고딕"/>
                         </a:rPr>
@@ -15243,7 +15243,7 @@
                       <a:r>
                         <a:rPr sz="900" b="1">
                           <a:solidFill>
-                            <a:srgbClr val="1E293B"/>
+                            <a:srgbClr val="0F2942"/>
                           </a:solidFill>
                           <a:latin typeface="맑은 고딕"/>
                         </a:rPr>
@@ -15293,7 +15293,7 @@
                       <a:r>
                         <a:rPr sz="900" b="0">
                           <a:solidFill>
-                            <a:srgbClr val="1E293B"/>
+                            <a:srgbClr val="0F2942"/>
                           </a:solidFill>
                           <a:latin typeface="맑은 고딕"/>
                         </a:rPr>
@@ -15343,7 +15343,7 @@
                       <a:r>
                         <a:rPr sz="900" b="0">
                           <a:solidFill>
-                            <a:srgbClr val="1E293B"/>
+                            <a:srgbClr val="0F2942"/>
                           </a:solidFill>
                           <a:latin typeface="맑은 고딕"/>
                         </a:rPr>
@@ -15393,7 +15393,7 @@
                       <a:r>
                         <a:rPr sz="900" b="1">
                           <a:solidFill>
-                            <a:srgbClr val="1E293B"/>
+                            <a:srgbClr val="0F2942"/>
                           </a:solidFill>
                           <a:latin typeface="맑은 고딕"/>
                         </a:rPr>
@@ -15443,7 +15443,7 @@
                       <a:r>
                         <a:rPr sz="900" b="0">
                           <a:solidFill>
-                            <a:srgbClr val="1E293B"/>
+                            <a:srgbClr val="0F2942"/>
                           </a:solidFill>
                           <a:latin typeface="맑은 고딕"/>
                         </a:rPr>
@@ -15462,7 +15462,7 @@
                       <a:r>
                         <a:rPr sz="900" b="0">
                           <a:solidFill>
-                            <a:srgbClr val="1E293B"/>
+                            <a:srgbClr val="0F2942"/>
                           </a:solidFill>
                           <a:latin typeface="맑은 고딕"/>
                         </a:rPr>
@@ -15514,7 +15514,7 @@
                       <a:r>
                         <a:rPr sz="900" b="1">
                           <a:solidFill>
-                            <a:srgbClr val="1E293B"/>
+                            <a:srgbClr val="0F2942"/>
                           </a:solidFill>
                           <a:latin typeface="맑은 고딕"/>
                         </a:rPr>
@@ -15564,7 +15564,7 @@
                       <a:r>
                         <a:rPr sz="900" b="1">
                           <a:solidFill>
-                            <a:srgbClr val="1E293B"/>
+                            <a:srgbClr val="0F2942"/>
                           </a:solidFill>
                           <a:latin typeface="맑은 고딕"/>
                         </a:rPr>
@@ -15614,7 +15614,7 @@
                       <a:r>
                         <a:rPr sz="900" b="0">
                           <a:solidFill>
-                            <a:srgbClr val="1E293B"/>
+                            <a:srgbClr val="0F2942"/>
                           </a:solidFill>
                           <a:latin typeface="맑은 고딕"/>
                         </a:rPr>
@@ -15633,7 +15633,7 @@
                       <a:r>
                         <a:rPr sz="900" b="0">
                           <a:solidFill>
-                            <a:srgbClr val="1E293B"/>
+                            <a:srgbClr val="0F2942"/>
                           </a:solidFill>
                           <a:latin typeface="맑은 고딕"/>
                         </a:rPr>
@@ -15683,7 +15683,7 @@
                       <a:r>
                         <a:rPr sz="900" b="0">
                           <a:solidFill>
-                            <a:srgbClr val="1E293B"/>
+                            <a:srgbClr val="0F2942"/>
                           </a:solidFill>
                           <a:latin typeface="맑은 고딕"/>
                         </a:rPr>
@@ -15733,7 +15733,7 @@
                       <a:r>
                         <a:rPr sz="900" b="1">
                           <a:solidFill>
-                            <a:srgbClr val="1E293B"/>
+                            <a:srgbClr val="0F2942"/>
                           </a:solidFill>
                           <a:latin typeface="맑은 고딕"/>
                         </a:rPr>
@@ -15783,11 +15783,11 @@
                       <a:r>
                         <a:rPr sz="900" b="0">
                           <a:solidFill>
-                            <a:srgbClr val="1E293B"/>
-                          </a:solidFill>
-                          <a:latin typeface="맑은 고딕"/>
-                        </a:rPr>
-                        <a:t>• 1단계 100대 규칙사전 엔진, 2단계 식약처 가이드라인 pgvector(1536d) RAG 구현</a:t>
+                            <a:srgbClr val="0F2942"/>
+                          </a:solidFill>
+                          <a:latin typeface="맑은 고딕"/>
+                        </a:rPr>
+                        <a:t>• 1단계 100대 규칙사전 엔진, 2단계 공정위·표준원 가이드라인 pgvector(1536d) RAG 구현</a:t>
                       </a:r>
                     </a:p>
                     <a:p>
@@ -15802,7 +15802,7 @@
                       <a:r>
                         <a:rPr sz="900" b="0">
                           <a:solidFill>
-                            <a:srgbClr val="1E293B"/>
+                            <a:srgbClr val="0F2942"/>
                           </a:solidFill>
                           <a:latin typeface="맑은 고딕"/>
                         </a:rPr>
@@ -15854,7 +15854,7 @@
                       <a:r>
                         <a:rPr sz="900" b="1">
                           <a:solidFill>
-                            <a:srgbClr val="1E293B"/>
+                            <a:srgbClr val="0F2942"/>
                           </a:solidFill>
                           <a:latin typeface="맑은 고딕"/>
                         </a:rPr>
@@ -15904,7 +15904,7 @@
                       <a:r>
                         <a:rPr sz="900" b="1">
                           <a:solidFill>
-                            <a:srgbClr val="1E293B"/>
+                            <a:srgbClr val="0F2942"/>
                           </a:solidFill>
                           <a:latin typeface="맑은 고딕"/>
                         </a:rPr>
@@ -15954,7 +15954,7 @@
                       <a:r>
                         <a:rPr sz="900" b="0">
                           <a:solidFill>
-                            <a:srgbClr val="1E293B"/>
+                            <a:srgbClr val="0F2942"/>
                           </a:solidFill>
                           <a:latin typeface="맑은 고딕"/>
                         </a:rPr>
@@ -15973,7 +15973,7 @@
                       <a:r>
                         <a:rPr sz="900" b="0">
                           <a:solidFill>
-                            <a:srgbClr val="1E293B"/>
+                            <a:srgbClr val="0F2942"/>
                           </a:solidFill>
                           <a:latin typeface="맑은 고딕"/>
                         </a:rPr>
@@ -16023,7 +16023,7 @@
                       <a:r>
                         <a:rPr sz="900" b="0">
                           <a:solidFill>
-                            <a:srgbClr val="1E293B"/>
+                            <a:srgbClr val="0F2942"/>
                           </a:solidFill>
                           <a:latin typeface="맑은 고딕"/>
                         </a:rPr>
@@ -16042,7 +16042,7 @@
                       <a:r>
                         <a:rPr sz="900" b="0">
                           <a:solidFill>
-                            <a:srgbClr val="1E293B"/>
+                            <a:srgbClr val="0F2942"/>
                           </a:solidFill>
                           <a:latin typeface="맑은 고딕"/>
                         </a:rPr>
@@ -16092,7 +16092,7 @@
                       <a:r>
                         <a:rPr sz="900" b="1">
                           <a:solidFill>
-                            <a:srgbClr val="1E293B"/>
+                            <a:srgbClr val="0F2942"/>
                           </a:solidFill>
                           <a:latin typeface="맑은 고딕"/>
                         </a:rPr>
@@ -16142,7 +16142,7 @@
                       <a:r>
                         <a:rPr sz="900" b="0">
                           <a:solidFill>
-                            <a:srgbClr val="1E293B"/>
+                            <a:srgbClr val="0F2942"/>
                           </a:solidFill>
                           <a:latin typeface="맑은 고딕"/>
                         </a:rPr>
@@ -16161,11 +16161,11 @@
                       <a:r>
                         <a:rPr sz="900" b="0">
                           <a:solidFill>
-                            <a:srgbClr val="1E293B"/>
-                          </a:solidFill>
-                          <a:latin typeface="맑은 고딕"/>
-                        </a:rPr>
-                        <a:t>• HB-SSO SSO, MarketingHub 연계 및 연구원 ProductLab 실증자료 DB 구축·연동</a:t>
+                            <a:srgbClr val="0F2942"/>
+                          </a:solidFill>
+                          <a:latin typeface="맑은 고딕"/>
+                        </a:rPr>
+                        <a:t>• HB-SSO SSO, SRM-Portal 연계 및 연구원 PLM-Nexus 시험성적서 DB 구축·연동</a:t>
                       </a:r>
                     </a:p>
                   </a:txBody>
@@ -16213,7 +16213,7 @@
                       <a:r>
                         <a:rPr sz="900" b="1">
                           <a:solidFill>
-                            <a:srgbClr val="1E293B"/>
+                            <a:srgbClr val="0F2942"/>
                           </a:solidFill>
                           <a:latin typeface="맑은 고딕"/>
                         </a:rPr>
@@ -16263,7 +16263,7 @@
                       <a:r>
                         <a:rPr sz="900" b="1">
                           <a:solidFill>
-                            <a:srgbClr val="1E293B"/>
+                            <a:srgbClr val="0F2942"/>
                           </a:solidFill>
                           <a:latin typeface="맑은 고딕"/>
                         </a:rPr>
@@ -16313,7 +16313,7 @@
                       <a:r>
                         <a:rPr sz="900" b="0">
                           <a:solidFill>
-                            <a:srgbClr val="1E293B"/>
+                            <a:srgbClr val="0F2942"/>
                           </a:solidFill>
                           <a:latin typeface="맑은 고딕"/>
                         </a:rPr>
@@ -16363,7 +16363,7 @@
                       <a:r>
                         <a:rPr sz="900" b="0">
                           <a:solidFill>
-                            <a:srgbClr val="1E293B"/>
+                            <a:srgbClr val="0F2942"/>
                           </a:solidFill>
                           <a:latin typeface="맑은 고딕"/>
                         </a:rPr>
@@ -16413,7 +16413,7 @@
                       <a:r>
                         <a:rPr sz="900" b="1">
                           <a:solidFill>
-                            <a:srgbClr val="1E293B"/>
+                            <a:srgbClr val="0F2942"/>
                           </a:solidFill>
                           <a:latin typeface="맑은 고딕"/>
                         </a:rPr>
@@ -16463,11 +16463,11 @@
                       <a:r>
                         <a:rPr sz="900" b="0">
                           <a:solidFill>
-                            <a:srgbClr val="1E293B"/>
-                          </a:solidFill>
-                          <a:latin typeface="맑은 고딕"/>
-                        </a:rPr>
-                        <a:t>• Vue 3 기반 SyncGuard AI 워크스페이스 웹(:3104) 및 관리자(BO) 화면 구현</a:t>
+                            <a:srgbClr val="0F2942"/>
+                          </a:solidFill>
+                          <a:latin typeface="맑은 고딕"/>
+                        </a:rPr>
+                        <a:t>• Vue 3 기반 SyncFlow AI 워크스페이스 웹(:3104) 및 관리자(BO) 화면 구현</a:t>
                       </a:r>
                     </a:p>
                     <a:p>
@@ -16482,7 +16482,7 @@
                       <a:r>
                         <a:rPr sz="900" b="0">
                           <a:solidFill>
-                            <a:srgbClr val="1E293B"/>
+                            <a:srgbClr val="0F2942"/>
                           </a:solidFill>
                           <a:latin typeface="맑은 고딕"/>
                         </a:rPr>
@@ -16534,7 +16534,7 @@
                       <a:r>
                         <a:rPr sz="900" b="1">
                           <a:solidFill>
-                            <a:srgbClr val="1E293B"/>
+                            <a:srgbClr val="0F2942"/>
                           </a:solidFill>
                           <a:latin typeface="맑은 고딕"/>
                         </a:rPr>
@@ -16584,7 +16584,7 @@
                       <a:r>
                         <a:rPr sz="900" b="1">
                           <a:solidFill>
-                            <a:srgbClr val="1E293B"/>
+                            <a:srgbClr val="0F2942"/>
                           </a:solidFill>
                           <a:latin typeface="맑은 고딕"/>
                         </a:rPr>
@@ -16603,11 +16603,11 @@
                       <a:r>
                         <a:rPr sz="900" b="1">
                           <a:solidFill>
-                            <a:srgbClr val="1E293B"/>
-                          </a:solidFill>
-                          <a:latin typeface="맑은 고딕"/>
-                        </a:rPr>
-                        <a:t>RA Lab 실무진</a:t>
+                            <a:srgbClr val="0F2942"/>
+                          </a:solidFill>
+                          <a:latin typeface="맑은 고딕"/>
+                        </a:rPr>
+                        <a:t>품질법무검증팀 실무진</a:t>
                       </a:r>
                     </a:p>
                   </a:txBody>
@@ -16653,7 +16653,7 @@
                       <a:r>
                         <a:rPr sz="900" b="0">
                           <a:solidFill>
-                            <a:srgbClr val="1E293B"/>
+                            <a:srgbClr val="0F2942"/>
                           </a:solidFill>
                           <a:latin typeface="맑은 고딕"/>
                         </a:rPr>
@@ -16672,7 +16672,7 @@
                       <a:r>
                         <a:rPr sz="900" b="0">
                           <a:solidFill>
-                            <a:srgbClr val="1E293B"/>
+                            <a:srgbClr val="0F2942"/>
                           </a:solidFill>
                           <a:latin typeface="맑은 고딕"/>
                         </a:rPr>
@@ -16722,7 +16722,7 @@
                       <a:r>
                         <a:rPr sz="900" b="0">
                           <a:solidFill>
-                            <a:srgbClr val="1E293B"/>
+                            <a:srgbClr val="0F2942"/>
                           </a:solidFill>
                           <a:latin typeface="맑은 고딕"/>
                         </a:rPr>
@@ -16772,7 +16772,7 @@
                       <a:r>
                         <a:rPr sz="900" b="1">
                           <a:solidFill>
-                            <a:srgbClr val="1E293B"/>
+                            <a:srgbClr val="0F2942"/>
                           </a:solidFill>
                           <a:latin typeface="맑은 고딕"/>
                         </a:rPr>
@@ -16791,7 +16791,7 @@
                       <a:r>
                         <a:rPr sz="900" b="1">
                           <a:solidFill>
-                            <a:srgbClr val="1E293B"/>
+                            <a:srgbClr val="0F2942"/>
                           </a:solidFill>
                           <a:latin typeface="맑은 고딕"/>
                         </a:rPr>
@@ -16841,11 +16841,11 @@
                       <a:r>
                         <a:rPr sz="900" b="0">
                           <a:solidFill>
-                            <a:srgbClr val="1E293B"/>
-                          </a:solidFill>
-                          <a:latin typeface="맑은 고딕"/>
-                        </a:rPr>
-                        <a:t>• 현업 클레임 검토 정책/규칙 정의, 골든셋 평가 기준 수립 및 파일럿(UAT) 검수</a:t>
+                            <a:srgbClr val="0F2942"/>
+                          </a:solidFill>
+                          <a:latin typeface="맑은 고딕"/>
+                        </a:rPr>
+                        <a:t>• 현업 규격·계약 검토 정책/규칙 정의, 골든셋 평가 기준 수립 및 파일럿(UAT) 검수</a:t>
                       </a:r>
                     </a:p>
                     <a:p>
@@ -16860,7 +16860,7 @@
                       <a:r>
                         <a:rPr sz="900" b="0">
                           <a:solidFill>
-                            <a:srgbClr val="1E293B"/>
+                            <a:srgbClr val="0F2942"/>
                           </a:solidFill>
                           <a:latin typeface="맑은 고딕"/>
                         </a:rPr>
@@ -17208,7 +17208,7 @@
                 </a:solidFill>
                 <a:latin typeface="맑은 고딕"/>
               </a:rPr>
-              <a:t>한빛글로벌 SyncGuard AI 시스템 구축  |  자원 관리 계획서</a:t>
+              <a:t>한빛글로벌 SyncFlow AI 시스템 구축  |  자원 관리 계획서</a:t>
             </a:r>
           </a:p>
         </p:txBody>
@@ -18050,7 +18050,7 @@
                       <a:r>
                         <a:rPr sz="880" b="1">
                           <a:solidFill>
-                            <a:srgbClr val="1E293B"/>
+                            <a:srgbClr val="0F2942"/>
                           </a:solidFill>
                           <a:latin typeface="맑은 고딕"/>
                         </a:rPr>
@@ -18100,7 +18100,7 @@
                       <a:r>
                         <a:rPr sz="880" b="1">
                           <a:solidFill>
-                            <a:srgbClr val="1E293B"/>
+                            <a:srgbClr val="0F2942"/>
                           </a:solidFill>
                           <a:latin typeface="맑은 고딕"/>
                         </a:rPr>
@@ -18150,7 +18150,7 @@
                       <a:r>
                         <a:rPr sz="880" b="0">
                           <a:solidFill>
-                            <a:srgbClr val="1E293B"/>
+                            <a:srgbClr val="0F2942"/>
                           </a:solidFill>
                           <a:latin typeface="맑은 고딕"/>
                         </a:rPr>
@@ -18200,7 +18200,7 @@
                       <a:r>
                         <a:rPr sz="880" b="0">
                           <a:solidFill>
-                            <a:srgbClr val="1E293B"/>
+                            <a:srgbClr val="0F2942"/>
                           </a:solidFill>
                           <a:latin typeface="맑은 고딕"/>
                         </a:rPr>
@@ -18250,7 +18250,7 @@
                       <a:r>
                         <a:rPr sz="880" b="0">
                           <a:solidFill>
-                            <a:srgbClr val="1E293B"/>
+                            <a:srgbClr val="0F2942"/>
                           </a:solidFill>
                           <a:latin typeface="맑은 고딕"/>
                         </a:rPr>
@@ -18300,7 +18300,7 @@
                       <a:r>
                         <a:rPr sz="880" b="0">
                           <a:solidFill>
-                            <a:srgbClr val="1E293B"/>
+                            <a:srgbClr val="0F2942"/>
                           </a:solidFill>
                           <a:latin typeface="맑은 고딕"/>
                         </a:rPr>
@@ -18350,7 +18350,7 @@
                       <a:r>
                         <a:rPr sz="880" b="0">
                           <a:solidFill>
-                            <a:srgbClr val="1E293B"/>
+                            <a:srgbClr val="0F2942"/>
                           </a:solidFill>
                           <a:latin typeface="맑은 고딕"/>
                         </a:rPr>
@@ -18400,7 +18400,7 @@
                       <a:r>
                         <a:rPr sz="880" b="0">
                           <a:solidFill>
-                            <a:srgbClr val="1E293B"/>
+                            <a:srgbClr val="0F2942"/>
                           </a:solidFill>
                           <a:latin typeface="맑은 고딕"/>
                         </a:rPr>
@@ -18450,7 +18450,7 @@
                       <a:r>
                         <a:rPr sz="880" b="0">
                           <a:solidFill>
-                            <a:srgbClr val="1E293B"/>
+                            <a:srgbClr val="0F2942"/>
                           </a:solidFill>
                           <a:latin typeface="맑은 고딕"/>
                         </a:rPr>
@@ -18500,7 +18500,7 @@
                       <a:r>
                         <a:rPr sz="880" b="0">
                           <a:solidFill>
-                            <a:srgbClr val="1E293B"/>
+                            <a:srgbClr val="0F2942"/>
                           </a:solidFill>
                           <a:latin typeface="맑은 고딕"/>
                         </a:rPr>
@@ -18550,7 +18550,7 @@
                       <a:r>
                         <a:rPr sz="880" b="0">
                           <a:solidFill>
-                            <a:srgbClr val="1E293B"/>
+                            <a:srgbClr val="0F2942"/>
                           </a:solidFill>
                           <a:latin typeface="맑은 고딕"/>
                         </a:rPr>
@@ -18600,7 +18600,7 @@
                       <a:r>
                         <a:rPr sz="880" b="1">
                           <a:solidFill>
-                            <a:srgbClr val="1E293B"/>
+                            <a:srgbClr val="0F2942"/>
                           </a:solidFill>
                           <a:latin typeface="맑은 고딕"/>
                         </a:rPr>
@@ -18650,7 +18650,7 @@
                       <a:r>
                         <a:rPr sz="880" b="0">
                           <a:solidFill>
-                            <a:srgbClr val="1E293B"/>
+                            <a:srgbClr val="0F2942"/>
                           </a:solidFill>
                           <a:latin typeface="맑은 고딕"/>
                         </a:rPr>
@@ -18700,7 +18700,7 @@
                       <a:r>
                         <a:rPr sz="880" b="0">
                           <a:solidFill>
-                            <a:srgbClr val="1E293B"/>
+                            <a:srgbClr val="0F2942"/>
                           </a:solidFill>
                           <a:latin typeface="맑은 고딕"/>
                         </a:rPr>
@@ -18752,7 +18752,7 @@
                       <a:r>
                         <a:rPr sz="880" b="1">
                           <a:solidFill>
-                            <a:srgbClr val="1E293B"/>
+                            <a:srgbClr val="0F2942"/>
                           </a:solidFill>
                           <a:latin typeface="맑은 고딕"/>
                         </a:rPr>
@@ -18802,7 +18802,7 @@
                       <a:r>
                         <a:rPr sz="880" b="1">
                           <a:solidFill>
-                            <a:srgbClr val="1E293B"/>
+                            <a:srgbClr val="0F2942"/>
                           </a:solidFill>
                           <a:latin typeface="맑은 고딕"/>
                         </a:rPr>
@@ -18852,7 +18852,7 @@
                       <a:r>
                         <a:rPr sz="880" b="0">
                           <a:solidFill>
-                            <a:srgbClr val="1E293B"/>
+                            <a:srgbClr val="0F2942"/>
                           </a:solidFill>
                           <a:latin typeface="맑은 고딕"/>
                         </a:rPr>
@@ -18902,7 +18902,7 @@
                       <a:r>
                         <a:rPr sz="880" b="0">
                           <a:solidFill>
-                            <a:srgbClr val="1E293B"/>
+                            <a:srgbClr val="0F2942"/>
                           </a:solidFill>
                           <a:latin typeface="맑은 고딕"/>
                         </a:rPr>
@@ -18952,7 +18952,7 @@
                       <a:r>
                         <a:rPr sz="880" b="0">
                           <a:solidFill>
-                            <a:srgbClr val="1E293B"/>
+                            <a:srgbClr val="0F2942"/>
                           </a:solidFill>
                           <a:latin typeface="맑은 고딕"/>
                         </a:rPr>
@@ -19002,7 +19002,7 @@
                       <a:r>
                         <a:rPr sz="880" b="0">
                           <a:solidFill>
-                            <a:srgbClr val="1E293B"/>
+                            <a:srgbClr val="0F2942"/>
                           </a:solidFill>
                           <a:latin typeface="맑은 고딕"/>
                         </a:rPr>
@@ -19052,7 +19052,7 @@
                       <a:r>
                         <a:rPr sz="880" b="0">
                           <a:solidFill>
-                            <a:srgbClr val="1E293B"/>
+                            <a:srgbClr val="0F2942"/>
                           </a:solidFill>
                           <a:latin typeface="맑은 고딕"/>
                         </a:rPr>
@@ -19102,7 +19102,7 @@
                       <a:r>
                         <a:rPr sz="880" b="0">
                           <a:solidFill>
-                            <a:srgbClr val="1E293B"/>
+                            <a:srgbClr val="0F2942"/>
                           </a:solidFill>
                           <a:latin typeface="맑은 고딕"/>
                         </a:rPr>
@@ -19152,7 +19152,7 @@
                       <a:r>
                         <a:rPr sz="880" b="0">
                           <a:solidFill>
-                            <a:srgbClr val="1E293B"/>
+                            <a:srgbClr val="0F2942"/>
                           </a:solidFill>
                           <a:latin typeface="맑은 고딕"/>
                         </a:rPr>
@@ -19202,7 +19202,7 @@
                       <a:r>
                         <a:rPr sz="880" b="0">
                           <a:solidFill>
-                            <a:srgbClr val="1E293B"/>
+                            <a:srgbClr val="0F2942"/>
                           </a:solidFill>
                           <a:latin typeface="맑은 고딕"/>
                         </a:rPr>
@@ -19252,7 +19252,7 @@
                       <a:r>
                         <a:rPr sz="880" b="0">
                           <a:solidFill>
-                            <a:srgbClr val="1E293B"/>
+                            <a:srgbClr val="0F2942"/>
                           </a:solidFill>
                           <a:latin typeface="맑은 고딕"/>
                         </a:rPr>
@@ -19302,7 +19302,7 @@
                       <a:r>
                         <a:rPr sz="880" b="1">
                           <a:solidFill>
-                            <a:srgbClr val="1E293B"/>
+                            <a:srgbClr val="0F2942"/>
                           </a:solidFill>
                           <a:latin typeface="맑은 고딕"/>
                         </a:rPr>
@@ -19352,7 +19352,7 @@
                       <a:r>
                         <a:rPr sz="880" b="0">
                           <a:solidFill>
-                            <a:srgbClr val="1E293B"/>
+                            <a:srgbClr val="0F2942"/>
                           </a:solidFill>
                           <a:latin typeface="맑은 고딕"/>
                         </a:rPr>
@@ -19402,7 +19402,7 @@
                       <a:r>
                         <a:rPr sz="880" b="0">
                           <a:solidFill>
-                            <a:srgbClr val="1E293B"/>
+                            <a:srgbClr val="0F2942"/>
                           </a:solidFill>
                           <a:latin typeface="맑은 고딕"/>
                         </a:rPr>
@@ -19454,7 +19454,7 @@
                       <a:r>
                         <a:rPr sz="880" b="1">
                           <a:solidFill>
-                            <a:srgbClr val="1E293B"/>
+                            <a:srgbClr val="0F2942"/>
                           </a:solidFill>
                           <a:latin typeface="맑은 고딕"/>
                         </a:rPr>
@@ -19504,7 +19504,7 @@
                       <a:r>
                         <a:rPr sz="880" b="1">
                           <a:solidFill>
-                            <a:srgbClr val="1E293B"/>
+                            <a:srgbClr val="0F2942"/>
                           </a:solidFill>
                           <a:latin typeface="맑은 고딕"/>
                         </a:rPr>
@@ -19554,7 +19554,7 @@
                       <a:r>
                         <a:rPr sz="880" b="0">
                           <a:solidFill>
-                            <a:srgbClr val="1E293B"/>
+                            <a:srgbClr val="0F2942"/>
                           </a:solidFill>
                           <a:latin typeface="맑은 고딕"/>
                         </a:rPr>
@@ -19604,7 +19604,7 @@
                       <a:r>
                         <a:rPr sz="880" b="0">
                           <a:solidFill>
-                            <a:srgbClr val="1E293B"/>
+                            <a:srgbClr val="0F2942"/>
                           </a:solidFill>
                           <a:latin typeface="맑은 고딕"/>
                         </a:rPr>
@@ -19654,7 +19654,7 @@
                       <a:r>
                         <a:rPr sz="880" b="0">
                           <a:solidFill>
-                            <a:srgbClr val="1E293B"/>
+                            <a:srgbClr val="0F2942"/>
                           </a:solidFill>
                           <a:latin typeface="맑은 고딕"/>
                         </a:rPr>
@@ -19704,7 +19704,7 @@
                       <a:r>
                         <a:rPr sz="880" b="0">
                           <a:solidFill>
-                            <a:srgbClr val="1E293B"/>
+                            <a:srgbClr val="0F2942"/>
                           </a:solidFill>
                           <a:latin typeface="맑은 고딕"/>
                         </a:rPr>
@@ -19754,7 +19754,7 @@
                       <a:r>
                         <a:rPr sz="880" b="0">
                           <a:solidFill>
-                            <a:srgbClr val="1E293B"/>
+                            <a:srgbClr val="0F2942"/>
                           </a:solidFill>
                           <a:latin typeface="맑은 고딕"/>
                         </a:rPr>
@@ -19804,7 +19804,7 @@
                       <a:r>
                         <a:rPr sz="880" b="0">
                           <a:solidFill>
-                            <a:srgbClr val="1E293B"/>
+                            <a:srgbClr val="0F2942"/>
                           </a:solidFill>
                           <a:latin typeface="맑은 고딕"/>
                         </a:rPr>
@@ -19854,7 +19854,7 @@
                       <a:r>
                         <a:rPr sz="880" b="0">
                           <a:solidFill>
-                            <a:srgbClr val="1E293B"/>
+                            <a:srgbClr val="0F2942"/>
                           </a:solidFill>
                           <a:latin typeface="맑은 고딕"/>
                         </a:rPr>
@@ -19904,7 +19904,7 @@
                       <a:r>
                         <a:rPr sz="880" b="0">
                           <a:solidFill>
-                            <a:srgbClr val="1E293B"/>
+                            <a:srgbClr val="0F2942"/>
                           </a:solidFill>
                           <a:latin typeface="맑은 고딕"/>
                         </a:rPr>
@@ -19954,7 +19954,7 @@
                       <a:r>
                         <a:rPr sz="880" b="0">
                           <a:solidFill>
-                            <a:srgbClr val="1E293B"/>
+                            <a:srgbClr val="0F2942"/>
                           </a:solidFill>
                           <a:latin typeface="맑은 고딕"/>
                         </a:rPr>
@@ -20004,7 +20004,7 @@
                       <a:r>
                         <a:rPr sz="880" b="1">
                           <a:solidFill>
-                            <a:srgbClr val="1E293B"/>
+                            <a:srgbClr val="0F2942"/>
                           </a:solidFill>
                           <a:latin typeface="맑은 고딕"/>
                         </a:rPr>
@@ -20054,7 +20054,7 @@
                       <a:r>
                         <a:rPr sz="880" b="0">
                           <a:solidFill>
-                            <a:srgbClr val="1E293B"/>
+                            <a:srgbClr val="0F2942"/>
                           </a:solidFill>
                           <a:latin typeface="맑은 고딕"/>
                         </a:rPr>
@@ -20104,7 +20104,7 @@
                       <a:r>
                         <a:rPr sz="880" b="0">
                           <a:solidFill>
-                            <a:srgbClr val="1E293B"/>
+                            <a:srgbClr val="0F2942"/>
                           </a:solidFill>
                           <a:latin typeface="맑은 고딕"/>
                         </a:rPr>
@@ -20156,7 +20156,7 @@
                       <a:r>
                         <a:rPr sz="880" b="1">
                           <a:solidFill>
-                            <a:srgbClr val="1E293B"/>
+                            <a:srgbClr val="0F2942"/>
                           </a:solidFill>
                           <a:latin typeface="맑은 고딕"/>
                         </a:rPr>
@@ -20206,7 +20206,7 @@
                       <a:r>
                         <a:rPr sz="880" b="1">
                           <a:solidFill>
-                            <a:srgbClr val="1E293B"/>
+                            <a:srgbClr val="0F2942"/>
                           </a:solidFill>
                           <a:latin typeface="맑은 고딕"/>
                         </a:rPr>
@@ -20256,7 +20256,7 @@
                       <a:r>
                         <a:rPr sz="880" b="0">
                           <a:solidFill>
-                            <a:srgbClr val="1E293B"/>
+                            <a:srgbClr val="0F2942"/>
                           </a:solidFill>
                           <a:latin typeface="맑은 고딕"/>
                         </a:rPr>
@@ -20306,7 +20306,7 @@
                       <a:r>
                         <a:rPr sz="880" b="0">
                           <a:solidFill>
-                            <a:srgbClr val="1E293B"/>
+                            <a:srgbClr val="0F2942"/>
                           </a:solidFill>
                           <a:latin typeface="맑은 고딕"/>
                         </a:rPr>
@@ -20356,7 +20356,7 @@
                       <a:r>
                         <a:rPr sz="880" b="0">
                           <a:solidFill>
-                            <a:srgbClr val="1E293B"/>
+                            <a:srgbClr val="0F2942"/>
                           </a:solidFill>
                           <a:latin typeface="맑은 고딕"/>
                         </a:rPr>
@@ -20406,7 +20406,7 @@
                       <a:r>
                         <a:rPr sz="880" b="0">
                           <a:solidFill>
-                            <a:srgbClr val="1E293B"/>
+                            <a:srgbClr val="0F2942"/>
                           </a:solidFill>
                           <a:latin typeface="맑은 고딕"/>
                         </a:rPr>
@@ -20456,7 +20456,7 @@
                       <a:r>
                         <a:rPr sz="880" b="0">
                           <a:solidFill>
-                            <a:srgbClr val="1E293B"/>
+                            <a:srgbClr val="0F2942"/>
                           </a:solidFill>
                           <a:latin typeface="맑은 고딕"/>
                         </a:rPr>
@@ -20506,7 +20506,7 @@
                       <a:r>
                         <a:rPr sz="880" b="0">
                           <a:solidFill>
-                            <a:srgbClr val="1E293B"/>
+                            <a:srgbClr val="0F2942"/>
                           </a:solidFill>
                           <a:latin typeface="맑은 고딕"/>
                         </a:rPr>
@@ -20556,7 +20556,7 @@
                       <a:r>
                         <a:rPr sz="880" b="0">
                           <a:solidFill>
-                            <a:srgbClr val="1E293B"/>
+                            <a:srgbClr val="0F2942"/>
                           </a:solidFill>
                           <a:latin typeface="맑은 고딕"/>
                         </a:rPr>
@@ -20606,7 +20606,7 @@
                       <a:r>
                         <a:rPr sz="880" b="0">
                           <a:solidFill>
-                            <a:srgbClr val="1E293B"/>
+                            <a:srgbClr val="0F2942"/>
                           </a:solidFill>
                           <a:latin typeface="맑은 고딕"/>
                         </a:rPr>
@@ -20656,7 +20656,7 @@
                       <a:r>
                         <a:rPr sz="880" b="0">
                           <a:solidFill>
-                            <a:srgbClr val="1E293B"/>
+                            <a:srgbClr val="0F2942"/>
                           </a:solidFill>
                           <a:latin typeface="맑은 고딕"/>
                         </a:rPr>
@@ -20706,7 +20706,7 @@
                       <a:r>
                         <a:rPr sz="880" b="1">
                           <a:solidFill>
-                            <a:srgbClr val="1E293B"/>
+                            <a:srgbClr val="0F2942"/>
                           </a:solidFill>
                           <a:latin typeface="맑은 고딕"/>
                         </a:rPr>
@@ -20756,7 +20756,7 @@
                       <a:r>
                         <a:rPr sz="880" b="0">
                           <a:solidFill>
-                            <a:srgbClr val="1E293B"/>
+                            <a:srgbClr val="0F2942"/>
                           </a:solidFill>
                           <a:latin typeface="맑은 고딕"/>
                         </a:rPr>
@@ -20806,7 +20806,7 @@
                       <a:r>
                         <a:rPr sz="880" b="0">
                           <a:solidFill>
-                            <a:srgbClr val="1E293B"/>
+                            <a:srgbClr val="0F2942"/>
                           </a:solidFill>
                           <a:latin typeface="맑은 고딕"/>
                         </a:rPr>
@@ -20858,7 +20858,7 @@
                       <a:r>
                         <a:rPr sz="880" b="1">
                           <a:solidFill>
-                            <a:srgbClr val="1E293B"/>
+                            <a:srgbClr val="0F2942"/>
                           </a:solidFill>
                           <a:latin typeface="맑은 고딕"/>
                         </a:rPr>
@@ -20908,7 +20908,7 @@
                       <a:r>
                         <a:rPr sz="880" b="1">
                           <a:solidFill>
-                            <a:srgbClr val="1E293B"/>
+                            <a:srgbClr val="0F2942"/>
                           </a:solidFill>
                           <a:latin typeface="맑은 고딕"/>
                         </a:rPr>
@@ -20958,7 +20958,7 @@
                       <a:r>
                         <a:rPr sz="880" b="0">
                           <a:solidFill>
-                            <a:srgbClr val="1E293B"/>
+                            <a:srgbClr val="0F2942"/>
                           </a:solidFill>
                           <a:latin typeface="맑은 고딕"/>
                         </a:rPr>
@@ -21008,7 +21008,7 @@
                       <a:r>
                         <a:rPr sz="880" b="0">
                           <a:solidFill>
-                            <a:srgbClr val="1E293B"/>
+                            <a:srgbClr val="0F2942"/>
                           </a:solidFill>
                           <a:latin typeface="맑은 고딕"/>
                         </a:rPr>
@@ -21058,7 +21058,7 @@
                       <a:r>
                         <a:rPr sz="880" b="0">
                           <a:solidFill>
-                            <a:srgbClr val="1E293B"/>
+                            <a:srgbClr val="0F2942"/>
                           </a:solidFill>
                           <a:latin typeface="맑은 고딕"/>
                         </a:rPr>
@@ -21108,7 +21108,7 @@
                       <a:r>
                         <a:rPr sz="880" b="0">
                           <a:solidFill>
-                            <a:srgbClr val="1E293B"/>
+                            <a:srgbClr val="0F2942"/>
                           </a:solidFill>
                           <a:latin typeface="맑은 고딕"/>
                         </a:rPr>
@@ -21158,7 +21158,7 @@
                       <a:r>
                         <a:rPr sz="880" b="0">
                           <a:solidFill>
-                            <a:srgbClr val="1E293B"/>
+                            <a:srgbClr val="0F2942"/>
                           </a:solidFill>
                           <a:latin typeface="맑은 고딕"/>
                         </a:rPr>
@@ -21208,7 +21208,7 @@
                       <a:r>
                         <a:rPr sz="880" b="0">
                           <a:solidFill>
-                            <a:srgbClr val="1E293B"/>
+                            <a:srgbClr val="0F2942"/>
                           </a:solidFill>
                           <a:latin typeface="맑은 고딕"/>
                         </a:rPr>
@@ -21258,7 +21258,7 @@
                       <a:r>
                         <a:rPr sz="880" b="0">
                           <a:solidFill>
-                            <a:srgbClr val="1E293B"/>
+                            <a:srgbClr val="0F2942"/>
                           </a:solidFill>
                           <a:latin typeface="맑은 고딕"/>
                         </a:rPr>
@@ -21308,7 +21308,7 @@
                       <a:r>
                         <a:rPr sz="880" b="0">
                           <a:solidFill>
-                            <a:srgbClr val="1E293B"/>
+                            <a:srgbClr val="0F2942"/>
                           </a:solidFill>
                           <a:latin typeface="맑은 고딕"/>
                         </a:rPr>
@@ -21358,7 +21358,7 @@
                       <a:r>
                         <a:rPr sz="880" b="0">
                           <a:solidFill>
-                            <a:srgbClr val="1E293B"/>
+                            <a:srgbClr val="0F2942"/>
                           </a:solidFill>
                           <a:latin typeface="맑은 고딕"/>
                         </a:rPr>
@@ -21408,7 +21408,7 @@
                       <a:r>
                         <a:rPr sz="880" b="1">
                           <a:solidFill>
-                            <a:srgbClr val="1E293B"/>
+                            <a:srgbClr val="0F2942"/>
                           </a:solidFill>
                           <a:latin typeface="맑은 고딕"/>
                         </a:rPr>
@@ -21458,7 +21458,7 @@
                       <a:r>
                         <a:rPr sz="880" b="0">
                           <a:solidFill>
-                            <a:srgbClr val="1E293B"/>
+                            <a:srgbClr val="0F2942"/>
                           </a:solidFill>
                           <a:latin typeface="맑은 고딕"/>
                         </a:rPr>
@@ -21508,7 +21508,7 @@
                       <a:r>
                         <a:rPr sz="880" b="0">
                           <a:solidFill>
-                            <a:srgbClr val="1E293B"/>
+                            <a:srgbClr val="0F2942"/>
                           </a:solidFill>
                           <a:latin typeface="맑은 고딕"/>
                         </a:rPr>
@@ -21560,7 +21560,7 @@
                       <a:r>
                         <a:rPr sz="880" b="1">
                           <a:solidFill>
-                            <a:srgbClr val="1E293B"/>
+                            <a:srgbClr val="0F2942"/>
                           </a:solidFill>
                           <a:latin typeface="맑은 고딕"/>
                         </a:rPr>
@@ -21610,7 +21610,7 @@
                       <a:r>
                         <a:rPr sz="880" b="1">
                           <a:solidFill>
-                            <a:srgbClr val="1E293B"/>
+                            <a:srgbClr val="0F2942"/>
                           </a:solidFill>
                           <a:latin typeface="맑은 고딕"/>
                         </a:rPr>
@@ -21660,7 +21660,7 @@
                       <a:r>
                         <a:rPr sz="880" b="0">
                           <a:solidFill>
-                            <a:srgbClr val="1E293B"/>
+                            <a:srgbClr val="0F2942"/>
                           </a:solidFill>
                           <a:latin typeface="맑은 고딕"/>
                         </a:rPr>
@@ -21710,7 +21710,7 @@
                       <a:r>
                         <a:rPr sz="880" b="0">
                           <a:solidFill>
-                            <a:srgbClr val="1E293B"/>
+                            <a:srgbClr val="0F2942"/>
                           </a:solidFill>
                           <a:latin typeface="맑은 고딕"/>
                         </a:rPr>
@@ -21760,7 +21760,7 @@
                       <a:r>
                         <a:rPr sz="880" b="0">
                           <a:solidFill>
-                            <a:srgbClr val="1E293B"/>
+                            <a:srgbClr val="0F2942"/>
                           </a:solidFill>
                           <a:latin typeface="맑은 고딕"/>
                         </a:rPr>
@@ -21810,7 +21810,7 @@
                       <a:r>
                         <a:rPr sz="880" b="0">
                           <a:solidFill>
-                            <a:srgbClr val="1E293B"/>
+                            <a:srgbClr val="0F2942"/>
                           </a:solidFill>
                           <a:latin typeface="맑은 고딕"/>
                         </a:rPr>
@@ -21860,7 +21860,7 @@
                       <a:r>
                         <a:rPr sz="880" b="0">
                           <a:solidFill>
-                            <a:srgbClr val="1E293B"/>
+                            <a:srgbClr val="0F2942"/>
                           </a:solidFill>
                           <a:latin typeface="맑은 고딕"/>
                         </a:rPr>
@@ -21910,7 +21910,7 @@
                       <a:r>
                         <a:rPr sz="880" b="0">
                           <a:solidFill>
-                            <a:srgbClr val="1E293B"/>
+                            <a:srgbClr val="0F2942"/>
                           </a:solidFill>
                           <a:latin typeface="맑은 고딕"/>
                         </a:rPr>
@@ -21960,7 +21960,7 @@
                       <a:r>
                         <a:rPr sz="880" b="0">
                           <a:solidFill>
-                            <a:srgbClr val="1E293B"/>
+                            <a:srgbClr val="0F2942"/>
                           </a:solidFill>
                           <a:latin typeface="맑은 고딕"/>
                         </a:rPr>
@@ -22010,7 +22010,7 @@
                       <a:r>
                         <a:rPr sz="880" b="0">
                           <a:solidFill>
-                            <a:srgbClr val="1E293B"/>
+                            <a:srgbClr val="0F2942"/>
                           </a:solidFill>
                           <a:latin typeface="맑은 고딕"/>
                         </a:rPr>
@@ -22060,7 +22060,7 @@
                       <a:r>
                         <a:rPr sz="880" b="0">
                           <a:solidFill>
-                            <a:srgbClr val="1E293B"/>
+                            <a:srgbClr val="0F2942"/>
                           </a:solidFill>
                           <a:latin typeface="맑은 고딕"/>
                         </a:rPr>
@@ -22110,7 +22110,7 @@
                       <a:r>
                         <a:rPr sz="880" b="1">
                           <a:solidFill>
-                            <a:srgbClr val="1E293B"/>
+                            <a:srgbClr val="0F2942"/>
                           </a:solidFill>
                           <a:latin typeface="맑은 고딕"/>
                         </a:rPr>
@@ -22160,7 +22160,7 @@
                       <a:r>
                         <a:rPr sz="880" b="0">
                           <a:solidFill>
-                            <a:srgbClr val="1E293B"/>
+                            <a:srgbClr val="0F2942"/>
                           </a:solidFill>
                           <a:latin typeface="맑은 고딕"/>
                         </a:rPr>
@@ -22210,7 +22210,7 @@
                       <a:r>
                         <a:rPr sz="880" b="0">
                           <a:solidFill>
-                            <a:srgbClr val="1E293B"/>
+                            <a:srgbClr val="0F2942"/>
                           </a:solidFill>
                           <a:latin typeface="맑은 고딕"/>
                         </a:rPr>
@@ -22262,7 +22262,7 @@
                       <a:r>
                         <a:rPr sz="880" b="1">
                           <a:solidFill>
-                            <a:srgbClr val="1E293B"/>
+                            <a:srgbClr val="0F2942"/>
                           </a:solidFill>
                           <a:latin typeface="맑은 고딕"/>
                         </a:rPr>
@@ -22312,7 +22312,7 @@
                       <a:r>
                         <a:rPr sz="880" b="1">
                           <a:solidFill>
-                            <a:srgbClr val="1E293B"/>
+                            <a:srgbClr val="0F2942"/>
                           </a:solidFill>
                           <a:latin typeface="맑은 고딕"/>
                         </a:rPr>
@@ -22362,7 +22362,7 @@
                       <a:r>
                         <a:rPr sz="880" b="0">
                           <a:solidFill>
-                            <a:srgbClr val="1E293B"/>
+                            <a:srgbClr val="0F2942"/>
                           </a:solidFill>
                           <a:latin typeface="맑은 고딕"/>
                         </a:rPr>
@@ -22412,7 +22412,7 @@
                       <a:r>
                         <a:rPr sz="880" b="0">
                           <a:solidFill>
-                            <a:srgbClr val="1E293B"/>
+                            <a:srgbClr val="0F2942"/>
                           </a:solidFill>
                           <a:latin typeface="맑은 고딕"/>
                         </a:rPr>
@@ -22462,7 +22462,7 @@
                       <a:r>
                         <a:rPr sz="880" b="0">
                           <a:solidFill>
-                            <a:srgbClr val="1E293B"/>
+                            <a:srgbClr val="0F2942"/>
                           </a:solidFill>
                           <a:latin typeface="맑은 고딕"/>
                         </a:rPr>
@@ -22512,7 +22512,7 @@
                       <a:r>
                         <a:rPr sz="880" b="0">
                           <a:solidFill>
-                            <a:srgbClr val="1E293B"/>
+                            <a:srgbClr val="0F2942"/>
                           </a:solidFill>
                           <a:latin typeface="맑은 고딕"/>
                         </a:rPr>
@@ -22562,7 +22562,7 @@
                       <a:r>
                         <a:rPr sz="880" b="0">
                           <a:solidFill>
-                            <a:srgbClr val="1E293B"/>
+                            <a:srgbClr val="0F2942"/>
                           </a:solidFill>
                           <a:latin typeface="맑은 고딕"/>
                         </a:rPr>
@@ -22612,7 +22612,7 @@
                       <a:r>
                         <a:rPr sz="880" b="0">
                           <a:solidFill>
-                            <a:srgbClr val="1E293B"/>
+                            <a:srgbClr val="0F2942"/>
                           </a:solidFill>
                           <a:latin typeface="맑은 고딕"/>
                         </a:rPr>
@@ -22662,7 +22662,7 @@
                       <a:r>
                         <a:rPr sz="880" b="0">
                           <a:solidFill>
-                            <a:srgbClr val="1E293B"/>
+                            <a:srgbClr val="0F2942"/>
                           </a:solidFill>
                           <a:latin typeface="맑은 고딕"/>
                         </a:rPr>
@@ -22712,7 +22712,7 @@
                       <a:r>
                         <a:rPr sz="880" b="0">
                           <a:solidFill>
-                            <a:srgbClr val="1E293B"/>
+                            <a:srgbClr val="0F2942"/>
                           </a:solidFill>
                           <a:latin typeface="맑은 고딕"/>
                         </a:rPr>
@@ -22762,7 +22762,7 @@
                       <a:r>
                         <a:rPr sz="880" b="0">
                           <a:solidFill>
-                            <a:srgbClr val="1E293B"/>
+                            <a:srgbClr val="0F2942"/>
                           </a:solidFill>
                           <a:latin typeface="맑은 고딕"/>
                         </a:rPr>
@@ -22812,7 +22812,7 @@
                       <a:r>
                         <a:rPr sz="880" b="1">
                           <a:solidFill>
-                            <a:srgbClr val="1E293B"/>
+                            <a:srgbClr val="0F2942"/>
                           </a:solidFill>
                           <a:latin typeface="맑은 고딕"/>
                         </a:rPr>
@@ -22862,7 +22862,7 @@
                       <a:r>
                         <a:rPr sz="880" b="0">
                           <a:solidFill>
-                            <a:srgbClr val="1E293B"/>
+                            <a:srgbClr val="0F2942"/>
                           </a:solidFill>
                           <a:latin typeface="맑은 고딕"/>
                         </a:rPr>
@@ -22912,7 +22912,7 @@
                       <a:r>
                         <a:rPr sz="880" b="0">
                           <a:solidFill>
-                            <a:srgbClr val="1E293B"/>
+                            <a:srgbClr val="0F2942"/>
                           </a:solidFill>
                           <a:latin typeface="맑은 고딕"/>
                         </a:rPr>
@@ -22964,7 +22964,7 @@
                       <a:r>
                         <a:rPr sz="880" b="1">
                           <a:solidFill>
-                            <a:srgbClr val="1E293B"/>
+                            <a:srgbClr val="0F2942"/>
                           </a:solidFill>
                           <a:latin typeface="맑은 고딕"/>
                         </a:rPr>
@@ -23014,7 +23014,7 @@
                       <a:r>
                         <a:rPr sz="880" b="1">
                           <a:solidFill>
-                            <a:srgbClr val="1E293B"/>
+                            <a:srgbClr val="0F2942"/>
                           </a:solidFill>
                           <a:latin typeface="맑은 고딕"/>
                         </a:rPr>
@@ -23064,7 +23064,7 @@
                       <a:r>
                         <a:rPr sz="880" b="0">
                           <a:solidFill>
-                            <a:srgbClr val="1E293B"/>
+                            <a:srgbClr val="0F2942"/>
                           </a:solidFill>
                           <a:latin typeface="맑은 고딕"/>
                         </a:rPr>
@@ -23114,7 +23114,7 @@
                       <a:r>
                         <a:rPr sz="880" b="0">
                           <a:solidFill>
-                            <a:srgbClr val="1E293B"/>
+                            <a:srgbClr val="0F2942"/>
                           </a:solidFill>
                           <a:latin typeface="맑은 고딕"/>
                         </a:rPr>
@@ -23164,7 +23164,7 @@
                       <a:r>
                         <a:rPr sz="880" b="0">
                           <a:solidFill>
-                            <a:srgbClr val="1E293B"/>
+                            <a:srgbClr val="0F2942"/>
                           </a:solidFill>
                           <a:latin typeface="맑은 고딕"/>
                         </a:rPr>
@@ -23214,7 +23214,7 @@
                       <a:r>
                         <a:rPr sz="880" b="0">
                           <a:solidFill>
-                            <a:srgbClr val="1E293B"/>
+                            <a:srgbClr val="0F2942"/>
                           </a:solidFill>
                           <a:latin typeface="맑은 고딕"/>
                         </a:rPr>
@@ -23264,7 +23264,7 @@
                       <a:r>
                         <a:rPr sz="880" b="0">
                           <a:solidFill>
-                            <a:srgbClr val="1E293B"/>
+                            <a:srgbClr val="0F2942"/>
                           </a:solidFill>
                           <a:latin typeface="맑은 고딕"/>
                         </a:rPr>
@@ -23314,7 +23314,7 @@
                       <a:r>
                         <a:rPr sz="880" b="0">
                           <a:solidFill>
-                            <a:srgbClr val="1E293B"/>
+                            <a:srgbClr val="0F2942"/>
                           </a:solidFill>
                           <a:latin typeface="맑은 고딕"/>
                         </a:rPr>
@@ -23364,7 +23364,7 @@
                       <a:r>
                         <a:rPr sz="880" b="0">
                           <a:solidFill>
-                            <a:srgbClr val="1E293B"/>
+                            <a:srgbClr val="0F2942"/>
                           </a:solidFill>
                           <a:latin typeface="맑은 고딕"/>
                         </a:rPr>
@@ -23414,7 +23414,7 @@
                       <a:r>
                         <a:rPr sz="880" b="0">
                           <a:solidFill>
-                            <a:srgbClr val="1E293B"/>
+                            <a:srgbClr val="0F2942"/>
                           </a:solidFill>
                           <a:latin typeface="맑은 고딕"/>
                         </a:rPr>
@@ -23464,7 +23464,7 @@
                       <a:r>
                         <a:rPr sz="880" b="0">
                           <a:solidFill>
-                            <a:srgbClr val="1E293B"/>
+                            <a:srgbClr val="0F2942"/>
                           </a:solidFill>
                           <a:latin typeface="맑은 고딕"/>
                         </a:rPr>
@@ -23514,7 +23514,7 @@
                       <a:r>
                         <a:rPr sz="880" b="1">
                           <a:solidFill>
-                            <a:srgbClr val="1E293B"/>
+                            <a:srgbClr val="0F2942"/>
                           </a:solidFill>
                           <a:latin typeface="맑은 고딕"/>
                         </a:rPr>
@@ -23564,7 +23564,7 @@
                       <a:r>
                         <a:rPr sz="880" b="0">
                           <a:solidFill>
-                            <a:srgbClr val="1E293B"/>
+                            <a:srgbClr val="0F2942"/>
                           </a:solidFill>
                           <a:latin typeface="맑은 고딕"/>
                         </a:rPr>
@@ -23614,7 +23614,7 @@
                       <a:r>
                         <a:rPr sz="880" b="0">
                           <a:solidFill>
-                            <a:srgbClr val="1E293B"/>
+                            <a:srgbClr val="0F2942"/>
                           </a:solidFill>
                           <a:latin typeface="맑은 고딕"/>
                         </a:rPr>
@@ -23868,7 +23868,7 @@
             <a:r>
               <a:rPr sz="950" b="0">
                 <a:solidFill>
-                  <a:srgbClr val="1E293B"/>
+                  <a:srgbClr val="0F2942"/>
                 </a:solidFill>
                 <a:latin typeface="맑은 고딕"/>
               </a:rPr>
@@ -23887,7 +23887,7 @@
             <a:r>
               <a:rPr sz="950" b="0">
                 <a:solidFill>
-                  <a:srgbClr val="1E293B"/>
+                  <a:srgbClr val="0F2942"/>
                 </a:solidFill>
                 <a:latin typeface="맑은 고딕"/>
               </a:rPr>
@@ -24077,7 +24077,7 @@
                 </a:solidFill>
                 <a:latin typeface="맑은 고딕"/>
               </a:rPr>
-              <a:t>AWS 인프라 정의서(SyncGuard AI_AP_AWS_infra_v0.2)에 기반하여 내·외부 트래픽을 분리하고 AI/배치 워크로드별 최적 사양을 배분합니다.</a:t>
+              <a:t>AWS 인프라 정의서(SyncFlow AI_HB_AWS_infra_v0.2)에 기반하여 내·외부 트래픽을 분리하고 AI/배치 워크로드별 최적 사양을 배분합니다.</a:t>
             </a:r>
           </a:p>
         </p:txBody>
@@ -24205,7 +24205,7 @@
                 </a:solidFill>
                 <a:latin typeface="맑은 고딕"/>
               </a:rPr>
-              <a:t>한빛글로벌 SyncGuard AI 시스템 구축  |  자원 관리 계획서</a:t>
+              <a:t>한빛글로벌 SyncFlow AI 시스템 구축  |  자원 관리 계획서</a:t>
             </a:r>
           </a:p>
         </p:txBody>
@@ -24588,7 +24588,7 @@
                       <a:r>
                         <a:rPr sz="860" b="1">
                           <a:solidFill>
-                            <a:srgbClr val="1E293B"/>
+                            <a:srgbClr val="0F2942"/>
                           </a:solidFill>
                           <a:latin typeface="맑은 고딕"/>
                         </a:rPr>
@@ -24607,7 +24607,7 @@
                       <a:r>
                         <a:rPr sz="860" b="1">
                           <a:solidFill>
-                            <a:srgbClr val="1E293B"/>
+                            <a:srgbClr val="0F2942"/>
                           </a:solidFill>
                           <a:latin typeface="맑은 고딕"/>
                         </a:rPr>
@@ -24657,11 +24657,11 @@
                       <a:r>
                         <a:rPr sz="860" b="1">
                           <a:solidFill>
-                            <a:srgbClr val="1E293B"/>
-                          </a:solidFill>
-                          <a:latin typeface="맑은 고딕"/>
-                        </a:rPr>
-                        <a:t>syncguard-ai-bo-prv-alb</a:t>
+                            <a:srgbClr val="0F2942"/>
+                          </a:solidFill>
+                          <a:latin typeface="맑은 고딕"/>
+                        </a:rPr>
+                        <a:t>syncflow-ai-bo-prv-alb</a:t>
                       </a:r>
                     </a:p>
                     <a:p>
@@ -24676,7 +24676,7 @@
                       <a:r>
                         <a:rPr sz="860" b="1">
                           <a:solidFill>
-                            <a:srgbClr val="1E293B"/>
+                            <a:srgbClr val="0F2942"/>
                           </a:solidFill>
                           <a:latin typeface="맑은 고딕"/>
                         </a:rPr>
@@ -24726,7 +24726,7 @@
                       <a:r>
                         <a:rPr sz="860" b="0">
                           <a:solidFill>
-                            <a:srgbClr val="1E293B"/>
+                            <a:srgbClr val="0F2942"/>
                           </a:solidFill>
                           <a:latin typeface="맑은 고딕"/>
                         </a:rPr>
@@ -24745,7 +24745,7 @@
                       <a:r>
                         <a:rPr sz="860" b="0">
                           <a:solidFill>
-                            <a:srgbClr val="1E293B"/>
+                            <a:srgbClr val="0F2942"/>
                           </a:solidFill>
                           <a:latin typeface="맑은 고딕"/>
                         </a:rPr>
@@ -24795,11 +24795,11 @@
                       <a:r>
                         <a:rPr sz="860" b="0">
                           <a:solidFill>
-                            <a:srgbClr val="1E293B"/>
-                          </a:solidFill>
-                          <a:latin typeface="맑은 고딕"/>
-                        </a:rPr>
-                        <a:t>• 사내 임직원(RA Lab, 마케터, 관리자) 웹 브라우저 전용 진입점</a:t>
+                            <a:srgbClr val="0F2942"/>
+                          </a:solidFill>
+                          <a:latin typeface="맑은 고딕"/>
+                        </a:rPr>
+                        <a:t>• 사내 임직원(품질법무검증팀, 구매담당자, 관리자) 웹 브라우저 전용 진입점</a:t>
                       </a:r>
                     </a:p>
                     <a:p>
@@ -24814,7 +24814,7 @@
                       <a:r>
                         <a:rPr sz="860" b="0">
                           <a:solidFill>
-                            <a:srgbClr val="1E293B"/>
+                            <a:srgbClr val="0F2942"/>
                           </a:solidFill>
                           <a:latin typeface="맑은 고딕"/>
                         </a:rPr>
@@ -24864,7 +24864,7 @@
                       <a:r>
                         <a:rPr sz="860" b="0">
                           <a:solidFill>
-                            <a:srgbClr val="1E293B"/>
+                            <a:srgbClr val="0F2942"/>
                           </a:solidFill>
                           <a:latin typeface="맑은 고딕"/>
                         </a:rPr>
@@ -24883,7 +24883,7 @@
                       <a:r>
                         <a:rPr sz="860" b="0">
                           <a:solidFill>
-                            <a:srgbClr val="1E293B"/>
+                            <a:srgbClr val="0F2942"/>
                           </a:solidFill>
                           <a:latin typeface="맑은 고딕"/>
                         </a:rPr>
@@ -24935,7 +24935,7 @@
                       <a:r>
                         <a:rPr sz="860" b="1">
                           <a:solidFill>
-                            <a:srgbClr val="1E293B"/>
+                            <a:srgbClr val="0F2942"/>
                           </a:solidFill>
                           <a:latin typeface="맑은 고딕"/>
                         </a:rPr>
@@ -24954,7 +24954,7 @@
                       <a:r>
                         <a:rPr sz="860" b="1">
                           <a:solidFill>
-                            <a:srgbClr val="1E293B"/>
+                            <a:srgbClr val="0F2942"/>
                           </a:solidFill>
                           <a:latin typeface="맑은 고딕"/>
                         </a:rPr>
@@ -25004,11 +25004,11 @@
                       <a:r>
                         <a:rPr sz="860" b="1">
                           <a:solidFill>
-                            <a:srgbClr val="1E293B"/>
-                          </a:solidFill>
-                          <a:latin typeface="맑은 고딕"/>
-                        </a:rPr>
-                        <a:t>syncguard-ai-api-prv-alb</a:t>
+                            <a:srgbClr val="0F2942"/>
+                          </a:solidFill>
+                          <a:latin typeface="맑은 고딕"/>
+                        </a:rPr>
+                        <a:t>syncflow-ai-api-prv-alb</a:t>
                       </a:r>
                     </a:p>
                     <a:p>
@@ -25023,7 +25023,7 @@
                       <a:r>
                         <a:rPr sz="860" b="1">
                           <a:solidFill>
-                            <a:srgbClr val="1E293B"/>
+                            <a:srgbClr val="0F2942"/>
                           </a:solidFill>
                           <a:latin typeface="맑은 고딕"/>
                         </a:rPr>
@@ -25073,7 +25073,7 @@
                       <a:r>
                         <a:rPr sz="860" b="0">
                           <a:solidFill>
-                            <a:srgbClr val="1E293B"/>
+                            <a:srgbClr val="0F2942"/>
                           </a:solidFill>
                           <a:latin typeface="맑은 고딕"/>
                         </a:rPr>
@@ -25092,7 +25092,7 @@
                       <a:r>
                         <a:rPr sz="860" b="0">
                           <a:solidFill>
-                            <a:srgbClr val="1E293B"/>
+                            <a:srgbClr val="0F2942"/>
                           </a:solidFill>
                           <a:latin typeface="맑은 고딕"/>
                         </a:rPr>
@@ -25142,11 +25142,11 @@
                       <a:r>
                         <a:rPr sz="860" b="0">
                           <a:solidFill>
-                            <a:srgbClr val="1E293B"/>
-                          </a:solidFill>
-                          <a:latin typeface="맑은 고딕"/>
-                        </a:rPr>
-                        <a:t>• MarketingHub 등 사내 기간계 시스템의 클레임 판정 요청 API 전용 진입점</a:t>
+                            <a:srgbClr val="0F2942"/>
+                          </a:solidFill>
+                          <a:latin typeface="맑은 고딕"/>
+                        </a:rPr>
+                        <a:t>• SRM-Portal 등 사내 기간계 시스템의 규격·계약 판정 요청 API 전용 진입점</a:t>
                       </a:r>
                     </a:p>
                     <a:p>
@@ -25161,7 +25161,7 @@
                       <a:r>
                         <a:rPr sz="860" b="0">
                           <a:solidFill>
-                            <a:srgbClr val="1E293B"/>
+                            <a:srgbClr val="0F2942"/>
                           </a:solidFill>
                           <a:latin typeface="맑은 고딕"/>
                         </a:rPr>
@@ -25211,7 +25211,7 @@
                       <a:r>
                         <a:rPr sz="860" b="0">
                           <a:solidFill>
-                            <a:srgbClr val="1E293B"/>
+                            <a:srgbClr val="0F2942"/>
                           </a:solidFill>
                           <a:latin typeface="맑은 고딕"/>
                         </a:rPr>
@@ -25230,7 +25230,7 @@
                       <a:r>
                         <a:rPr sz="860" b="0">
                           <a:solidFill>
-                            <a:srgbClr val="1E293B"/>
+                            <a:srgbClr val="0F2942"/>
                           </a:solidFill>
                           <a:latin typeface="맑은 고딕"/>
                         </a:rPr>
@@ -25282,7 +25282,7 @@
                       <a:r>
                         <a:rPr sz="860" b="1">
                           <a:solidFill>
-                            <a:srgbClr val="1E293B"/>
+                            <a:srgbClr val="0F2942"/>
                           </a:solidFill>
                           <a:latin typeface="맑은 고딕"/>
                         </a:rPr>
@@ -25332,11 +25332,11 @@
                       <a:r>
                         <a:rPr sz="860" b="1">
                           <a:solidFill>
-                            <a:srgbClr val="1E293B"/>
-                          </a:solidFill>
-                          <a:latin typeface="맑은 고딕"/>
-                        </a:rPr>
-                        <a:t>syncguard-fe-web &amp; syncguard-be-server</a:t>
+                            <a:srgbClr val="0F2942"/>
+                          </a:solidFill>
+                          <a:latin typeface="맑은 고딕"/>
+                        </a:rPr>
+                        <a:t>syncflow-fe-web &amp; syncflow-be-server</a:t>
                       </a:r>
                     </a:p>
                     <a:p>
@@ -25351,7 +25351,7 @@
                       <a:r>
                         <a:rPr sz="860" b="1">
                           <a:solidFill>
-                            <a:srgbClr val="1E293B"/>
+                            <a:srgbClr val="0F2942"/>
                           </a:solidFill>
                           <a:latin typeface="맑은 고딕"/>
                         </a:rPr>
@@ -25401,7 +25401,7 @@
                       <a:r>
                         <a:rPr sz="860" b="0">
                           <a:solidFill>
-                            <a:srgbClr val="1E293B"/>
+                            <a:srgbClr val="0F2942"/>
                           </a:solidFill>
                           <a:latin typeface="맑은 고딕"/>
                         </a:rPr>
@@ -25420,7 +25420,7 @@
                       <a:r>
                         <a:rPr sz="860" b="0">
                           <a:solidFill>
-                            <a:srgbClr val="1E293B"/>
+                            <a:srgbClr val="0F2942"/>
                           </a:solidFill>
                           <a:latin typeface="맑은 고딕"/>
                         </a:rPr>
@@ -25470,7 +25470,7 @@
                       <a:r>
                         <a:rPr sz="860" b="0">
                           <a:solidFill>
-                            <a:srgbClr val="1E293B"/>
+                            <a:srgbClr val="0F2942"/>
                           </a:solidFill>
                           <a:latin typeface="맑은 고딕"/>
                         </a:rPr>
@@ -25489,7 +25489,7 @@
                       <a:r>
                         <a:rPr sz="860" b="0">
                           <a:solidFill>
-                            <a:srgbClr val="1E293B"/>
+                            <a:srgbClr val="0F2942"/>
                           </a:solidFill>
                           <a:latin typeface="맑은 고딕"/>
                         </a:rPr>
@@ -25539,7 +25539,7 @@
                       <a:r>
                         <a:rPr sz="860" b="0">
                           <a:solidFill>
-                            <a:srgbClr val="1E293B"/>
+                            <a:srgbClr val="0F2942"/>
                           </a:solidFill>
                           <a:latin typeface="맑은 고딕"/>
                         </a:rPr>
@@ -25558,7 +25558,7 @@
                       <a:r>
                         <a:rPr sz="860" b="0">
                           <a:solidFill>
-                            <a:srgbClr val="1E293B"/>
+                            <a:srgbClr val="0F2942"/>
                           </a:solidFill>
                           <a:latin typeface="맑은 고딕"/>
                         </a:rPr>
@@ -25610,7 +25610,7 @@
                       <a:r>
                         <a:rPr sz="860" b="1">
                           <a:solidFill>
-                            <a:srgbClr val="1E293B"/>
+                            <a:srgbClr val="0F2942"/>
                           </a:solidFill>
                           <a:latin typeface="맑은 고딕"/>
                         </a:rPr>
@@ -25660,11 +25660,11 @@
                       <a:r>
                         <a:rPr sz="860" b="1">
                           <a:solidFill>
-                            <a:srgbClr val="1E293B"/>
-                          </a:solidFill>
-                          <a:latin typeface="맑은 고딕"/>
-                        </a:rPr>
-                        <a:t>syncguard-api-server</a:t>
+                            <a:srgbClr val="0F2942"/>
+                          </a:solidFill>
+                          <a:latin typeface="맑은 고딕"/>
+                        </a:rPr>
+                        <a:t>syncflow-api-server</a:t>
                       </a:r>
                     </a:p>
                     <a:p>
@@ -25679,7 +25679,7 @@
                       <a:r>
                         <a:rPr sz="860" b="1">
                           <a:solidFill>
-                            <a:srgbClr val="1E293B"/>
+                            <a:srgbClr val="0F2942"/>
                           </a:solidFill>
                           <a:latin typeface="맑은 고딕"/>
                         </a:rPr>
@@ -25729,7 +25729,7 @@
                       <a:r>
                         <a:rPr sz="860" b="0">
                           <a:solidFill>
-                            <a:srgbClr val="1E293B"/>
+                            <a:srgbClr val="0F2942"/>
                           </a:solidFill>
                           <a:latin typeface="맑은 고딕"/>
                         </a:rPr>
@@ -25748,7 +25748,7 @@
                       <a:r>
                         <a:rPr sz="860" b="0">
                           <a:solidFill>
-                            <a:srgbClr val="1E293B"/>
+                            <a:srgbClr val="0F2942"/>
                           </a:solidFill>
                           <a:latin typeface="맑은 고딕"/>
                         </a:rPr>
@@ -25798,11 +25798,11 @@
                       <a:r>
                         <a:rPr sz="860" b="0">
                           <a:solidFill>
-                            <a:srgbClr val="1E293B"/>
-                          </a:solidFill>
-                          <a:latin typeface="맑은 고딕"/>
-                        </a:rPr>
-                        <a:t>• MarketingHub 및 ProductLab 실시간 REST API 연계 및 토큰 인증 처리</a:t>
+                            <a:srgbClr val="0F2942"/>
+                          </a:solidFill>
+                          <a:latin typeface="맑은 고딕"/>
+                        </a:rPr>
+                        <a:t>• SRM-Portal 및 PLM-Nexus 실시간 REST API 연계 및 토큰 인증 처리</a:t>
                       </a:r>
                     </a:p>
                     <a:p>
@@ -25817,7 +25817,7 @@
                       <a:r>
                         <a:rPr sz="860" b="0">
                           <a:solidFill>
-                            <a:srgbClr val="1E293B"/>
+                            <a:srgbClr val="0F2942"/>
                           </a:solidFill>
                           <a:latin typeface="맑은 고딕"/>
                         </a:rPr>
@@ -25867,7 +25867,7 @@
                       <a:r>
                         <a:rPr sz="860" b="0">
                           <a:solidFill>
-                            <a:srgbClr val="1E293B"/>
+                            <a:srgbClr val="0F2942"/>
                           </a:solidFill>
                           <a:latin typeface="맑은 고딕"/>
                         </a:rPr>
@@ -25886,7 +25886,7 @@
                       <a:r>
                         <a:rPr sz="860" b="0">
                           <a:solidFill>
-                            <a:srgbClr val="1E293B"/>
+                            <a:srgbClr val="0F2942"/>
                           </a:solidFill>
                           <a:latin typeface="맑은 고딕"/>
                         </a:rPr>
@@ -25938,7 +25938,7 @@
                       <a:r>
                         <a:rPr sz="860" b="1">
                           <a:solidFill>
-                            <a:srgbClr val="1E293B"/>
+                            <a:srgbClr val="0F2942"/>
                           </a:solidFill>
                           <a:latin typeface="맑은 고딕"/>
                         </a:rPr>
@@ -25988,11 +25988,11 @@
                       <a:r>
                         <a:rPr sz="860" b="1">
                           <a:solidFill>
-                            <a:srgbClr val="1E293B"/>
-                          </a:solidFill>
-                          <a:latin typeface="맑은 고딕"/>
-                        </a:rPr>
-                        <a:t>syncguard-ai-agent</a:t>
+                            <a:srgbClr val="0F2942"/>
+                          </a:solidFill>
+                          <a:latin typeface="맑은 고딕"/>
+                        </a:rPr>
+                        <a:t>syncflow-ai-agent</a:t>
                       </a:r>
                     </a:p>
                     <a:p>
@@ -26007,7 +26007,7 @@
                       <a:r>
                         <a:rPr sz="860" b="1">
                           <a:solidFill>
-                            <a:srgbClr val="1E293B"/>
+                            <a:srgbClr val="0F2942"/>
                           </a:solidFill>
                           <a:latin typeface="맑은 고딕"/>
                         </a:rPr>
@@ -26057,7 +26057,7 @@
                       <a:r>
                         <a:rPr sz="860" b="0">
                           <a:solidFill>
-                            <a:srgbClr val="1E293B"/>
+                            <a:srgbClr val="0F2942"/>
                           </a:solidFill>
                           <a:latin typeface="맑은 고딕"/>
                         </a:rPr>
@@ -26076,7 +26076,7 @@
                       <a:r>
                         <a:rPr sz="860" b="0">
                           <a:solidFill>
-                            <a:srgbClr val="1E293B"/>
+                            <a:srgbClr val="0F2942"/>
                           </a:solidFill>
                           <a:latin typeface="맑은 고딕"/>
                         </a:rPr>
@@ -26126,11 +26126,11 @@
                       <a:r>
                         <a:rPr sz="860" b="0">
                           <a:solidFill>
-                            <a:srgbClr val="1E293B"/>
-                          </a:solidFill>
-                          <a:latin typeface="맑은 고딕"/>
-                        </a:rPr>
-                        <a:t>• 문서 파싱, 클로바 OCR, 동영상 FFmpeg 프레임 추출, 3단계 AI 판정</a:t>
+                            <a:srgbClr val="0F2942"/>
+                          </a:solidFill>
+                          <a:latin typeface="맑은 고딕"/>
+                        </a:rPr>
+                        <a:t>• 문서 파싱, 비전 OCR, 설계도면 FFmpeg 프레임 추출, 3단계 AI 판정</a:t>
                       </a:r>
                     </a:p>
                     <a:p>
@@ -26145,7 +26145,7 @@
                       <a:r>
                         <a:rPr sz="860" b="0">
                           <a:solidFill>
-                            <a:srgbClr val="1E293B"/>
+                            <a:srgbClr val="0F2942"/>
                           </a:solidFill>
                           <a:latin typeface="맑은 고딕"/>
                         </a:rPr>
@@ -26195,7 +26195,7 @@
                       <a:r>
                         <a:rPr sz="860" b="0">
                           <a:solidFill>
-                            <a:srgbClr val="1E293B"/>
+                            <a:srgbClr val="0F2942"/>
                           </a:solidFill>
                           <a:latin typeface="맑은 고딕"/>
                         </a:rPr>
@@ -26214,7 +26214,7 @@
                       <a:r>
                         <a:rPr sz="860" b="0">
                           <a:solidFill>
-                            <a:srgbClr val="1E293B"/>
+                            <a:srgbClr val="0F2942"/>
                           </a:solidFill>
                           <a:latin typeface="맑은 고딕"/>
                         </a:rPr>
@@ -26266,7 +26266,7 @@
                       <a:r>
                         <a:rPr sz="860" b="1">
                           <a:solidFill>
-                            <a:srgbClr val="1E293B"/>
+                            <a:srgbClr val="0F2942"/>
                           </a:solidFill>
                           <a:latin typeface="맑은 고딕"/>
                         </a:rPr>
@@ -26316,11 +26316,11 @@
                       <a:r>
                         <a:rPr sz="860" b="1">
                           <a:solidFill>
-                            <a:srgbClr val="1E293B"/>
-                          </a:solidFill>
-                          <a:latin typeface="맑은 고딕"/>
-                        </a:rPr>
-                        <a:t>syncguard-batch-server</a:t>
+                            <a:srgbClr val="0F2942"/>
+                          </a:solidFill>
+                          <a:latin typeface="맑은 고딕"/>
+                        </a:rPr>
+                        <a:t>syncflow-batch-server</a:t>
                       </a:r>
                     </a:p>
                     <a:p>
@@ -26335,11 +26335,11 @@
                       <a:r>
                         <a:rPr sz="860" b="1">
                           <a:solidFill>
-                            <a:srgbClr val="1E293B"/>
-                          </a:solidFill>
-                          <a:latin typeface="맑은 고딕"/>
-                        </a:rPr>
-                        <a:t>(스케줄링 &amp; 실증DB 동기화)</a:t>
+                            <a:srgbClr val="0F2942"/>
+                          </a:solidFill>
+                          <a:latin typeface="맑은 고딕"/>
+                        </a:rPr>
+                        <a:t>(스케줄링 &amp; 시험검증DB 동기화)</a:t>
                       </a:r>
                     </a:p>
                   </a:txBody>
@@ -26385,7 +26385,7 @@
                       <a:r>
                         <a:rPr sz="860" b="0">
                           <a:solidFill>
-                            <a:srgbClr val="1E293B"/>
+                            <a:srgbClr val="0F2942"/>
                           </a:solidFill>
                           <a:latin typeface="맑은 고딕"/>
                         </a:rPr>
@@ -26404,7 +26404,7 @@
                       <a:r>
                         <a:rPr sz="860" b="0">
                           <a:solidFill>
-                            <a:srgbClr val="1E293B"/>
+                            <a:srgbClr val="0F2942"/>
                           </a:solidFill>
                           <a:latin typeface="맑은 고딕"/>
                         </a:rPr>
@@ -26454,11 +26454,11 @@
                       <a:r>
                         <a:rPr sz="860" b="0">
                           <a:solidFill>
-                            <a:srgbClr val="1E293B"/>
-                          </a:solidFill>
-                          <a:latin typeface="맑은 고딕"/>
-                        </a:rPr>
-                        <a:t>• 야간 ProductLab 실증 데이터 동기화, 통계 집계, 임시 파일 정리 배치</a:t>
+                            <a:srgbClr val="0F2942"/>
+                          </a:solidFill>
+                          <a:latin typeface="맑은 고딕"/>
+                        </a:rPr>
+                        <a:t>• 야간 PLM-Nexus 시험검증 데이터 동기화, 통계 집계, 임시 파일 정리 배치</a:t>
                       </a:r>
                     </a:p>
                     <a:p>
@@ -26473,7 +26473,7 @@
                       <a:r>
                         <a:rPr sz="860" b="0">
                           <a:solidFill>
-                            <a:srgbClr val="1E293B"/>
+                            <a:srgbClr val="0F2942"/>
                           </a:solidFill>
                           <a:latin typeface="맑은 고딕"/>
                         </a:rPr>
@@ -26523,7 +26523,7 @@
                       <a:r>
                         <a:rPr sz="860" b="0">
                           <a:solidFill>
-                            <a:srgbClr val="1E293B"/>
+                            <a:srgbClr val="0F2942"/>
                           </a:solidFill>
                           <a:latin typeface="맑은 고딕"/>
                         </a:rPr>
@@ -26542,7 +26542,7 @@
                       <a:r>
                         <a:rPr sz="860" b="0">
                           <a:solidFill>
-                            <a:srgbClr val="1E293B"/>
+                            <a:srgbClr val="0F2942"/>
                           </a:solidFill>
                           <a:latin typeface="맑은 고딕"/>
                         </a:rPr>
@@ -26594,7 +26594,7 @@
                       <a:r>
                         <a:rPr sz="860" b="1">
                           <a:solidFill>
-                            <a:srgbClr val="1E293B"/>
+                            <a:srgbClr val="0F2942"/>
                           </a:solidFill>
                           <a:latin typeface="맑은 고딕"/>
                         </a:rPr>
@@ -26644,7 +26644,7 @@
                       <a:r>
                         <a:rPr sz="860" b="1">
                           <a:solidFill>
-                            <a:srgbClr val="1E293B"/>
+                            <a:srgbClr val="0F2942"/>
                           </a:solidFill>
                           <a:latin typeface="맑은 고딕"/>
                         </a:rPr>
@@ -26663,7 +26663,7 @@
                       <a:r>
                         <a:rPr sz="860" b="1">
                           <a:solidFill>
-                            <a:srgbClr val="1E293B"/>
+                            <a:srgbClr val="0F2942"/>
                           </a:solidFill>
                           <a:latin typeface="맑은 고딕"/>
                         </a:rPr>
@@ -26713,7 +26713,7 @@
                       <a:r>
                         <a:rPr sz="860" b="0">
                           <a:solidFill>
-                            <a:srgbClr val="1E293B"/>
+                            <a:srgbClr val="0F2942"/>
                           </a:solidFill>
                           <a:latin typeface="맑은 고딕"/>
                         </a:rPr>
@@ -26732,7 +26732,7 @@
                       <a:r>
                         <a:rPr sz="860" b="0">
                           <a:solidFill>
-                            <a:srgbClr val="1E293B"/>
+                            <a:srgbClr val="0F2942"/>
                           </a:solidFill>
                           <a:latin typeface="맑은 고딕"/>
                         </a:rPr>
@@ -26782,11 +26782,11 @@
                       <a:r>
                         <a:rPr sz="860" b="0">
                           <a:solidFill>
-                            <a:srgbClr val="1E293B"/>
-                          </a:solidFill>
-                          <a:latin typeface="맑은 고딕"/>
-                        </a:rPr>
-                        <a:t>• RDS : 정형 메타데이터 + pgvector(1536차원) 법령/실증 벡터 DB 통합</a:t>
+                            <a:srgbClr val="0F2942"/>
+                          </a:solidFill>
+                          <a:latin typeface="맑은 고딕"/>
+                        </a:rPr>
+                        <a:t>• RDS : 정형 메타데이터 + pgvector(1536차원) 법령/시험검증 벡터 DB 통합</a:t>
                       </a:r>
                     </a:p>
                     <a:p>
@@ -26801,11 +26801,11 @@
                       <a:r>
                         <a:rPr sz="860" b="0">
                           <a:solidFill>
-                            <a:srgbClr val="1E293B"/>
-                          </a:solidFill>
-                          <a:latin typeface="맑은 고딕"/>
-                        </a:rPr>
-                        <a:t>• S3 : ap-syncguard-ai-dev/stg/prd (원본 문서/영상/캡처 이미지 저장, Intelligent-Tiering)</a:t>
+                            <a:srgbClr val="0F2942"/>
+                          </a:solidFill>
+                          <a:latin typeface="맑은 고딕"/>
+                        </a:rPr>
+                        <a:t>• S3 : ap-syncflow-ai-dev/stg/prd (원본 문서/영상/스냅샷 이미지 저장, Intelligent-Tiering)</a:t>
                       </a:r>
                     </a:p>
                   </a:txBody>
@@ -26851,7 +26851,7 @@
                       <a:r>
                         <a:rPr sz="860" b="0">
                           <a:solidFill>
-                            <a:srgbClr val="1E293B"/>
+                            <a:srgbClr val="0F2942"/>
                           </a:solidFill>
                           <a:latin typeface="맑은 고딕"/>
                         </a:rPr>
@@ -26870,7 +26870,7 @@
                       <a:r>
                         <a:rPr sz="860" b="0">
                           <a:solidFill>
-                            <a:srgbClr val="1E293B"/>
+                            <a:srgbClr val="0F2942"/>
                           </a:solidFill>
                           <a:latin typeface="맑은 고딕"/>
                         </a:rPr>
@@ -27218,7 +27218,7 @@
                 </a:solidFill>
                 <a:latin typeface="맑은 고딕"/>
               </a:rPr>
-              <a:t>한빛글로벌 SyncGuard AI 시스템 구축  |  자원 관리 계획서</a:t>
+              <a:t>한빛글로벌 SyncFlow AI 시스템 구축  |  자원 관리 계획서</a:t>
             </a:r>
           </a:p>
         </p:txBody>
@@ -27652,7 +27652,7 @@
                       <a:r>
                         <a:rPr sz="860" b="1">
                           <a:solidFill>
-                            <a:srgbClr val="1E293B"/>
+                            <a:srgbClr val="0F2942"/>
                           </a:solidFill>
                           <a:latin typeface="맑은 고딕"/>
                         </a:rPr>
@@ -27702,7 +27702,7 @@
                       <a:r>
                         <a:rPr sz="860" b="1">
                           <a:solidFill>
-                            <a:srgbClr val="1E293B"/>
+                            <a:srgbClr val="0F2942"/>
                           </a:solidFill>
                           <a:latin typeface="맑은 고딕"/>
                         </a:rPr>
@@ -27721,7 +27721,7 @@
                       <a:r>
                         <a:rPr sz="860" b="1">
                           <a:solidFill>
-                            <a:srgbClr val="1E293B"/>
+                            <a:srgbClr val="0F2942"/>
                           </a:solidFill>
                           <a:latin typeface="맑은 고딕"/>
                         </a:rPr>
@@ -27771,7 +27771,7 @@
                       <a:r>
                         <a:rPr sz="860" b="0">
                           <a:solidFill>
-                            <a:srgbClr val="1E293B"/>
+                            <a:srgbClr val="0F2942"/>
                           </a:solidFill>
                           <a:latin typeface="맑은 고딕"/>
                         </a:rPr>
@@ -27790,7 +27790,7 @@
                       <a:r>
                         <a:rPr sz="860" b="0">
                           <a:solidFill>
-                            <a:srgbClr val="1E293B"/>
+                            <a:srgbClr val="0F2942"/>
                           </a:solidFill>
                           <a:latin typeface="맑은 고딕"/>
                         </a:rPr>
@@ -27840,7 +27840,7 @@
                       <a:r>
                         <a:rPr sz="860" b="0">
                           <a:solidFill>
-                            <a:srgbClr val="1E293B"/>
+                            <a:srgbClr val="0F2942"/>
                           </a:solidFill>
                           <a:latin typeface="맑은 고딕"/>
                         </a:rPr>
@@ -27890,7 +27890,7 @@
                       <a:r>
                         <a:rPr sz="860" b="0">
                           <a:solidFill>
-                            <a:srgbClr val="1E293B"/>
+                            <a:srgbClr val="0F2942"/>
                           </a:solidFill>
                           <a:latin typeface="맑은 고딕"/>
                         </a:rPr>
@@ -27909,7 +27909,7 @@
                       <a:r>
                         <a:rPr sz="860" b="0">
                           <a:solidFill>
-                            <a:srgbClr val="1E293B"/>
+                            <a:srgbClr val="0F2942"/>
                           </a:solidFill>
                           <a:latin typeface="맑은 고딕"/>
                         </a:rPr>
@@ -27959,7 +27959,7 @@
                       <a:r>
                         <a:rPr sz="860" b="0">
                           <a:solidFill>
-                            <a:srgbClr val="1E293B"/>
+                            <a:srgbClr val="0F2942"/>
                           </a:solidFill>
                           <a:latin typeface="맑은 고딕"/>
                         </a:rPr>
@@ -28011,7 +28011,7 @@
                       <a:r>
                         <a:rPr sz="860" b="1">
                           <a:solidFill>
-                            <a:srgbClr val="1E293B"/>
+                            <a:srgbClr val="0F2942"/>
                           </a:solidFill>
                           <a:latin typeface="맑은 고딕"/>
                         </a:rPr>
@@ -28061,7 +28061,7 @@
                       <a:r>
                         <a:rPr sz="860" b="1">
                           <a:solidFill>
-                            <a:srgbClr val="1E293B"/>
+                            <a:srgbClr val="0F2942"/>
                           </a:solidFill>
                           <a:latin typeface="맑은 고딕"/>
                         </a:rPr>
@@ -28080,7 +28080,7 @@
                       <a:r>
                         <a:rPr sz="860" b="1">
                           <a:solidFill>
-                            <a:srgbClr val="1E293B"/>
+                            <a:srgbClr val="0F2942"/>
                           </a:solidFill>
                           <a:latin typeface="맑은 고딕"/>
                         </a:rPr>
@@ -28130,7 +28130,7 @@
                       <a:r>
                         <a:rPr sz="860" b="0">
                           <a:solidFill>
-                            <a:srgbClr val="1E293B"/>
+                            <a:srgbClr val="0F2942"/>
                           </a:solidFill>
                           <a:latin typeface="맑은 고딕"/>
                         </a:rPr>
@@ -28149,7 +28149,7 @@
                       <a:r>
                         <a:rPr sz="860" b="0">
                           <a:solidFill>
-                            <a:srgbClr val="1E293B"/>
+                            <a:srgbClr val="0F2942"/>
                           </a:solidFill>
                           <a:latin typeface="맑은 고딕"/>
                         </a:rPr>
@@ -28199,7 +28199,7 @@
                       <a:r>
                         <a:rPr sz="860" b="0">
                           <a:solidFill>
-                            <a:srgbClr val="1E293B"/>
+                            <a:srgbClr val="0F2942"/>
                           </a:solidFill>
                           <a:latin typeface="맑은 고딕"/>
                         </a:rPr>
@@ -28249,7 +28249,7 @@
                       <a:r>
                         <a:rPr sz="860" b="0">
                           <a:solidFill>
-                            <a:srgbClr val="1E293B"/>
+                            <a:srgbClr val="0F2942"/>
                           </a:solidFill>
                           <a:latin typeface="맑은 고딕"/>
                         </a:rPr>
@@ -28268,7 +28268,7 @@
                       <a:r>
                         <a:rPr sz="860" b="0">
                           <a:solidFill>
-                            <a:srgbClr val="1E293B"/>
+                            <a:srgbClr val="0F2942"/>
                           </a:solidFill>
                           <a:latin typeface="맑은 고딕"/>
                         </a:rPr>
@@ -28318,7 +28318,7 @@
                       <a:r>
                         <a:rPr sz="860" b="0">
                           <a:solidFill>
-                            <a:srgbClr val="1E293B"/>
+                            <a:srgbClr val="0F2942"/>
                           </a:solidFill>
                           <a:latin typeface="맑은 고딕"/>
                         </a:rPr>
@@ -28370,7 +28370,7 @@
                       <a:r>
                         <a:rPr sz="860" b="1">
                           <a:solidFill>
-                            <a:srgbClr val="1E293B"/>
+                            <a:srgbClr val="0F2942"/>
                           </a:solidFill>
                           <a:latin typeface="맑은 고딕"/>
                         </a:rPr>
@@ -28420,7 +28420,7 @@
                       <a:r>
                         <a:rPr sz="860" b="1">
                           <a:solidFill>
-                            <a:srgbClr val="1E293B"/>
+                            <a:srgbClr val="0F2942"/>
                           </a:solidFill>
                           <a:latin typeface="맑은 고딕"/>
                         </a:rPr>
@@ -28439,7 +28439,7 @@
                       <a:r>
                         <a:rPr sz="860" b="1">
                           <a:solidFill>
-                            <a:srgbClr val="1E293B"/>
+                            <a:srgbClr val="0F2942"/>
                           </a:solidFill>
                           <a:latin typeface="맑은 고딕"/>
                         </a:rPr>
@@ -28489,7 +28489,7 @@
                       <a:r>
                         <a:rPr sz="860" b="0">
                           <a:solidFill>
-                            <a:srgbClr val="1E293B"/>
+                            <a:srgbClr val="0F2942"/>
                           </a:solidFill>
                           <a:latin typeface="맑은 고딕"/>
                         </a:rPr>
@@ -28508,7 +28508,7 @@
                       <a:r>
                         <a:rPr sz="860" b="0">
                           <a:solidFill>
-                            <a:srgbClr val="1E293B"/>
+                            <a:srgbClr val="0F2942"/>
                           </a:solidFill>
                           <a:latin typeface="맑은 고딕"/>
                         </a:rPr>
@@ -28558,7 +28558,7 @@
                       <a:r>
                         <a:rPr sz="860" b="0">
                           <a:solidFill>
-                            <a:srgbClr val="1E293B"/>
+                            <a:srgbClr val="0F2942"/>
                           </a:solidFill>
                           <a:latin typeface="맑은 고딕"/>
                         </a:rPr>
@@ -28608,7 +28608,7 @@
                       <a:r>
                         <a:rPr sz="860" b="0">
                           <a:solidFill>
-                            <a:srgbClr val="1E293B"/>
+                            <a:srgbClr val="0F2942"/>
                           </a:solidFill>
                           <a:latin typeface="맑은 고딕"/>
                         </a:rPr>
@@ -28627,7 +28627,7 @@
                       <a:r>
                         <a:rPr sz="860" b="0">
                           <a:solidFill>
-                            <a:srgbClr val="1E293B"/>
+                            <a:srgbClr val="0F2942"/>
                           </a:solidFill>
                           <a:latin typeface="맑은 고딕"/>
                         </a:rPr>
@@ -28677,11 +28677,11 @@
                       <a:r>
                         <a:rPr sz="860" b="0">
                           <a:solidFill>
-                            <a:srgbClr val="1E293B"/>
-                          </a:solidFill>
-                          <a:latin typeface="맑은 고딕"/>
-                        </a:rPr>
-                        <a:t>비동기(Async) 워커 큐 적용 및 동영상 처리 시 임시 파일 즉시 클린업</a:t>
+                            <a:srgbClr val="0F2942"/>
+                          </a:solidFill>
+                          <a:latin typeface="맑은 고딕"/>
+                        </a:rPr>
+                        <a:t>비동기(Async) 워커 큐 적용 및 설계도면 처리 시 임시 파일 즉시 클린업</a:t>
                       </a:r>
                     </a:p>
                   </a:txBody>
@@ -28729,7 +28729,7 @@
                       <a:r>
                         <a:rPr sz="860" b="1">
                           <a:solidFill>
-                            <a:srgbClr val="1E293B"/>
+                            <a:srgbClr val="0F2942"/>
                           </a:solidFill>
                           <a:latin typeface="맑은 고딕"/>
                         </a:rPr>
@@ -28779,7 +28779,7 @@
                       <a:r>
                         <a:rPr sz="860" b="1">
                           <a:solidFill>
-                            <a:srgbClr val="1E293B"/>
+                            <a:srgbClr val="0F2942"/>
                           </a:solidFill>
                           <a:latin typeface="맑은 고딕"/>
                         </a:rPr>
@@ -28798,7 +28798,7 @@
                       <a:r>
                         <a:rPr sz="860" b="1">
                           <a:solidFill>
-                            <a:srgbClr val="1E293B"/>
+                            <a:srgbClr val="0F2942"/>
                           </a:solidFill>
                           <a:latin typeface="맑은 고딕"/>
                         </a:rPr>
@@ -28848,7 +28848,7 @@
                       <a:r>
                         <a:rPr sz="860" b="0">
                           <a:solidFill>
-                            <a:srgbClr val="1E293B"/>
+                            <a:srgbClr val="0F2942"/>
                           </a:solidFill>
                           <a:latin typeface="맑은 고딕"/>
                         </a:rPr>
@@ -28867,7 +28867,7 @@
                       <a:r>
                         <a:rPr sz="860" b="0">
                           <a:solidFill>
-                            <a:srgbClr val="1E293B"/>
+                            <a:srgbClr val="0F2942"/>
                           </a:solidFill>
                           <a:latin typeface="맑은 고딕"/>
                         </a:rPr>
@@ -28917,11 +28917,11 @@
                       <a:r>
                         <a:rPr sz="860" b="0">
                           <a:solidFill>
-                            <a:srgbClr val="1E293B"/>
-                          </a:solidFill>
-                          <a:latin typeface="맑은 고딕"/>
-                        </a:rPr>
-                        <a:t>클레임 판정 이력, 100대 규칙사전 및 식약처 가이드라인/실증 벡터 검색</a:t>
+                            <a:srgbClr val="0F2942"/>
+                          </a:solidFill>
+                          <a:latin typeface="맑은 고딕"/>
+                        </a:rPr>
+                        <a:t>규격·계약 판정 이력, 100대 규칙사전 및 공정위·표준원 가이드라인/시험검증 벡터 검색</a:t>
                       </a:r>
                     </a:p>
                   </a:txBody>
@@ -28967,7 +28967,7 @@
                       <a:r>
                         <a:rPr sz="860" b="0">
                           <a:solidFill>
-                            <a:srgbClr val="1E293B"/>
+                            <a:srgbClr val="0F2942"/>
                           </a:solidFill>
                           <a:latin typeface="맑은 고딕"/>
                         </a:rPr>
@@ -28986,7 +28986,7 @@
                       <a:r>
                         <a:rPr sz="860" b="0">
                           <a:solidFill>
-                            <a:srgbClr val="1E293B"/>
+                            <a:srgbClr val="0F2942"/>
                           </a:solidFill>
                           <a:latin typeface="맑은 고딕"/>
                         </a:rPr>
@@ -29036,7 +29036,7 @@
                       <a:r>
                         <a:rPr sz="860" b="0">
                           <a:solidFill>
-                            <a:srgbClr val="1E293B"/>
+                            <a:srgbClr val="0F2942"/>
                           </a:solidFill>
                           <a:latin typeface="맑은 고딕"/>
                         </a:rPr>
@@ -29088,7 +29088,7 @@
                       <a:r>
                         <a:rPr sz="860" b="1">
                           <a:solidFill>
-                            <a:srgbClr val="1E293B"/>
+                            <a:srgbClr val="0F2942"/>
                           </a:solidFill>
                           <a:latin typeface="맑은 고딕"/>
                         </a:rPr>
@@ -29138,7 +29138,7 @@
                       <a:r>
                         <a:rPr sz="860" b="1">
                           <a:solidFill>
-                            <a:srgbClr val="1E293B"/>
+                            <a:srgbClr val="0F2942"/>
                           </a:solidFill>
                           <a:latin typeface="맑은 고딕"/>
                         </a:rPr>
@@ -29157,7 +29157,7 @@
                       <a:r>
                         <a:rPr sz="860" b="1">
                           <a:solidFill>
-                            <a:srgbClr val="1E293B"/>
+                            <a:srgbClr val="0F2942"/>
                           </a:solidFill>
                           <a:latin typeface="맑은 고딕"/>
                         </a:rPr>
@@ -29207,7 +29207,7 @@
                       <a:r>
                         <a:rPr sz="860" b="0">
                           <a:solidFill>
-                            <a:srgbClr val="1E293B"/>
+                            <a:srgbClr val="0F2942"/>
                           </a:solidFill>
                           <a:latin typeface="맑은 고딕"/>
                         </a:rPr>
@@ -29226,7 +29226,7 @@
                       <a:r>
                         <a:rPr sz="860" b="0">
                           <a:solidFill>
-                            <a:srgbClr val="1E293B"/>
+                            <a:srgbClr val="0F2942"/>
                           </a:solidFill>
                           <a:latin typeface="맑은 고딕"/>
                         </a:rPr>
@@ -29276,11 +29276,11 @@
                       <a:r>
                         <a:rPr sz="860" b="0">
                           <a:solidFill>
-                            <a:srgbClr val="1E293B"/>
-                          </a:solidFill>
-                          <a:latin typeface="맑은 고딕"/>
-                        </a:rPr>
-                        <a:t>3단계 문맥 기반 허위·과대광고 판정, 법령 근거 요약 및 대체 문구 생성</a:t>
+                            <a:srgbClr val="0F2942"/>
+                          </a:solidFill>
+                          <a:latin typeface="맑은 고딕"/>
+                        </a:rPr>
+                        <a:t>3단계 문맥 기반 허위·과대구매계약 판정, 법령 근거 요약 및 대체 조항 생성</a:t>
                       </a:r>
                     </a:p>
                   </a:txBody>
@@ -29326,7 +29326,7 @@
                       <a:r>
                         <a:rPr sz="860" b="0">
                           <a:solidFill>
-                            <a:srgbClr val="1E293B"/>
+                            <a:srgbClr val="0F2942"/>
                           </a:solidFill>
                           <a:latin typeface="맑은 고딕"/>
                         </a:rPr>
@@ -29345,7 +29345,7 @@
                       <a:r>
                         <a:rPr sz="860" b="0">
                           <a:solidFill>
-                            <a:srgbClr val="1E293B"/>
+                            <a:srgbClr val="0F2942"/>
                           </a:solidFill>
                           <a:latin typeface="맑은 고딕"/>
                         </a:rPr>
@@ -29395,7 +29395,7 @@
                       <a:r>
                         <a:rPr sz="860" b="0">
                           <a:solidFill>
-                            <a:srgbClr val="1E293B"/>
+                            <a:srgbClr val="0F2942"/>
                           </a:solidFill>
                           <a:latin typeface="맑은 고딕"/>
                         </a:rPr>
@@ -29447,7 +29447,7 @@
                       <a:r>
                         <a:rPr sz="860" b="1">
                           <a:solidFill>
-                            <a:srgbClr val="1E293B"/>
+                            <a:srgbClr val="0F2942"/>
                           </a:solidFill>
                           <a:latin typeface="맑은 고딕"/>
                         </a:rPr>
@@ -29497,11 +29497,11 @@
                       <a:r>
                         <a:rPr sz="860" b="1">
                           <a:solidFill>
-                            <a:srgbClr val="1E293B"/>
-                          </a:solidFill>
-                          <a:latin typeface="맑은 고딕"/>
-                        </a:rPr>
-                        <a:t>네이버 클로바 OCR API</a:t>
+                            <a:srgbClr val="0F2942"/>
+                          </a:solidFill>
+                          <a:latin typeface="맑은 고딕"/>
+                        </a:rPr>
+                        <a:t>엔터프라이즈 비전 OCR API</a:t>
                       </a:r>
                     </a:p>
                     <a:p>
@@ -29516,11 +29516,11 @@
                       <a:r>
                         <a:rPr sz="860" b="1">
                           <a:solidFill>
-                            <a:srgbClr val="1E293B"/>
-                          </a:solidFill>
-                          <a:latin typeface="맑은 고딕"/>
-                        </a:rPr>
-                        <a:t>(CLOVA OCR)</a:t>
+                            <a:srgbClr val="0F2942"/>
+                          </a:solidFill>
+                          <a:latin typeface="맑은 고딕"/>
+                        </a:rPr>
+                        <a:t>(Enterprise Vision OCR)</a:t>
                       </a:r>
                     </a:p>
                   </a:txBody>
@@ -29566,7 +29566,7 @@
                       <a:r>
                         <a:rPr sz="860" b="0">
                           <a:solidFill>
-                            <a:srgbClr val="1E293B"/>
+                            <a:srgbClr val="0F2942"/>
                           </a:solidFill>
                           <a:latin typeface="맑은 고딕"/>
                         </a:rPr>
@@ -29585,7 +29585,7 @@
                       <a:r>
                         <a:rPr sz="860" b="0">
                           <a:solidFill>
-                            <a:srgbClr val="1E293B"/>
+                            <a:srgbClr val="0F2942"/>
                           </a:solidFill>
                           <a:latin typeface="맑은 고딕"/>
                         </a:rPr>
@@ -29635,11 +29635,11 @@
                       <a:r>
                         <a:rPr sz="860" b="0">
                           <a:solidFill>
-                            <a:srgbClr val="1E293B"/>
-                          </a:solidFill>
-                          <a:latin typeface="맑은 고딕"/>
-                        </a:rPr>
-                        <a:t>이미지 배너, 스캔 문서, 영상 캡처 프레임 내 화장품 문구 고정밀 추출</a:t>
+                            <a:srgbClr val="0F2942"/>
+                          </a:solidFill>
+                          <a:latin typeface="맑은 고딕"/>
+                        </a:rPr>
+                        <a:t>이미지 배너, 스캔 문서, 도면 스냅샷 프레임 내 전장부품 조항 고정밀 추출</a:t>
                       </a:r>
                     </a:p>
                   </a:txBody>
@@ -29685,7 +29685,7 @@
                       <a:r>
                         <a:rPr sz="860" b="0">
                           <a:solidFill>
-                            <a:srgbClr val="1E293B"/>
+                            <a:srgbClr val="0F2942"/>
                           </a:solidFill>
                           <a:latin typeface="맑은 고딕"/>
                         </a:rPr>
@@ -29704,7 +29704,7 @@
                       <a:r>
                         <a:rPr sz="860" b="0">
                           <a:solidFill>
-                            <a:srgbClr val="1E293B"/>
+                            <a:srgbClr val="0F2942"/>
                           </a:solidFill>
                           <a:latin typeface="맑은 고딕"/>
                         </a:rPr>
@@ -29754,7 +29754,7 @@
                       <a:r>
                         <a:rPr sz="860" b="0">
                           <a:solidFill>
-                            <a:srgbClr val="1E293B"/>
+                            <a:srgbClr val="0F2942"/>
                           </a:solidFill>
                           <a:latin typeface="맑은 고딕"/>
                         </a:rPr>
@@ -29806,7 +29806,7 @@
                       <a:r>
                         <a:rPr sz="860" b="1">
                           <a:solidFill>
-                            <a:srgbClr val="1E293B"/>
+                            <a:srgbClr val="0F2942"/>
                           </a:solidFill>
                           <a:latin typeface="맑은 고딕"/>
                         </a:rPr>
@@ -29856,11 +29856,11 @@
                       <a:r>
                         <a:rPr sz="860" b="1">
                           <a:solidFill>
-                            <a:srgbClr val="1E293B"/>
-                          </a:solidFill>
-                          <a:latin typeface="맑은 고딕"/>
-                        </a:rPr>
-                        <a:t>HB-SSO SSO / MarketingHub /</a:t>
+                            <a:srgbClr val="0F2942"/>
+                          </a:solidFill>
+                          <a:latin typeface="맑은 고딕"/>
+                        </a:rPr>
+                        <a:t>HB-SSO SSO / SRM-Portal /</a:t>
                       </a:r>
                     </a:p>
                     <a:p>
@@ -29875,11 +29875,11 @@
                       <a:r>
                         <a:rPr sz="860" b="1">
                           <a:solidFill>
-                            <a:srgbClr val="1E293B"/>
-                          </a:solidFill>
-                          <a:latin typeface="맑은 고딕"/>
-                        </a:rPr>
-                        <a:t>ProductLab / KT레몬(옵션)</a:t>
+                            <a:srgbClr val="0F2942"/>
+                          </a:solidFill>
+                          <a:latin typeface="맑은 고딕"/>
+                        </a:rPr>
+                        <a:t>PLM-Nexus / HB-Monitor(옵션)</a:t>
                       </a:r>
                     </a:p>
                   </a:txBody>
@@ -29925,7 +29925,7 @@
                       <a:r>
                         <a:rPr sz="860" b="0">
                           <a:solidFill>
-                            <a:srgbClr val="1E293B"/>
+                            <a:srgbClr val="0F2942"/>
                           </a:solidFill>
                           <a:latin typeface="맑은 고딕"/>
                         </a:rPr>
@@ -29944,7 +29944,7 @@
                       <a:r>
                         <a:rPr sz="860" b="0">
                           <a:solidFill>
-                            <a:srgbClr val="1E293B"/>
+                            <a:srgbClr val="0F2942"/>
                           </a:solidFill>
                           <a:latin typeface="맑은 고딕"/>
                         </a:rPr>
@@ -29994,11 +29994,11 @@
                       <a:r>
                         <a:rPr sz="860" b="0">
                           <a:solidFill>
-                            <a:srgbClr val="1E293B"/>
-                          </a:solidFill>
-                          <a:latin typeface="맑은 고딕"/>
-                        </a:rPr>
-                        <a:t>임직원 통합인증(SSO), 광고심의 요청 연동(MarketingHub), 실증자료 조회(ProductLab)</a:t>
+                            <a:srgbClr val="0F2942"/>
+                          </a:solidFill>
+                          <a:latin typeface="맑은 고딕"/>
+                        </a:rPr>
+                        <a:t>임직원 통합인증(SSO), 계약·규격검증 요청 연동(SRM-Portal), 시험성적서 조회(PLM-Nexus)</a:t>
                       </a:r>
                     </a:p>
                   </a:txBody>
@@ -30044,7 +30044,7 @@
                       <a:r>
                         <a:rPr sz="860" b="0">
                           <a:solidFill>
-                            <a:srgbClr val="1E293B"/>
+                            <a:srgbClr val="0F2942"/>
                           </a:solidFill>
                           <a:latin typeface="맑은 고딕"/>
                         </a:rPr>
@@ -30063,7 +30063,7 @@
                       <a:r>
                         <a:rPr sz="860" b="0">
                           <a:solidFill>
-                            <a:srgbClr val="1E293B"/>
+                            <a:srgbClr val="0F2942"/>
                           </a:solidFill>
                           <a:latin typeface="맑은 고딕"/>
                         </a:rPr>
@@ -30113,7 +30113,7 @@
                       <a:r>
                         <a:rPr sz="860" b="0">
                           <a:solidFill>
-                            <a:srgbClr val="1E293B"/>
+                            <a:srgbClr val="0F2942"/>
                           </a:solidFill>
                           <a:latin typeface="맑은 고딕"/>
                         </a:rPr>
@@ -30461,7 +30461,7 @@
                 </a:solidFill>
                 <a:latin typeface="맑은 고딕"/>
               </a:rPr>
-              <a:t>한빛글로벌 SyncGuard AI 시스템 구축  |  자원 관리 계획서</a:t>
+              <a:t>한빛글로벌 SyncFlow AI 시스템 구축  |  자원 관리 계획서</a:t>
             </a:r>
           </a:p>
         </p:txBody>
@@ -31092,7 +31092,7 @@
                       <a:r>
                         <a:rPr sz="890" b="1">
                           <a:solidFill>
-                            <a:srgbClr val="1E293B"/>
+                            <a:srgbClr val="0F2942"/>
                           </a:solidFill>
                           <a:latin typeface="맑은 고딕"/>
                         </a:rPr>
@@ -31142,7 +31142,7 @@
                       <a:r>
                         <a:rPr sz="890" b="1">
                           <a:solidFill>
-                            <a:srgbClr val="1E293B"/>
+                            <a:srgbClr val="0F2942"/>
                           </a:solidFill>
                           <a:latin typeface="맑은 고딕"/>
                         </a:rPr>
@@ -31242,7 +31242,7 @@
                       <a:r>
                         <a:rPr sz="890" b="0">
                           <a:solidFill>
-                            <a:srgbClr val="1E293B"/>
+                            <a:srgbClr val="0F2942"/>
                           </a:solidFill>
                           <a:latin typeface="맑은 고딕"/>
                         </a:rPr>
@@ -31292,7 +31292,7 @@
                       <a:r>
                         <a:rPr sz="890" b="0">
                           <a:solidFill>
-                            <a:srgbClr val="1E293B"/>
+                            <a:srgbClr val="0F2942"/>
                           </a:solidFill>
                           <a:latin typeface="맑은 고딕"/>
                         </a:rPr>
@@ -31342,7 +31342,7 @@
                       <a:r>
                         <a:rPr sz="890" b="0">
                           <a:solidFill>
-                            <a:srgbClr val="1E293B"/>
+                            <a:srgbClr val="0F2942"/>
                           </a:solidFill>
                           <a:latin typeface="맑은 고딕"/>
                         </a:rPr>
@@ -31392,7 +31392,7 @@
                       <a:r>
                         <a:rPr sz="890" b="0">
                           <a:solidFill>
-                            <a:srgbClr val="1E293B"/>
+                            <a:srgbClr val="0F2942"/>
                           </a:solidFill>
                           <a:latin typeface="맑은 고딕"/>
                         </a:rPr>
@@ -31442,11 +31442,11 @@
                       <a:r>
                         <a:rPr sz="890" b="0">
                           <a:solidFill>
-                            <a:srgbClr val="1E293B"/>
-                          </a:solidFill>
-                          <a:latin typeface="맑은 고딕"/>
-                        </a:rPr>
-                        <a:t>EKS/RDS/ALB 아키텍처 구성 검증 및 인프라 트러블슈팅 총괄</a:t>
+                            <a:srgbClr val="0F2942"/>
+                          </a:solidFill>
+                          <a:latin typeface="맑은 고딕"/>
+                        </a:rPr>
+                        <a:t>EKS/RDS/ALB 아키텍처 구성 검증 및 인프라 품질불량슈팅 총괄</a:t>
                       </a:r>
                     </a:p>
                   </a:txBody>
@@ -31494,7 +31494,7 @@
                       <a:r>
                         <a:rPr sz="890" b="1">
                           <a:solidFill>
-                            <a:srgbClr val="1E293B"/>
+                            <a:srgbClr val="0F2942"/>
                           </a:solidFill>
                           <a:latin typeface="맑은 고딕"/>
                         </a:rPr>
@@ -31544,7 +31544,7 @@
                       <a:r>
                         <a:rPr sz="890" b="1">
                           <a:solidFill>
-                            <a:srgbClr val="1E293B"/>
+                            <a:srgbClr val="0F2942"/>
                           </a:solidFill>
                           <a:latin typeface="맑은 고딕"/>
                         </a:rPr>
@@ -31644,7 +31644,7 @@
                       <a:r>
                         <a:rPr sz="890" b="0">
                           <a:solidFill>
-                            <a:srgbClr val="1E293B"/>
+                            <a:srgbClr val="0F2942"/>
                           </a:solidFill>
                           <a:latin typeface="맑은 고딕"/>
                         </a:rPr>
@@ -31694,7 +31694,7 @@
                       <a:r>
                         <a:rPr sz="890" b="0">
                           <a:solidFill>
-                            <a:srgbClr val="1E293B"/>
+                            <a:srgbClr val="0F2942"/>
                           </a:solidFill>
                           <a:latin typeface="맑은 고딕"/>
                         </a:rPr>
@@ -31744,7 +31744,7 @@
                       <a:r>
                         <a:rPr sz="890" b="0">
                           <a:solidFill>
-                            <a:srgbClr val="1E293B"/>
+                            <a:srgbClr val="0F2942"/>
                           </a:solidFill>
                           <a:latin typeface="맑은 고딕"/>
                         </a:rPr>
@@ -31794,7 +31794,7 @@
                       <a:r>
                         <a:rPr sz="890" b="0">
                           <a:solidFill>
-                            <a:srgbClr val="1E293B"/>
+                            <a:srgbClr val="0F2942"/>
                           </a:solidFill>
                           <a:latin typeface="맑은 고딕"/>
                         </a:rPr>
@@ -31844,7 +31844,7 @@
                       <a:r>
                         <a:rPr sz="890" b="0">
                           <a:solidFill>
-                            <a:srgbClr val="1E293B"/>
+                            <a:srgbClr val="0F2942"/>
                           </a:solidFill>
                           <a:latin typeface="맑은 고딕"/>
                         </a:rPr>
@@ -31896,7 +31896,7 @@
                       <a:r>
                         <a:rPr sz="890" b="1">
                           <a:solidFill>
-                            <a:srgbClr val="1E293B"/>
+                            <a:srgbClr val="0F2942"/>
                           </a:solidFill>
                           <a:latin typeface="맑은 고딕"/>
                         </a:rPr>
@@ -31946,7 +31946,7 @@
                       <a:r>
                         <a:rPr sz="890" b="1">
                           <a:solidFill>
-                            <a:srgbClr val="1E293B"/>
+                            <a:srgbClr val="0F2942"/>
                           </a:solidFill>
                           <a:latin typeface="맑은 고딕"/>
                         </a:rPr>
@@ -32046,7 +32046,7 @@
                       <a:r>
                         <a:rPr sz="890" b="0">
                           <a:solidFill>
-                            <a:srgbClr val="1E293B"/>
+                            <a:srgbClr val="0F2942"/>
                           </a:solidFill>
                           <a:latin typeface="맑은 고딕"/>
                         </a:rPr>
@@ -32096,7 +32096,7 @@
                       <a:r>
                         <a:rPr sz="890" b="0">
                           <a:solidFill>
-                            <a:srgbClr val="1E293B"/>
+                            <a:srgbClr val="0F2942"/>
                           </a:solidFill>
                           <a:latin typeface="맑은 고딕"/>
                         </a:rPr>
@@ -32146,7 +32146,7 @@
                       <a:r>
                         <a:rPr sz="890" b="0">
                           <a:solidFill>
-                            <a:srgbClr val="1E293B"/>
+                            <a:srgbClr val="0F2942"/>
                           </a:solidFill>
                           <a:latin typeface="맑은 고딕"/>
                         </a:rPr>
@@ -32196,7 +32196,7 @@
                       <a:r>
                         <a:rPr sz="890" b="0">
                           <a:solidFill>
-                            <a:srgbClr val="1E293B"/>
+                            <a:srgbClr val="0F2942"/>
                           </a:solidFill>
                           <a:latin typeface="맑은 고딕"/>
                         </a:rPr>
@@ -32246,7 +32246,7 @@
                       <a:r>
                         <a:rPr sz="890" b="0">
                           <a:solidFill>
-                            <a:srgbClr val="1E293B"/>
+                            <a:srgbClr val="0F2942"/>
                           </a:solidFill>
                           <a:latin typeface="맑은 고딕"/>
                         </a:rPr>
@@ -32298,7 +32298,7 @@
                       <a:r>
                         <a:rPr sz="890" b="1">
                           <a:solidFill>
-                            <a:srgbClr val="1E293B"/>
+                            <a:srgbClr val="0F2942"/>
                           </a:solidFill>
                           <a:latin typeface="맑은 고딕"/>
                         </a:rPr>
@@ -32348,7 +32348,7 @@
                       <a:r>
                         <a:rPr sz="890" b="1">
                           <a:solidFill>
-                            <a:srgbClr val="1E293B"/>
+                            <a:srgbClr val="0F2942"/>
                           </a:solidFill>
                           <a:latin typeface="맑은 고딕"/>
                         </a:rPr>
@@ -32448,7 +32448,7 @@
                       <a:r>
                         <a:rPr sz="890" b="0">
                           <a:solidFill>
-                            <a:srgbClr val="1E293B"/>
+                            <a:srgbClr val="0F2942"/>
                           </a:solidFill>
                           <a:latin typeface="맑은 고딕"/>
                         </a:rPr>
@@ -32498,7 +32498,7 @@
                       <a:r>
                         <a:rPr sz="890" b="0">
                           <a:solidFill>
-                            <a:srgbClr val="1E293B"/>
+                            <a:srgbClr val="0F2942"/>
                           </a:solidFill>
                           <a:latin typeface="맑은 고딕"/>
                         </a:rPr>
@@ -32548,7 +32548,7 @@
                       <a:r>
                         <a:rPr sz="890" b="0">
                           <a:solidFill>
-                            <a:srgbClr val="1E293B"/>
+                            <a:srgbClr val="0F2942"/>
                           </a:solidFill>
                           <a:latin typeface="맑은 고딕"/>
                         </a:rPr>
@@ -32598,7 +32598,7 @@
                       <a:r>
                         <a:rPr sz="890" b="0">
                           <a:solidFill>
-                            <a:srgbClr val="1E293B"/>
+                            <a:srgbClr val="0F2942"/>
                           </a:solidFill>
                           <a:latin typeface="맑은 고딕"/>
                         </a:rPr>
@@ -32648,7 +32648,7 @@
                       <a:r>
                         <a:rPr sz="890" b="0">
                           <a:solidFill>
-                            <a:srgbClr val="1E293B"/>
+                            <a:srgbClr val="0F2942"/>
                           </a:solidFill>
                           <a:latin typeface="맑은 고딕"/>
                         </a:rPr>
@@ -32700,7 +32700,7 @@
                       <a:r>
                         <a:rPr sz="890" b="1">
                           <a:solidFill>
-                            <a:srgbClr val="1E293B"/>
+                            <a:srgbClr val="0F2942"/>
                           </a:solidFill>
                           <a:latin typeface="맑은 고딕"/>
                         </a:rPr>
@@ -32750,7 +32750,7 @@
                       <a:r>
                         <a:rPr sz="890" b="1">
                           <a:solidFill>
-                            <a:srgbClr val="1E293B"/>
+                            <a:srgbClr val="0F2942"/>
                           </a:solidFill>
                           <a:latin typeface="맑은 고딕"/>
                         </a:rPr>
@@ -32850,7 +32850,7 @@
                       <a:r>
                         <a:rPr sz="890" b="0">
                           <a:solidFill>
-                            <a:srgbClr val="1E293B"/>
+                            <a:srgbClr val="0F2942"/>
                           </a:solidFill>
                           <a:latin typeface="맑은 고딕"/>
                         </a:rPr>
@@ -32900,7 +32900,7 @@
                       <a:r>
                         <a:rPr sz="890" b="0">
                           <a:solidFill>
-                            <a:srgbClr val="1E293B"/>
+                            <a:srgbClr val="0F2942"/>
                           </a:solidFill>
                           <a:latin typeface="맑은 고딕"/>
                         </a:rPr>
@@ -32950,7 +32950,7 @@
                       <a:r>
                         <a:rPr sz="890" b="0">
                           <a:solidFill>
-                            <a:srgbClr val="1E293B"/>
+                            <a:srgbClr val="0F2942"/>
                           </a:solidFill>
                           <a:latin typeface="맑은 고딕"/>
                         </a:rPr>
@@ -33000,7 +33000,7 @@
                       <a:r>
                         <a:rPr sz="890" b="0">
                           <a:solidFill>
-                            <a:srgbClr val="1E293B"/>
+                            <a:srgbClr val="0F2942"/>
                           </a:solidFill>
                           <a:latin typeface="맑은 고딕"/>
                         </a:rPr>
@@ -33050,7 +33050,7 @@
                       <a:r>
                         <a:rPr sz="890" b="0">
                           <a:solidFill>
-                            <a:srgbClr val="1E293B"/>
+                            <a:srgbClr val="0F2942"/>
                           </a:solidFill>
                           <a:latin typeface="맑은 고딕"/>
                         </a:rPr>
@@ -33102,7 +33102,7 @@
                       <a:r>
                         <a:rPr sz="890" b="1">
                           <a:solidFill>
-                            <a:srgbClr val="1E293B"/>
+                            <a:srgbClr val="0F2942"/>
                           </a:solidFill>
                           <a:latin typeface="맑은 고딕"/>
                         </a:rPr>
@@ -33152,11 +33152,11 @@
                       <a:r>
                         <a:rPr sz="890" b="1">
                           <a:solidFill>
-                            <a:srgbClr val="1E293B"/>
-                          </a:solidFill>
-                          <a:latin typeface="맑은 고딕"/>
-                        </a:rPr>
-                        <a:t>실증DB 연계 수석</a:t>
+                            <a:srgbClr val="0F2942"/>
+                          </a:solidFill>
+                          <a:latin typeface="맑은 고딕"/>
+                        </a:rPr>
+                        <a:t>시험검증DB 연계 수석</a:t>
                       </a:r>
                     </a:p>
                   </a:txBody>
@@ -33252,7 +33252,7 @@
                       <a:r>
                         <a:rPr sz="890" b="0">
                           <a:solidFill>
-                            <a:srgbClr val="1E293B"/>
+                            <a:srgbClr val="0F2942"/>
                           </a:solidFill>
                           <a:latin typeface="맑은 고딕"/>
                         </a:rPr>
@@ -33302,7 +33302,7 @@
                       <a:r>
                         <a:rPr sz="890" b="0">
                           <a:solidFill>
-                            <a:srgbClr val="1E293B"/>
+                            <a:srgbClr val="0F2942"/>
                           </a:solidFill>
                           <a:latin typeface="맑은 고딕"/>
                         </a:rPr>
@@ -33352,7 +33352,7 @@
                       <a:r>
                         <a:rPr sz="890" b="0">
                           <a:solidFill>
-                            <a:srgbClr val="1E293B"/>
+                            <a:srgbClr val="0F2942"/>
                           </a:solidFill>
                           <a:latin typeface="맑은 고딕"/>
                         </a:rPr>
@@ -33402,7 +33402,7 @@
                       <a:r>
                         <a:rPr sz="890" b="0">
                           <a:solidFill>
-                            <a:srgbClr val="1E293B"/>
+                            <a:srgbClr val="0F2942"/>
                           </a:solidFill>
                           <a:latin typeface="맑은 고딕"/>
                         </a:rPr>
@@ -33452,11 +33452,11 @@
                       <a:r>
                         <a:rPr sz="890" b="0">
                           <a:solidFill>
-                            <a:srgbClr val="1E293B"/>
-                          </a:solidFill>
-                          <a:latin typeface="맑은 고딕"/>
-                        </a:rPr>
-                        <a:t>연구원 ProductLab 실증자료 DB 스키마 분석 및 연계 API 검증</a:t>
+                            <a:srgbClr val="0F2942"/>
+                          </a:solidFill>
+                          <a:latin typeface="맑은 고딕"/>
+                        </a:rPr>
+                        <a:t>연구원 PLM-Nexus 시험성적서 DB 스키마 분석 및 연계 API 검증</a:t>
                       </a:r>
                     </a:p>
                   </a:txBody>
@@ -33706,7 +33706,7 @@
             <a:r>
               <a:rPr sz="930" b="0">
                 <a:solidFill>
-                  <a:srgbClr val="1E293B"/>
+                  <a:srgbClr val="0F2942"/>
                 </a:solidFill>
                 <a:latin typeface="맑은 고딕"/>
               </a:rPr>
@@ -33725,7 +33725,7 @@
             <a:r>
               <a:rPr sz="930" b="0">
                 <a:solidFill>
-                  <a:srgbClr val="1E293B"/>
+                  <a:srgbClr val="0F2942"/>
                 </a:solidFill>
                 <a:latin typeface="맑은 고딕"/>
               </a:rPr>
@@ -33744,7 +33744,7 @@
             <a:r>
               <a:rPr sz="930" b="0">
                 <a:solidFill>
-                  <a:srgbClr val="1E293B"/>
+                  <a:srgbClr val="0F2942"/>
                 </a:solidFill>
                 <a:latin typeface="맑은 고딕"/>
               </a:rPr>
@@ -33892,7 +33892,7 @@
                 </a:solidFill>
                 <a:latin typeface="맑은 고딕"/>
               </a:rPr>
-              <a:t>7. 핵심 인력 변경 통제, 클라우드 리소스 탄력 확장 및 운영 인력 기술 이전 계획</a:t>
+              <a:t>7. 핵심 인력 변경 통제, 클라우드 리소스 인장강도 확장 및 운영 인력 기술 이전 계획</a:t>
             </a:r>
           </a:p>
         </p:txBody>
@@ -34062,7 +34062,7 @@
                 </a:solidFill>
                 <a:latin typeface="맑은 고딕"/>
               </a:rPr>
-              <a:t>한빛글로벌 SyncGuard AI 시스템 구축  |  자원 관리 계획서</a:t>
+              <a:t>한빛글로벌 SyncFlow AI 시스템 구축  |  자원 관리 계획서</a:t>
             </a:r>
           </a:p>
         </p:txBody>
@@ -34366,7 +34366,7 @@
             <a:r>
               <a:rPr sz="919" b="0">
                 <a:solidFill>
-                  <a:srgbClr val="1E293B"/>
+                  <a:srgbClr val="0F2942"/>
                 </a:solidFill>
                 <a:latin typeface="맑은 고딕"/>
               </a:rPr>
@@ -34385,7 +34385,7 @@
             <a:r>
               <a:rPr sz="919" b="0">
                 <a:solidFill>
-                  <a:srgbClr val="1E293B"/>
+                  <a:srgbClr val="0F2942"/>
                 </a:solidFill>
                 <a:latin typeface="맑은 고딕"/>
               </a:rPr>
@@ -34404,7 +34404,7 @@
             <a:r>
               <a:rPr sz="919" b="0">
                 <a:solidFill>
-                  <a:srgbClr val="1E293B"/>
+                  <a:srgbClr val="0F2942"/>
                 </a:solidFill>
                 <a:latin typeface="맑은 고딕"/>
               </a:rPr>
@@ -34423,11 +34423,11 @@
             <a:r>
               <a:rPr sz="919" b="0">
                 <a:solidFill>
-                  <a:srgbClr val="1E293B"/>
+                  <a:srgbClr val="0F2942"/>
                 </a:solidFill>
                 <a:latin typeface="맑은 고딕"/>
               </a:rPr>
-              <a:t>■ 불가피한 사유(퇴사·질병 등) 발생 시 교체 절차</a:t>
+              <a:t>■ 불가피한 사유(퇴사·귀책전가 등) 발생 시 교체 절차</a:t>
             </a:r>
           </a:p>
           <a:p>
@@ -34442,7 +34442,7 @@
             <a:r>
               <a:rPr sz="919" b="0">
                 <a:solidFill>
-                  <a:srgbClr val="1E293B"/>
+                  <a:srgbClr val="0F2942"/>
                 </a:solidFill>
                 <a:latin typeface="맑은 고딕"/>
               </a:rPr>
@@ -34461,7 +34461,7 @@
             <a:r>
               <a:rPr sz="919" b="0">
                 <a:solidFill>
-                  <a:srgbClr val="1E293B"/>
+                  <a:srgbClr val="0F2942"/>
                 </a:solidFill>
                 <a:latin typeface="맑은 고딕"/>
               </a:rPr>
@@ -34480,7 +34480,7 @@
             <a:r>
               <a:rPr sz="919" b="0">
                 <a:solidFill>
-                  <a:srgbClr val="1E293B"/>
+                  <a:srgbClr val="0F2942"/>
                 </a:solidFill>
                 <a:latin typeface="맑은 고딕"/>
               </a:rPr>
@@ -34624,7 +34624,7 @@
                 </a:solidFill>
                 <a:latin typeface="맑은 고딕"/>
               </a:rPr>
-              <a:t>대용량 미디어 OOM 방지 및 탄력적 증설</a:t>
+              <a:t>대용량 미디어 OOM 방지 및 인장강도적 증설</a:t>
             </a:r>
           </a:p>
         </p:txBody>
@@ -34704,7 +34704,7 @@
             <a:r>
               <a:rPr sz="919" b="0">
                 <a:solidFill>
-                  <a:srgbClr val="1E293B"/>
+                  <a:srgbClr val="0F2942"/>
                 </a:solidFill>
                 <a:latin typeface="맑은 고딕"/>
               </a:rPr>
@@ -34723,11 +34723,11 @@
             <a:r>
               <a:rPr sz="919" b="0">
                 <a:solidFill>
-                  <a:srgbClr val="1E293B"/>
+                  <a:srgbClr val="0F2942"/>
                 </a:solidFill>
                 <a:latin typeface="맑은 고딕"/>
               </a:rPr>
-              <a:t>• 고해상도 동영상(최대 수백 MB) 다중 업로드 시 FFmpeg 프레임 추출 및 OCR 처리 구간의 CPU/메모리 급증</a:t>
+              <a:t>• 고해상도 설계도면(최대 수백 MB) 다중 업로드 시 FFmpeg 프레임 추출 및 OCR 처리 구간의 CPU/메모리 급증</a:t>
             </a:r>
           </a:p>
           <a:p>
@@ -34742,7 +34742,7 @@
             <a:r>
               <a:rPr sz="919" b="0">
                 <a:solidFill>
-                  <a:srgbClr val="1E293B"/>
+                  <a:srgbClr val="0F2942"/>
                 </a:solidFill>
                 <a:latin typeface="맑은 고딕"/>
               </a:rPr>
@@ -34761,7 +34761,7 @@
             <a:r>
               <a:rPr sz="919" b="0">
                 <a:solidFill>
-                  <a:srgbClr val="1E293B"/>
+                  <a:srgbClr val="0F2942"/>
                 </a:solidFill>
                 <a:latin typeface="맑은 고딕"/>
               </a:rPr>
@@ -34780,11 +34780,11 @@
             <a:r>
               <a:rPr sz="919" b="0">
                 <a:solidFill>
-                  <a:srgbClr val="1E293B"/>
+                  <a:srgbClr val="0F2942"/>
                 </a:solidFill>
                 <a:latin typeface="맑은 고딕"/>
               </a:rPr>
-              <a:t>• syncguard-ai-agent(:18083) 컨테이너를 일반 웹 서버와 분리하여 고메모리 노드 그룹에 배치 및 동시 처리 큐(Queue) 제한</a:t>
+              <a:t>• syncflow-ai-agent(:18083) 컨테이너를 일반 웹 서버와 분리하여 고메모리 노드 그룹에 배치 및 동시 처리 큐(Queue) 제한</a:t>
             </a:r>
           </a:p>
           <a:p>
@@ -34799,7 +34799,7 @@
             <a:r>
               <a:rPr sz="919" b="0">
                 <a:solidFill>
-                  <a:srgbClr val="1E293B"/>
+                  <a:srgbClr val="0F2942"/>
                 </a:solidFill>
                 <a:latin typeface="맑은 고딕"/>
               </a:rPr>
@@ -34818,7 +34818,7 @@
             <a:r>
               <a:rPr sz="919" b="0">
                 <a:solidFill>
-                  <a:srgbClr val="1E293B"/>
+                  <a:srgbClr val="0F2942"/>
                 </a:solidFill>
                 <a:latin typeface="맑은 고딕"/>
               </a:rPr>
@@ -35042,7 +35042,7 @@
             <a:r>
               <a:rPr sz="919" b="0">
                 <a:solidFill>
-                  <a:srgbClr val="1E293B"/>
+                  <a:srgbClr val="0F2942"/>
                 </a:solidFill>
                 <a:latin typeface="맑은 고딕"/>
               </a:rPr>
@@ -35061,11 +35061,11 @@
             <a:r>
               <a:rPr sz="919" b="0">
                 <a:solidFill>
-                  <a:srgbClr val="1E293B"/>
+                  <a:srgbClr val="0F2942"/>
                 </a:solidFill>
                 <a:latin typeface="맑은 고딕"/>
               </a:rPr>
-              <a:t>• 현업 사용자(RA Lab·마케터 등 약 18명) : 클레임 문서/영상 업로드, 대조 뷰어 활용, 판정 리포트 다운로드 실습</a:t>
+              <a:t>• 현업 사용자(품질법무검증팀·구매담당자 등 약 18명) : 규격·계약 문서/영상 업로드, 대조 뷰어 활용, 판정 리포트 다운로드 실습</a:t>
             </a:r>
           </a:p>
           <a:p>
@@ -35080,7 +35080,7 @@
             <a:r>
               <a:rPr sz="919" b="0">
                 <a:solidFill>
-                  <a:srgbClr val="1E293B"/>
+                  <a:srgbClr val="0F2942"/>
                 </a:solidFill>
                 <a:latin typeface="맑은 고딕"/>
               </a:rPr>
@@ -35099,7 +35099,7 @@
             <a:r>
               <a:rPr sz="919" b="0">
                 <a:solidFill>
-                  <a:srgbClr val="1E293B"/>
+                  <a:srgbClr val="0F2942"/>
                 </a:solidFill>
                 <a:latin typeface="맑은 고딕"/>
               </a:rPr>
@@ -35118,7 +35118,7 @@
             <a:r>
               <a:rPr sz="919" b="0">
                 <a:solidFill>
-                  <a:srgbClr val="1E293B"/>
+                  <a:srgbClr val="0F2942"/>
                 </a:solidFill>
                 <a:latin typeface="맑은 고딕"/>
               </a:rPr>
@@ -35137,7 +35137,7 @@
             <a:r>
               <a:rPr sz="919" b="0">
                 <a:solidFill>
-                  <a:srgbClr val="1E293B"/>
+                  <a:srgbClr val="0F2942"/>
                 </a:solidFill>
                 <a:latin typeface="맑은 고딕"/>
               </a:rPr>
